--- a/it/slides/02-Architettura_dei_Calcolatori-Primo_Contatto_con_Assembly_RISC-V.pptx
+++ b/it/slides/02-Architettura_dei_Calcolatori-Primo_Contatto_con_Assembly_RISC-V.pptx
@@ -123,26 +123,26 @@
   <p:extLst>
     <p:ext uri="{521415D9-36F7-43E2-AB2F-B90AF26B5E84}">
       <p14:sectionLst xmlns:p14="http://schemas.microsoft.com/office/powerpoint/2010/main">
-        <p14:section name="Apertura" id="{a4ea25a2-4447-ae89-ffe8-150ddfaa905a}">
+        <p14:section name="Apertura" id="{f68af634-2d02-361d-3049-b95f91402a6f}">
           <p14:sldIdLst>
             <p14:sldId id="256"/>
             <p14:sldId id="257"/>
           </p14:sldIdLst>
         </p14:section>
-        <p14:section name="La macchina" id="{ef6102de-52ae-b2ad-7c2d-9fe5067883bd}">
+        <p14:section name="La macchina" id="{ce0fd65e-bb2c-f2ea-02ca-9b9f56a3fff1}">
           <p14:sldIdLst>
             <p14:sldId id="258"/>
             <p14:sldId id="259"/>
             <p14:sldId id="260"/>
           </p14:sldIdLst>
         </p14:section>
-        <p14:section name="La prima cartuccia" id="{07aeb4f5-80e0-fc96-00a1-81b803aba9b2}">
+        <p14:section name="La prima cartuccia" id="{fcbe9e1d-60f3-f207-5878-ac9f3ab5c8d0}">
           <p14:sldIdLst>
             <p14:sldId id="261"/>
             <p14:sldId id="262"/>
           </p14:sldIdLst>
         </p14:section>
-        <p14:section name="Leggere ciò che avete scritto" id="{28ab8559-7aaa-34e6-498a-41664caf55ca}">
+        <p14:section name="Leggere ciò che avete scritto" id="{ac621018-3dd0-280d-cb6e-b8e54d21724b}">
           <p14:sldIdLst>
             <p14:sldId id="263"/>
             <p14:sldId id="264"/>
@@ -151,7 +151,7 @@
             <p14:sldId id="267"/>
           </p14:sldIdLst>
         </p14:section>
-        <p14:section name="Che cosa viene dopo" id="{3d53bc26-c661-f0fe-2c8f-c50f6ea41903}">
+        <p14:section name="Che cosa viene dopo" id="{a5f28a3b-657b-6c72-86d8-74bb3ee572b4}">
           <p14:sldIdLst>
             <p14:sldId id="268"/>
             <p14:sldId id="269"/>
@@ -2844,7 +2844,7 @@
                 <a:ea typeface="Cambria" pitchFamily="34" charset="-122"/>
                 <a:cs typeface="Cambria" pitchFamily="34" charset="-120"/>
               </a:rPr>
-              <a:t>Primo contatto: l'assembly RISC-V su PRG32</a:t>
+              <a:t>Primo contatto: l'assembly RISC‑V su PRG32</a:t>
             </a:r>
             <a:endParaRPr lang="en-US" sz="4800" dirty="0"/>
           </a:p>
@@ -3020,7 +3020,63 @@
       </p:sp>
       <p:sp>
         <p:nvSpPr>
-          <p:cNvPr id="12" name="Shape 10"/>
+          <p:cNvPr id="12" name="Text 10"/>
+          <p:cNvSpPr txBox="1"/>
+          <p:nvPr/>
+        </p:nvSpPr>
+        <p:spPr>
+          <a:xfrm>
+            <a:off x="4693615" y="566928"/>
+            <a:ext cx="6949440" cy="640080"/>
+          </a:xfrm>
+          <a:prstGeom prst="rect">
+            <a:avLst/>
+          </a:prstGeom>
+          <a:noFill/>
+          <a:ln/>
+        </p:spPr>
+        <p:txBody>
+          <a:bodyPr wrap="square" lIns="0" tIns="0" rIns="0" bIns="0" rtlCol="0" anchor="t"/>
+          <a:lstStyle/>
+          <a:p>
+            <a:pPr algn="r" indent="0" marL="0">
+              <a:buNone/>
+            </a:pPr>
+            <a:r>
+              <a:rPr lang="en-US" sz="1300" dirty="0">
+                <a:solidFill>
+                  <a:srgbClr val="CFE3EA"/>
+                </a:solidFill>
+                <a:latin typeface="Calibri" pitchFamily="34" charset="0"/>
+                <a:ea typeface="Calibri" pitchFamily="34" charset="-122"/>
+                <a:cs typeface="Calibri" pitchFamily="34" charset="-120"/>
+              </a:rPr>
+              <a:t>Presentazione della lezione. I listati, il programma completo e come provarlo sono nella presentazione del codice:</a:t>
+            </a:r>
+            <a:endParaRPr lang="en-US" sz="1300" dirty="0"/>
+          </a:p>
+          <a:p>
+            <a:pPr algn="r" indent="0" marL="0">
+              <a:buNone/>
+            </a:pPr>
+            <a:r>
+              <a:rPr lang="en-US" sz="1300" dirty="0">
+                <a:solidFill>
+                  <a:srgbClr val="CFE3EA"/>
+                </a:solidFill>
+                <a:latin typeface="Calibri" pitchFamily="34" charset="0"/>
+                <a:ea typeface="Calibri" pitchFamily="34" charset="-122"/>
+                <a:cs typeface="Calibri" pitchFamily="34" charset="-120"/>
+              </a:rPr>
+              <a:t>02-Architettura_dei_Calcolatori-Primo_Contatto_con_Assembly_RISC-V-Codice.pptx</a:t>
+            </a:r>
+            <a:endParaRPr lang="en-US" sz="1300" dirty="0"/>
+          </a:p>
+        </p:txBody>
+      </p:sp>
+      <p:sp>
+        <p:nvSpPr>
+          <p:cNvPr id="13" name="Shape 11"/>
           <p:cNvSpPr/>
           <p:nvPr/>
         </p:nvSpPr>
@@ -3047,7 +3103,7 @@
       </p:sp>
       <p:pic>
         <p:nvPicPr>
-          <p:cNvPr id="13" name="Image 0" descr="/Users/raffaelemontella/devel/riscv-prg32/computer-architecture-with-prg32/tools/assets/lab1_step4_bar.png">    </p:cNvPr>
+          <p:cNvPr id="14" name="Image 0" descr="/Users/raffaelemontella/devel/riscv-prg32/computer-architecture-with-prg32/tools/assets/lab1_step4_bar.png">    </p:cNvPr>
           <p:cNvPicPr>
             <a:picLocks noChangeAspect="1"/>
           </p:cNvPicPr>

--- a/it/slides/02-Architettura_dei_Calcolatori-Primo_Contatto_con_Assembly_RISC-V.pptx
+++ b/it/slides/02-Architettura_dei_Calcolatori-Primo_Contatto_con_Assembly_RISC-V.pptx
@@ -123,26 +123,26 @@
   <p:extLst>
     <p:ext uri="{521415D9-36F7-43E2-AB2F-B90AF26B5E84}">
       <p14:sectionLst xmlns:p14="http://schemas.microsoft.com/office/powerpoint/2010/main">
-        <p14:section name="Apertura" id="{f68af634-2d02-361d-3049-b95f91402a6f}">
+        <p14:section name="Apertura" id="{434f30f8-fdd0-613a-0012-66d6febc5067}">
           <p14:sldIdLst>
             <p14:sldId id="256"/>
             <p14:sldId id="257"/>
           </p14:sldIdLst>
         </p14:section>
-        <p14:section name="La macchina" id="{ce0fd65e-bb2c-f2ea-02ca-9b9f56a3fff1}">
+        <p14:section name="La macchina" id="{b4a8e490-27de-56d8-b262-7b7d539017a4}">
           <p14:sldIdLst>
             <p14:sldId id="258"/>
             <p14:sldId id="259"/>
             <p14:sldId id="260"/>
           </p14:sldIdLst>
         </p14:section>
-        <p14:section name="La prima cartuccia" id="{fcbe9e1d-60f3-f207-5878-ac9f3ab5c8d0}">
+        <p14:section name="La prima cartuccia" id="{663d482a-4980-0891-eb94-70c7d48492f2}">
           <p14:sldIdLst>
             <p14:sldId id="261"/>
             <p14:sldId id="262"/>
           </p14:sldIdLst>
         </p14:section>
-        <p14:section name="Leggere ciò che avete scritto" id="{ac621018-3dd0-280d-cb6e-b8e54d21724b}">
+        <p14:section name="Leggere ciò che avete scritto" id="{0d85e61b-8ba5-91e5-2c1f-d167d2783575}">
           <p14:sldIdLst>
             <p14:sldId id="263"/>
             <p14:sldId id="264"/>
@@ -151,7 +151,7 @@
             <p14:sldId id="267"/>
           </p14:sldIdLst>
         </p14:section>
-        <p14:section name="Che cosa viene dopo" id="{a5f28a3b-657b-6c72-86d8-74bb3ee572b4}">
+        <p14:section name="Che cosa viene dopo" id="{882cd071-16c5-3085-20e0-6802505a22bd}">
           <p14:sldIdLst>
             <p14:sldId id="268"/>
             <p14:sldId id="269"/>
@@ -565,6 +565,8 @@
             <a:r>
               <a:rPr lang="en-US" dirty="0"/>
               <a:t>È la prima lezione in cui scrivete un programma, e viene di proposito prima di ogni teoria. In due ore costruite quattro piccole cartucce, ognuna un programma completo che gira. Oggi non capirete ogni dettaglio, e nessuno se lo aspetta: lo scopo è vedere al lavoro i registri, la memoria e una chiamata di funzione, così che le lezioni successive abbiano qualcosa di concreto da spiegare. La citazione dà il tono: meno parole, più codice.
+Stato di apprendimento: DA COMPRENDERE OGGI, alla fine di questa lezione lo spiegate, lo seguite passo passo e lo applicate da soli; DA UTILIZZARE OGGI, oggi seguite e usate la ricetta; come funziona dentro si spiega più avanti, o non fa parte del corso; DA COMPRENDERE PIÙ AVANTI, riconoscete il nome e lo scopo; lo spiega una lezione successiva. Una slide senza etichetta è contesto: una storia, un esempio, una domanda, un esercizio.
+Stato di apprendimento di questa lezione. DA COMPRENDERE OGGI: registri, calcolo, trasferimento, salto; i registri; contratto init/update/draw; gli argomenti in a0 ... a7; perché si salva ra; indirizzo, valore, load, store; le istruzioni di base; le pseudo-istruzioni; un'istruzione è un numero; seguire a mano l'esecuzione. DA UTILIZZARE OGGI: la convenzione di chiamata (Lezione 18); le maschere di bit (Lezione 08) e, usati senza essere studiati nel corso, le direttive dell'assemblatore, gli strumenti di PRG32, le chiamate del runtime PRG32, il debugger di PRG32-QT, il programma completo. DA COMPRENDERE PIÙ AVANTI: la pila (Lezione 18); i modi di indirizzamento (Lezione 19); formati delle istruzioni (Lezione 19); l'esadecimale (Lezione 04); il complemento a due (Lezione 05); la virgola fissa (Lezione 06); l'algebra di Boole (Lezione 08); il sommatore (Lezione 09); dai volt ai bit (Lezione 10); latch e flip-flop (Lezione 13); il ciclo del processore (Lezione 19); il progetto Verm1 (Lezione 07). Una slide senza etichetta è contesto: una storia, un esempio, una domanda, un esercizio.
 Per il docente: Lezione nuova del 2026/27. È il turno «gioca» della spirale per tutta la prima metà del corso: ogni lezione successiva rimanda a qualcosa scritto qui. I quattro passi sono quelli verificati del laboratorio 05-asm-first-contact del libro di PRG32; eseguirli dal vivo (labs/run.sh 05-asm-first-contact/stepN_....S first).</a:t>
             </a:r>
             <a:endParaRPr lang="en-US" dirty="0"/>
@@ -654,6 +656,7 @@
             <a:r>
               <a:rPr lang="en-US" dirty="0"/>
               <a:t>Un'istruzione è un numero. addi t1, t1, 1 è la parola di 32 bit 0x00130313, e la striscia colorata ne mostra i campi: dodici bit per la costante 1, cinque per il registro sorgente (t1 è il registro numero 6), tre che dicono «somma», cinque per la destinazione, sette per il tipo di istruzione. Il formato non va imparato adesso. Tenete l'idea: l'assembly è una scrittura leggibile del codice macchina, e il processore legge questi campi con circuiti che imparerete a progettare.
+DA COMPRENDERE OGGI: un'istruzione è un numero. DA COMPRENDERE PIÙ AVANTI: formati delle istruzioni (si studia nella Lezione 19).
 Per il docente: Verifica: 0000 0000 0001 | 00110 | 000 | 00110 | 0010011 = 0000 0000 0001 0011 0000 0011 0001 0011 = 0x00130313. Non spiegare ora i formati; il punto è solo che un'istruzione è un dato. La Lezione 04 (informazione digitale) e le lezioni sul processore tornano su questa slide.</a:t>
             </a:r>
             <a:endParaRPr lang="en-US" dirty="0"/>
@@ -743,6 +746,7 @@
             <a:r>
               <a:rPr lang="en-US" dirty="0"/>
               <a:t>PRG32-QT esegue la stessa cartuccia sul portatile e può fermarsi tra due istruzioni qualsiasi, mostrando tutti i registri. Usatelo ora sul terzo passo: andate su update, mettete in pausa, ed eseguite una alla volta le quattro istruzioni di first_update, osservando t0 e t1. Prima di ogni pressione dite ad alta voce che cosa cambierà. L'ultima riga è una regola da ricordare: la scheda dice la verità sul tempo, PRG32-QT dice la verità su un registro.
+DA UTILIZZARE OGGI: il debugger di PRG32-QT (si usa, non si studia, in questo corso).
 Per il docente: Dimostrare dal vivo: caricare il passo 3, fermarsi su first_update, eseguire quattro passi. Chiedere agli studenti di prevedere ogni registro prima di premere il tasto.</a:t>
             </a:r>
             <a:endParaRPr lang="en-US" dirty="0"/>
@@ -832,6 +836,7 @@
             <a:r>
               <a:rPr lang="en-US" dirty="0"/>
               <a:t>Una traccia a mano: per ogni frame si scrive che cosa ogni istruzione lascia in t1 e in memoria. Nei primi frame non accade nulla di sorprendente. Guardate la riga evidenziata: al frame 256 il contatore diventa 256, eppure la larghezza della barra è 0, perché andi con 255 conserva solo gli otto bit bassi, e 256 in binario è un uno seguito da otto zeri. Tracciare a mano è lento e poco appariscente, ed è l'abilità di debug più utile che imparerete in questo corso.
+DA COMPRENDERE OGGI: seguire a mano l'esecuzione.
 Per il docente: La traccia a mano è l'abilità di debug più preziosa del corso. 256 = 1 0000 0000 in binario: gli otto bit bassi sono tutti zero, quindi la barra ricomincia.</a:t>
             </a:r>
             <a:endParaRPr lang="en-US" dirty="0"/>
@@ -921,6 +926,7 @@
             <a:r>
               <a:rPr lang="en-US" dirty="0"/>
               <a:t>Ogni riga è una cosa vista oggi, la domanda che solleva e dove si trova la risposta. Perché l'esadecimale? Lezioni 04 e 05. Come fa un registro a contenere un numero negativo? Lezione 05. Che cosa fa AND a trentadue bit in un colpo solo? Lezioni 08 e 09. Come fa un circuito a ricordare un bit? Lezioni 13 e 15. Come viene decodificato ed eseguito 0x00130313? Lezioni 18 e 19. L'ultima riga è il progetto: da tre funzioni e un rettangolo, un gioco intero. Conservate questa tabella: è la mappa del corso vista dal vostro programma.
+DA COMPRENDERE PIÙ AVANTI: l'esadecimale (si studia nella Lezione 04); il complemento a due (si studia nella Lezione 05); la virgola fissa (si studia nella Lezione 06); l'algebra di Boole (si studia nella Lezione 08); il sommatore (si studia nella Lezione 09); dai volt ai bit (si studia nella Lezione 10); latch e flip-flop (si studia nella Lezione 13); il ciclo del processore (si studia nella Lezione 19); il progetto Verm1 (si studia nella Lezione 07).
 Per il docente: È la mappa in avanti del corso. Conservarne una copia: ogni presentazione successiva si apre indicando una di queste righe. L'ultima riga è il progetto: Verm1 parte nella Lezione 07 esattamente dallo scheletro di oggi.</a:t>
             </a:r>
             <a:endParaRPr lang="en-US" dirty="0"/>
@@ -1279,6 +1285,7 @@
             <a:r>
               <a:rPr lang="en-US" dirty="0"/>
               <a:t>Quattro frasi contengono la lezione. Un processore RISC-V è fatto di trentadue registri e di un piccolo insieme di istruzioni che calcolano, spostano e saltano. Un gioco PRG32 sono tre funzioni, con gli argomenti da a0 ad a7, e una funzione che ne chiama un'altra salva ra. Le variabili vivono in memoria: la per l'indirizzo, lw e sw per il valore. Un'istruzione è un numero a 32 bit, e l'assembly è la sua scrittura leggibile. La prossima lezione fa un passo indietro e racconta la storia che ha portato a questa macchina.
+Stato di apprendimento, riepilogo. DA COMPRENDERE OGGI: registri, calcolo, trasferimento, salto; i registri; contratto init/update/draw; gli argomenti in a0 ... a7; perché si salva ra; indirizzo, valore, load, store; le istruzioni di base; le pseudo-istruzioni; un'istruzione è un numero; seguire a mano l'esecuzione. DA UTILIZZARE OGGI: la convenzione di chiamata (Lezione 18); le maschere di bit (Lezione 08) e, usati senza essere studiati nel corso, le direttive dell'assemblatore, gli strumenti di PRG32, le chiamate del runtime PRG32, il debugger di PRG32-QT, il programma completo. DA COMPRENDERE PIÙ AVANTI: la pila (Lezione 18); i modi di indirizzamento (Lezione 19); formati delle istruzioni (Lezione 19); l'esadecimale (Lezione 04); il complemento a due (Lezione 05); la virgola fissa (Lezione 06); l'algebra di Boole (Lezione 08); il sommatore (Lezione 09); dai volt ai bit (Lezione 10); latch e flip-flop (Lezione 13); il ciclo del processore (Lezione 19); il progetto Verm1 (Lezione 07). Una slide senza etichetta è contesto: una storia, un esempio, una domanda, un esercizio.
 Per il docente: Prossima lezione: la storia che ha portato a questa macchina.</a:t>
             </a:r>
             <a:endParaRPr lang="en-US" dirty="0"/>
@@ -1457,6 +1464,7 @@
             <a:r>
               <a:rPr lang="en-US" dirty="0"/>
               <a:t>L'intera macchina in quattro riquadri. Ci sono 32 registri, ciascuno con un valore a 32 bit, e il processore sa calcolare solo su ciò che contengono. Ci sono tre tipi di istruzione. Calcolare: aritmetica e logica tra registri, come add o addi. Spostare: trasferimenti tra un registro e la memoria, lw per caricare una parola e sw per memorizzarla; nient'altro tocca la memoria. Saltare: cambi dell'istruzione che verrà eseguita dopo. Tutto ciò che fa un calcolatore è una lunga sequenza di questi tre tipi.
+DA COMPRENDERE OGGI: registri, calcolo, trasferimento, salto.
 Per il docente: Questa è quasi tutta la macchina. La ricchezza del calcolo non viene da un insieme di istruzioni ampio, ma dal combinarne uno piccolo in lunghe sequenze.</a:t>
             </a:r>
             <a:endParaRPr lang="en-US" dirty="0"/>
@@ -1546,6 +1554,7 @@
             <a:r>
               <a:rPr lang="en-US" dirty="0"/>
               <a:t>I registri hanno nomi che dicono come si usano. Da a0 ad a7 portano gli argomenti di una chiamata, e a0 riporta indietro il risultato. Da t0 a t6 sono temporanei, liberi da usare e non conservati da una chiamata. Da s0 a s11 sono conservati. ra contiene l'indirizzo di ritorno, sp la cima dello stack, e zero si legge sempre 0. Leggete con cura la didascalia: questi ruoli non sono incisi nell'hardware. Sono un accordo, la convenzione di chiamata, ed è ciò che permette al vostro assembly e al codice C del framework di chiamarsi a vicenda.
+DA COMPRENDERE OGGI: i registri. DA UTILIZZARE OGGI: la convenzione di chiamata (si studia nella Lezione 18).
 Per il docente: I ruoli non sono fissati dall'hardware ma da un accordo: la convenzione di chiamata, o ABI. Rispettarla è ciò che permette al vostro assembly e al codice C del framework di chiamarsi a vicenda.</a:t>
             </a:r>
             <a:endParaRPr lang="en-US" dirty="0"/>
@@ -1634,7 +1643,8 @@
           <a:p>
             <a:r>
               <a:rPr lang="en-US" dirty="0"/>
-              <a:t>Il contratto con PRG32 è fatto di tre funzioni che scrivete voi. init viene chiamata una volta, all'avvio della cartuccia, per preparare lo stato. update viene chiamata una volta per frame, per leggere l'ingresso e cambiare lo stato. draw viene chiamata una volta per frame, per trasformare lo stato in un'immagine. Il firmware le trova per nome: un prefisso scelto da voi, seguito da _init, _update e _draw. Tenete presente dal primo giorno la divisione dei compiti: update decide, draw mostra.</a:t>
+              <a:t>Il contratto con PRG32 è fatto di tre funzioni che scrivete voi. init viene chiamata una volta, all'avvio della cartuccia, per preparare lo stato. update viene chiamata una volta per frame, per leggere l'ingresso e cambiare lo stato. draw viene chiamata una volta per frame, per trasformare lo stato in un'immagine. Il firmware le trova per nome: un prefisso scelto da voi, seguito da _init, _update e _draw. Tenete presente dal primo giorno la divisione dei compiti: update decide, draw mostra.
+DA COMPRENDERE OGGI: contratto init/update/draw.</a:t>
             </a:r>
             <a:endParaRPr lang="en-US" dirty="0"/>
           </a:p>
@@ -1723,6 +1733,7 @@
             <a:r>
               <a:rPr lang="en-US" dirty="0"/>
               <a:t>Perché salvare ra? L'istruzione call scrive in ra l'indirizzo a cui tornare. Ma la funzione che chiamate può fare a sua volta delle chiamate, e ognuna sovrascrive ra. Perciò una funzione che ne chiama un'altra deve prima salvare in memoria il proprio ra: abbassa sp di 16 per fare spazio, il frame di stack, e memorizza ra in 12(sp). Dopo la chiamata fa il contrario. Il disegno mostra il frame: lo stack cresce verso gli indirizzi bassi. Dimenticare questa coppia di operazioni è il classico primo bug: la funzione ritorna nel posto sbagliato.
+DA COMPRENDERE OGGI: perché si salva ra. DA COMPRENDERE PIÙ AVANTI: la pila (si studia nella Lezione 18).
 Per il docente: La convenzione richiede che sp resti allineato a 16 byte tra una chiamata e l'altra: per questo il frame è di 16 byte anche se ne servono solo 4. Lo stack è trattato formalmente nelle lezioni sulla memoria e sui sottoprogrammi.</a:t>
             </a:r>
             <a:endParaRPr lang="en-US" dirty="0"/>
@@ -1812,6 +1823,7 @@
             <a:r>
               <a:rPr lang="en-US" dirty="0"/>
               <a:t>Questa slide separa due idee che i principianti confondono: l'indirizzo e il valore. Dopo la, t0 contiene dove vive il contatore. Dopo lw, t1 contiene che cosa vi è memorizzato, 41 nel disegno. addi porta a 42 la copia nel registro, e la memoria dice ancora 41 finché sw non la riscrive. Seguite le due frecce. Un'abitudine pratica dal riquadro a destra: nei commenti scrivete per ogni registro se contiene un INDIRIZZO o un VALORE. Previene l'errore più comune del primo mese.
+DA COMPRENDERE OGGI: indirizzo, valore, load, store. DA COMPRENDERE PIÙ AVANTI: i modi di indirizzamento (si studia nella Lezione 19).
 Per il docente: Un'etichetta dà un nome a una locazione. la dà la locazione, lw dà il contenuto. È così che funziona, in ultima analisi, ogni variabile di ogni programma; ci si torna formalmente con i modi di indirizzamento.</a:t>
             </a:r>
             <a:endParaRPr lang="en-US" dirty="0"/>
@@ -1901,6 +1913,7 @@
             <a:r>
               <a:rPr lang="en-US" dirty="0"/>
               <a:t>Cinque famiglie coprono tutto ciò che avete battuto: aritmetica (add, sub), logica (and, or, xor), le forme con immediato che prendono una piccola costante (addi, andi), memoria (lw, sw) e controllo (call, ret). In ogni istruzione il risultato va nel primo registro nominato: add t0, t1, t2 mette t1 + t2 in t0. L'insieme di base ha circa quaranta istruzioni, e ne avete già incontrato un quarto.
+DA COMPRENDERE OGGI: le istruzioni di base.
 Per il docente: Il risultato va nel primo registro. L'insieme di base delle istruzioni intere di RISC-V (RV32I) ha circa quaranta istruzioni; ne avete già incontrato un quarto.</a:t>
             </a:r>
             <a:endParaRPr lang="en-US" dirty="0"/>
@@ -1990,6 +2003,7 @@
             <a:r>
               <a:rPr lang="en-US" dirty="0"/>
               <a:t>Alcune delle istruzioni che avete scritto nel processore non esistono: sono pseudo-istruzioni, scorciatoie che l'assemblatore espande. li t0, 42 diventa addi t0, zero, 42; mv è una addi con 0; ret è un salto all'indirizzo in ra; beqz è un confronto con il registro zero. Notate quante volte zero compare nella colonna centrale: un registro che vale sempre 0 permette a un insieme di istruzioni piccolo di fare il lavoro di uno più grande.
+DA COMPRENDERE OGGI: le pseudo-istruzioni.
 Per il docente: Una pseudo-istruzione non è un'operazione hardware a sé. È il registro zero a renderne possibili molte: un insieme di istruzioni piccolo, riusato con cura.</a:t>
             </a:r>
             <a:endParaRPr lang="en-US" dirty="0"/>
@@ -3127,6 +3141,420 @@
       </p:pic>
       <p:sp>
         <p:nvSpPr>
+          <p:cNvPr id="15" name="Shape 12"/>
+          <p:cNvSpPr/>
+          <p:nvPr/>
+        </p:nvSpPr>
+        <p:spPr>
+          <a:xfrm>
+            <a:off x="8910777" y="91440"/>
+            <a:ext cx="2732278" cy="274320"/>
+          </a:xfrm>
+          <a:prstGeom prst="rect">
+            <a:avLst/>
+          </a:prstGeom>
+          <a:solidFill>
+            <a:srgbClr val="F3E8FF"/>
+          </a:solidFill>
+          <a:ln w="12700">
+            <a:solidFill>
+              <a:srgbClr val="7E22CE"/>
+            </a:solidFill>
+            <a:prstDash val="dash"/>
+          </a:ln>
+        </p:spPr>
+      </p:sp>
+      <p:sp>
+        <p:nvSpPr>
+          <p:cNvPr id="16" name="Shape 13"/>
+          <p:cNvSpPr/>
+          <p:nvPr/>
+        </p:nvSpPr>
+        <p:spPr>
+          <a:xfrm>
+            <a:off x="8938209" y="128016"/>
+            <a:ext cx="45720" cy="45720"/>
+          </a:xfrm>
+          <a:prstGeom prst="rect">
+            <a:avLst/>
+          </a:prstGeom>
+          <a:solidFill>
+            <a:srgbClr val="7E22CE"/>
+          </a:solidFill>
+          <a:ln w="12700">
+            <a:solidFill>
+              <a:srgbClr val="7E22CE"/>
+            </a:solidFill>
+            <a:prstDash val="solid"/>
+          </a:ln>
+        </p:spPr>
+      </p:sp>
+      <p:sp>
+        <p:nvSpPr>
+          <p:cNvPr id="17" name="Shape 14"/>
+          <p:cNvSpPr/>
+          <p:nvPr/>
+        </p:nvSpPr>
+        <p:spPr>
+          <a:xfrm>
+            <a:off x="8938209" y="205740"/>
+            <a:ext cx="45720" cy="45720"/>
+          </a:xfrm>
+          <a:prstGeom prst="rect">
+            <a:avLst/>
+          </a:prstGeom>
+          <a:solidFill>
+            <a:srgbClr val="7E22CE"/>
+          </a:solidFill>
+          <a:ln w="12700">
+            <a:solidFill>
+              <a:srgbClr val="7E22CE"/>
+            </a:solidFill>
+            <a:prstDash val="solid"/>
+          </a:ln>
+        </p:spPr>
+      </p:sp>
+      <p:sp>
+        <p:nvSpPr>
+          <p:cNvPr id="18" name="Shape 15"/>
+          <p:cNvSpPr/>
+          <p:nvPr/>
+        </p:nvSpPr>
+        <p:spPr>
+          <a:xfrm>
+            <a:off x="8938209" y="283464"/>
+            <a:ext cx="45720" cy="45720"/>
+          </a:xfrm>
+          <a:prstGeom prst="rect">
+            <a:avLst/>
+          </a:prstGeom>
+          <a:solidFill>
+            <a:srgbClr val="7E22CE"/>
+          </a:solidFill>
+          <a:ln w="12700">
+            <a:solidFill>
+              <a:srgbClr val="7E22CE"/>
+            </a:solidFill>
+            <a:prstDash val="solid"/>
+          </a:ln>
+        </p:spPr>
+      </p:sp>
+      <p:pic>
+        <p:nvPicPr>
+          <p:cNvPr id="19" name="Image 1" descr="preencoded.png">    </p:cNvPr>
+          <p:cNvPicPr>
+            <a:picLocks noChangeAspect="1"/>
+          </p:cNvPicPr>
+          <p:nvPr/>
+        </p:nvPicPr>
+        <p:blipFill>
+          <a:blip r:embed="rId2"/>
+          <a:stretch>
+            <a:fillRect/>
+          </a:stretch>
+        </p:blipFill>
+        <p:spPr>
+          <a:xfrm>
+            <a:off x="9038793" y="128016"/>
+            <a:ext cx="201168" cy="201168"/>
+          </a:xfrm>
+          <a:prstGeom prst="rect">
+            <a:avLst/>
+          </a:prstGeom>
+        </p:spPr>
+      </p:pic>
+      <p:sp>
+        <p:nvSpPr>
+          <p:cNvPr id="20" name="Text 16"/>
+          <p:cNvSpPr txBox="1"/>
+          <p:nvPr/>
+        </p:nvSpPr>
+        <p:spPr>
+          <a:xfrm>
+            <a:off x="9294825" y="91440"/>
+            <a:ext cx="2311654" cy="274320"/>
+          </a:xfrm>
+          <a:prstGeom prst="rect">
+            <a:avLst/>
+          </a:prstGeom>
+          <a:noFill/>
+          <a:ln/>
+        </p:spPr>
+        <p:txBody>
+          <a:bodyPr wrap="square" lIns="0" tIns="0" rIns="0" bIns="0" rtlCol="0" anchor="ctr"/>
+          <a:lstStyle/>
+          <a:p>
+            <a:pPr indent="0" marL="0">
+              <a:buNone/>
+            </a:pPr>
+            <a:r>
+              <a:rPr lang="en-US" sz="1100" b="1" dirty="0">
+                <a:solidFill>
+                  <a:srgbClr val="6B21A8"/>
+                </a:solidFill>
+                <a:latin typeface="Calibri" pitchFamily="34" charset="0"/>
+                <a:ea typeface="Calibri" pitchFamily="34" charset="-122"/>
+                <a:cs typeface="Calibri" pitchFamily="34" charset="-120"/>
+              </a:rPr>
+              <a:t>DA COMPRENDERE PIÙ AVANTI</a:t>
+            </a:r>
+            <a:endParaRPr lang="en-US" sz="1100" dirty="0"/>
+          </a:p>
+        </p:txBody>
+      </p:sp>
+      <p:sp>
+        <p:nvSpPr>
+          <p:cNvPr id="21" name="Shape 17"/>
+          <p:cNvSpPr/>
+          <p:nvPr/>
+        </p:nvSpPr>
+        <p:spPr>
+          <a:xfrm>
+            <a:off x="6675069" y="91440"/>
+            <a:ext cx="2125980" cy="274320"/>
+          </a:xfrm>
+          <a:prstGeom prst="rect">
+            <a:avLst/>
+          </a:prstGeom>
+          <a:solidFill>
+            <a:srgbClr val="FEF3C7"/>
+          </a:solidFill>
+          <a:ln w="12700">
+            <a:solidFill>
+              <a:srgbClr val="B45309"/>
+            </a:solidFill>
+            <a:prstDash val="solid"/>
+          </a:ln>
+        </p:spPr>
+      </p:sp>
+      <p:sp>
+        <p:nvSpPr>
+          <p:cNvPr id="22" name="Shape 18"/>
+          <p:cNvSpPr/>
+          <p:nvPr/>
+        </p:nvSpPr>
+        <p:spPr>
+          <a:xfrm>
+            <a:off x="6675069" y="91440"/>
+            <a:ext cx="27432" cy="274320"/>
+          </a:xfrm>
+          <a:prstGeom prst="rect">
+            <a:avLst/>
+          </a:prstGeom>
+          <a:solidFill>
+            <a:srgbClr val="B45309"/>
+          </a:solidFill>
+          <a:ln w="12700">
+            <a:solidFill>
+              <a:srgbClr val="B45309"/>
+            </a:solidFill>
+            <a:prstDash val="solid"/>
+          </a:ln>
+        </p:spPr>
+      </p:sp>
+      <p:sp>
+        <p:nvSpPr>
+          <p:cNvPr id="23" name="Shape 19"/>
+          <p:cNvSpPr/>
+          <p:nvPr/>
+        </p:nvSpPr>
+        <p:spPr>
+          <a:xfrm>
+            <a:off x="6729933" y="91440"/>
+            <a:ext cx="27432" cy="274320"/>
+          </a:xfrm>
+          <a:prstGeom prst="rect">
+            <a:avLst/>
+          </a:prstGeom>
+          <a:solidFill>
+            <a:srgbClr val="B45309"/>
+          </a:solidFill>
+          <a:ln w="12700">
+            <a:solidFill>
+              <a:srgbClr val="B45309"/>
+            </a:solidFill>
+            <a:prstDash val="solid"/>
+          </a:ln>
+        </p:spPr>
+      </p:sp>
+      <p:pic>
+        <p:nvPicPr>
+          <p:cNvPr id="24" name="Image 2" descr="preencoded.png">    </p:cNvPr>
+          <p:cNvPicPr>
+            <a:picLocks noChangeAspect="1"/>
+          </p:cNvPicPr>
+          <p:nvPr/>
+        </p:nvPicPr>
+        <p:blipFill>
+          <a:blip r:embed="rId3"/>
+          <a:stretch>
+            <a:fillRect/>
+          </a:stretch>
+        </p:blipFill>
+        <p:spPr>
+          <a:xfrm>
+            <a:off x="6803085" y="128016"/>
+            <a:ext cx="201168" cy="201168"/>
+          </a:xfrm>
+          <a:prstGeom prst="rect">
+            <a:avLst/>
+          </a:prstGeom>
+        </p:spPr>
+      </p:pic>
+      <p:sp>
+        <p:nvSpPr>
+          <p:cNvPr id="25" name="Text 20"/>
+          <p:cNvSpPr txBox="1"/>
+          <p:nvPr/>
+        </p:nvSpPr>
+        <p:spPr>
+          <a:xfrm>
+            <a:off x="7059117" y="91440"/>
+            <a:ext cx="1705356" cy="274320"/>
+          </a:xfrm>
+          <a:prstGeom prst="rect">
+            <a:avLst/>
+          </a:prstGeom>
+          <a:noFill/>
+          <a:ln/>
+        </p:spPr>
+        <p:txBody>
+          <a:bodyPr wrap="square" lIns="0" tIns="0" rIns="0" bIns="0" rtlCol="0" anchor="ctr"/>
+          <a:lstStyle/>
+          <a:p>
+            <a:pPr indent="0" marL="0">
+              <a:buNone/>
+            </a:pPr>
+            <a:r>
+              <a:rPr lang="en-US" sz="1100" b="1" dirty="0">
+                <a:solidFill>
+                  <a:srgbClr val="92400E"/>
+                </a:solidFill>
+                <a:latin typeface="Calibri" pitchFamily="34" charset="0"/>
+                <a:ea typeface="Calibri" pitchFamily="34" charset="-122"/>
+                <a:cs typeface="Calibri" pitchFamily="34" charset="-120"/>
+              </a:rPr>
+              <a:t>DA UTILIZZARE OGGI</a:t>
+            </a:r>
+            <a:endParaRPr lang="en-US" sz="1100" dirty="0"/>
+          </a:p>
+        </p:txBody>
+      </p:sp>
+      <p:sp>
+        <p:nvSpPr>
+          <p:cNvPr id="26" name="Shape 21"/>
+          <p:cNvSpPr/>
+          <p:nvPr/>
+        </p:nvSpPr>
+        <p:spPr>
+          <a:xfrm>
+            <a:off x="4352747" y="91440"/>
+            <a:ext cx="2212594" cy="274320"/>
+          </a:xfrm>
+          <a:prstGeom prst="rect">
+            <a:avLst/>
+          </a:prstGeom>
+          <a:solidFill>
+            <a:srgbClr val="E0F2FE"/>
+          </a:solidFill>
+          <a:ln w="12700">
+            <a:solidFill>
+              <a:srgbClr val="0369A1"/>
+            </a:solidFill>
+            <a:prstDash val="solid"/>
+          </a:ln>
+        </p:spPr>
+      </p:sp>
+      <p:sp>
+        <p:nvSpPr>
+          <p:cNvPr id="27" name="Shape 22"/>
+          <p:cNvSpPr/>
+          <p:nvPr/>
+        </p:nvSpPr>
+        <p:spPr>
+          <a:xfrm>
+            <a:off x="4352747" y="91440"/>
+            <a:ext cx="73152" cy="274320"/>
+          </a:xfrm>
+          <a:prstGeom prst="rect">
+            <a:avLst/>
+          </a:prstGeom>
+          <a:solidFill>
+            <a:srgbClr val="0369A1"/>
+          </a:solidFill>
+          <a:ln w="12700">
+            <a:solidFill>
+              <a:srgbClr val="0369A1"/>
+            </a:solidFill>
+            <a:prstDash val="solid"/>
+          </a:ln>
+        </p:spPr>
+      </p:sp>
+      <p:pic>
+        <p:nvPicPr>
+          <p:cNvPr id="28" name="Image 3" descr="preencoded.png">    </p:cNvPr>
+          <p:cNvPicPr>
+            <a:picLocks noChangeAspect="1"/>
+          </p:cNvPicPr>
+          <p:nvPr/>
+        </p:nvPicPr>
+        <p:blipFill>
+          <a:blip r:embed="rId4"/>
+          <a:stretch>
+            <a:fillRect/>
+          </a:stretch>
+        </p:blipFill>
+        <p:spPr>
+          <a:xfrm>
+            <a:off x="4480763" y="128016"/>
+            <a:ext cx="201168" cy="201168"/>
+          </a:xfrm>
+          <a:prstGeom prst="rect">
+            <a:avLst/>
+          </a:prstGeom>
+        </p:spPr>
+      </p:pic>
+      <p:sp>
+        <p:nvSpPr>
+          <p:cNvPr id="29" name="Text 23"/>
+          <p:cNvSpPr txBox="1"/>
+          <p:nvPr/>
+        </p:nvSpPr>
+        <p:spPr>
+          <a:xfrm>
+            <a:off x="4736795" y="91440"/>
+            <a:ext cx="1791970" cy="274320"/>
+          </a:xfrm>
+          <a:prstGeom prst="rect">
+            <a:avLst/>
+          </a:prstGeom>
+          <a:noFill/>
+          <a:ln/>
+        </p:spPr>
+        <p:txBody>
+          <a:bodyPr wrap="square" lIns="0" tIns="0" rIns="0" bIns="0" rtlCol="0" anchor="ctr"/>
+          <a:lstStyle/>
+          <a:p>
+            <a:pPr indent="0" marL="0">
+              <a:buNone/>
+            </a:pPr>
+            <a:r>
+              <a:rPr lang="en-US" sz="1100" b="1" dirty="0">
+                <a:solidFill>
+                  <a:srgbClr val="075985"/>
+                </a:solidFill>
+                <a:latin typeface="Calibri" pitchFamily="34" charset="0"/>
+                <a:ea typeface="Calibri" pitchFamily="34" charset="-122"/>
+                <a:cs typeface="Calibri" pitchFamily="34" charset="-120"/>
+              </a:rPr>
+              <a:t>DA COMPRENDERE OGGI</a:t>
+            </a:r>
+            <a:endParaRPr lang="en-US" sz="1100" dirty="0"/>
+          </a:p>
+        </p:txBody>
+      </p:sp>
+      <p:sp>
+        <p:nvSpPr>
           <p:cNvPr id="25" name="Slide Number Placeholder 0"/>
           <p:cNvSpPr>
             <a:spLocks noGrp="1"/>
@@ -4280,6 +4708,324 @@
       </p:sp>
       <p:sp>
         <p:nvSpPr>
+          <p:cNvPr id="27" name="Shape 25"/>
+          <p:cNvSpPr/>
+          <p:nvPr/>
+        </p:nvSpPr>
+        <p:spPr>
+          <a:xfrm>
+            <a:off x="6175451" y="91440"/>
+            <a:ext cx="5467604" cy="274320"/>
+          </a:xfrm>
+          <a:prstGeom prst="rect">
+            <a:avLst/>
+          </a:prstGeom>
+          <a:solidFill>
+            <a:srgbClr val="F3E8FF"/>
+          </a:solidFill>
+          <a:ln w="12700">
+            <a:solidFill>
+              <a:srgbClr val="7E22CE"/>
+            </a:solidFill>
+            <a:prstDash val="dash"/>
+          </a:ln>
+        </p:spPr>
+      </p:sp>
+      <p:sp>
+        <p:nvSpPr>
+          <p:cNvPr id="28" name="Shape 26"/>
+          <p:cNvSpPr/>
+          <p:nvPr/>
+        </p:nvSpPr>
+        <p:spPr>
+          <a:xfrm>
+            <a:off x="6202883" y="128016"/>
+            <a:ext cx="45720" cy="45720"/>
+          </a:xfrm>
+          <a:prstGeom prst="rect">
+            <a:avLst/>
+          </a:prstGeom>
+          <a:solidFill>
+            <a:srgbClr val="7E22CE"/>
+          </a:solidFill>
+          <a:ln w="12700">
+            <a:solidFill>
+              <a:srgbClr val="7E22CE"/>
+            </a:solidFill>
+            <a:prstDash val="solid"/>
+          </a:ln>
+        </p:spPr>
+      </p:sp>
+      <p:sp>
+        <p:nvSpPr>
+          <p:cNvPr id="29" name="Shape 27"/>
+          <p:cNvSpPr/>
+          <p:nvPr/>
+        </p:nvSpPr>
+        <p:spPr>
+          <a:xfrm>
+            <a:off x="6202883" y="205740"/>
+            <a:ext cx="45720" cy="45720"/>
+          </a:xfrm>
+          <a:prstGeom prst="rect">
+            <a:avLst/>
+          </a:prstGeom>
+          <a:solidFill>
+            <a:srgbClr val="7E22CE"/>
+          </a:solidFill>
+          <a:ln w="12700">
+            <a:solidFill>
+              <a:srgbClr val="7E22CE"/>
+            </a:solidFill>
+            <a:prstDash val="solid"/>
+          </a:ln>
+        </p:spPr>
+      </p:sp>
+      <p:sp>
+        <p:nvSpPr>
+          <p:cNvPr id="30" name="Shape 28"/>
+          <p:cNvSpPr/>
+          <p:nvPr/>
+        </p:nvSpPr>
+        <p:spPr>
+          <a:xfrm>
+            <a:off x="6202883" y="283464"/>
+            <a:ext cx="45720" cy="45720"/>
+          </a:xfrm>
+          <a:prstGeom prst="rect">
+            <a:avLst/>
+          </a:prstGeom>
+          <a:solidFill>
+            <a:srgbClr val="7E22CE"/>
+          </a:solidFill>
+          <a:ln w="12700">
+            <a:solidFill>
+              <a:srgbClr val="7E22CE"/>
+            </a:solidFill>
+            <a:prstDash val="solid"/>
+          </a:ln>
+        </p:spPr>
+      </p:sp>
+      <p:pic>
+        <p:nvPicPr>
+          <p:cNvPr id="31" name="Image 0" descr="preencoded.png">    </p:cNvPr>
+          <p:cNvPicPr>
+            <a:picLocks noChangeAspect="1"/>
+          </p:cNvPicPr>
+          <p:nvPr/>
+        </p:nvPicPr>
+        <p:blipFill>
+          <a:blip r:embed="rId1"/>
+          <a:stretch>
+            <a:fillRect/>
+          </a:stretch>
+        </p:blipFill>
+        <p:spPr>
+          <a:xfrm>
+            <a:off x="6303467" y="128016"/>
+            <a:ext cx="201168" cy="201168"/>
+          </a:xfrm>
+          <a:prstGeom prst="rect">
+            <a:avLst/>
+          </a:prstGeom>
+        </p:spPr>
+      </p:pic>
+      <p:sp>
+        <p:nvSpPr>
+          <p:cNvPr id="32" name="Text 29"/>
+          <p:cNvSpPr txBox="1"/>
+          <p:nvPr/>
+        </p:nvSpPr>
+        <p:spPr>
+          <a:xfrm>
+            <a:off x="6559499" y="91440"/>
+            <a:ext cx="5046980" cy="274320"/>
+          </a:xfrm>
+          <a:prstGeom prst="rect">
+            <a:avLst/>
+          </a:prstGeom>
+          <a:noFill/>
+          <a:ln/>
+        </p:spPr>
+        <p:txBody>
+          <a:bodyPr wrap="square" lIns="0" tIns="0" rIns="0" bIns="0" rtlCol="0" anchor="ctr"/>
+          <a:lstStyle/>
+          <a:p>
+            <a:pPr indent="0" marL="0">
+              <a:buNone/>
+            </a:pPr>
+            <a:r>
+              <a:rPr lang="en-US" sz="1100" b="1" dirty="0">
+                <a:solidFill>
+                  <a:srgbClr val="6B21A8"/>
+                </a:solidFill>
+                <a:latin typeface="Calibri" pitchFamily="34" charset="0"/>
+                <a:ea typeface="Calibri" pitchFamily="34" charset="-122"/>
+                <a:cs typeface="Calibri" pitchFamily="34" charset="-120"/>
+              </a:rPr>
+              <a:t>DA COMPRENDERE PIÙ AVANTI</a:t>
+            </a:r>
+            <a:pPr indent="0" marL="0">
+              <a:buNone/>
+            </a:pPr>
+            <a:r>
+              <a:rPr lang="en-US" sz="1100" dirty="0">
+                <a:solidFill>
+                  <a:srgbClr val="6B21A8"/>
+                </a:solidFill>
+                <a:latin typeface="Calibri" pitchFamily="34" charset="0"/>
+                <a:ea typeface="Calibri" pitchFamily="34" charset="-122"/>
+                <a:cs typeface="Calibri" pitchFamily="34" charset="-120"/>
+              </a:rPr>
+              <a:t> · formati delle istruzioni</a:t>
+            </a:r>
+            <a:pPr indent="0" marL="0">
+              <a:buNone/>
+            </a:pPr>
+            <a:r>
+              <a:rPr lang="en-US" sz="1100" b="1" dirty="0">
+                <a:solidFill>
+                  <a:srgbClr val="6B21A8"/>
+                </a:solidFill>
+                <a:latin typeface="Calibri" pitchFamily="34" charset="0"/>
+                <a:ea typeface="Calibri" pitchFamily="34" charset="-122"/>
+                <a:cs typeface="Calibri" pitchFamily="34" charset="-120"/>
+              </a:rPr>
+              <a:t> → Lezione 19</a:t>
+            </a:r>
+            <a:endParaRPr lang="en-US" sz="1100" dirty="0"/>
+          </a:p>
+        </p:txBody>
+      </p:sp>
+      <p:sp>
+        <p:nvSpPr>
+          <p:cNvPr id="33" name="Shape 30"/>
+          <p:cNvSpPr/>
+          <p:nvPr/>
+        </p:nvSpPr>
+        <p:spPr>
+          <a:xfrm>
+            <a:off x="2014677" y="91440"/>
+            <a:ext cx="4051046" cy="274320"/>
+          </a:xfrm>
+          <a:prstGeom prst="rect">
+            <a:avLst/>
+          </a:prstGeom>
+          <a:solidFill>
+            <a:srgbClr val="E0F2FE"/>
+          </a:solidFill>
+          <a:ln w="12700">
+            <a:solidFill>
+              <a:srgbClr val="0369A1"/>
+            </a:solidFill>
+            <a:prstDash val="solid"/>
+          </a:ln>
+        </p:spPr>
+      </p:sp>
+      <p:sp>
+        <p:nvSpPr>
+          <p:cNvPr id="34" name="Shape 31"/>
+          <p:cNvSpPr/>
+          <p:nvPr/>
+        </p:nvSpPr>
+        <p:spPr>
+          <a:xfrm>
+            <a:off x="2014677" y="91440"/>
+            <a:ext cx="73152" cy="274320"/>
+          </a:xfrm>
+          <a:prstGeom prst="rect">
+            <a:avLst/>
+          </a:prstGeom>
+          <a:solidFill>
+            <a:srgbClr val="0369A1"/>
+          </a:solidFill>
+          <a:ln w="12700">
+            <a:solidFill>
+              <a:srgbClr val="0369A1"/>
+            </a:solidFill>
+            <a:prstDash val="solid"/>
+          </a:ln>
+        </p:spPr>
+      </p:sp>
+      <p:pic>
+        <p:nvPicPr>
+          <p:cNvPr id="35" name="Image 1" descr="preencoded.png">    </p:cNvPr>
+          <p:cNvPicPr>
+            <a:picLocks noChangeAspect="1"/>
+          </p:cNvPicPr>
+          <p:nvPr/>
+        </p:nvPicPr>
+        <p:blipFill>
+          <a:blip r:embed="rId2"/>
+          <a:stretch>
+            <a:fillRect/>
+          </a:stretch>
+        </p:blipFill>
+        <p:spPr>
+          <a:xfrm>
+            <a:off x="2142693" y="128016"/>
+            <a:ext cx="201168" cy="201168"/>
+          </a:xfrm>
+          <a:prstGeom prst="rect">
+            <a:avLst/>
+          </a:prstGeom>
+        </p:spPr>
+      </p:pic>
+      <p:sp>
+        <p:nvSpPr>
+          <p:cNvPr id="36" name="Text 32"/>
+          <p:cNvSpPr txBox="1"/>
+          <p:nvPr/>
+        </p:nvSpPr>
+        <p:spPr>
+          <a:xfrm>
+            <a:off x="2398725" y="91440"/>
+            <a:ext cx="3630422" cy="274320"/>
+          </a:xfrm>
+          <a:prstGeom prst="rect">
+            <a:avLst/>
+          </a:prstGeom>
+          <a:noFill/>
+          <a:ln/>
+        </p:spPr>
+        <p:txBody>
+          <a:bodyPr wrap="square" lIns="0" tIns="0" rIns="0" bIns="0" rtlCol="0" anchor="ctr"/>
+          <a:lstStyle/>
+          <a:p>
+            <a:pPr indent="0" marL="0">
+              <a:buNone/>
+            </a:pPr>
+            <a:r>
+              <a:rPr lang="en-US" sz="1100" b="1" dirty="0">
+                <a:solidFill>
+                  <a:srgbClr val="075985"/>
+                </a:solidFill>
+                <a:latin typeface="Calibri" pitchFamily="34" charset="0"/>
+                <a:ea typeface="Calibri" pitchFamily="34" charset="-122"/>
+                <a:cs typeface="Calibri" pitchFamily="34" charset="-120"/>
+              </a:rPr>
+              <a:t>DA COMPRENDERE OGGI</a:t>
+            </a:r>
+            <a:pPr indent="0" marL="0">
+              <a:buNone/>
+            </a:pPr>
+            <a:r>
+              <a:rPr lang="en-US" sz="1100" dirty="0">
+                <a:solidFill>
+                  <a:srgbClr val="075985"/>
+                </a:solidFill>
+                <a:latin typeface="Calibri" pitchFamily="34" charset="0"/>
+                <a:ea typeface="Calibri" pitchFamily="34" charset="-122"/>
+                <a:cs typeface="Calibri" pitchFamily="34" charset="-120"/>
+              </a:rPr>
+              <a:t> · un'istruzione è un numero</a:t>
+            </a:r>
+            <a:endParaRPr lang="en-US" sz="1100" dirty="0"/>
+          </a:p>
+        </p:txBody>
+      </p:sp>
+      <p:sp>
+        <p:nvSpPr>
           <p:cNvPr id="25" name="Slide Number Placeholder 0"/>
           <p:cNvSpPr>
             <a:spLocks noGrp="1"/>
@@ -4720,6 +5466,158 @@
               <a:t>Il debugger di PRG32-QT: codice, registri, memoria</a:t>
             </a:r>
             <a:endParaRPr lang="en-US" sz="1200" dirty="0"/>
+          </a:p>
+        </p:txBody>
+      </p:sp>
+      <p:sp>
+        <p:nvSpPr>
+          <p:cNvPr id="13" name="Shape 10"/>
+          <p:cNvSpPr/>
+          <p:nvPr/>
+        </p:nvSpPr>
+        <p:spPr>
+          <a:xfrm>
+            <a:off x="7809941" y="91440"/>
+            <a:ext cx="3833114" cy="274320"/>
+          </a:xfrm>
+          <a:prstGeom prst="rect">
+            <a:avLst/>
+          </a:prstGeom>
+          <a:solidFill>
+            <a:srgbClr val="FEF3C7"/>
+          </a:solidFill>
+          <a:ln w="12700">
+            <a:solidFill>
+              <a:srgbClr val="B45309"/>
+            </a:solidFill>
+            <a:prstDash val="solid"/>
+          </a:ln>
+        </p:spPr>
+      </p:sp>
+      <p:sp>
+        <p:nvSpPr>
+          <p:cNvPr id="14" name="Shape 11"/>
+          <p:cNvSpPr/>
+          <p:nvPr/>
+        </p:nvSpPr>
+        <p:spPr>
+          <a:xfrm>
+            <a:off x="7809941" y="91440"/>
+            <a:ext cx="27432" cy="274320"/>
+          </a:xfrm>
+          <a:prstGeom prst="rect">
+            <a:avLst/>
+          </a:prstGeom>
+          <a:solidFill>
+            <a:srgbClr val="B45309"/>
+          </a:solidFill>
+          <a:ln w="12700">
+            <a:solidFill>
+              <a:srgbClr val="B45309"/>
+            </a:solidFill>
+            <a:prstDash val="solid"/>
+          </a:ln>
+        </p:spPr>
+      </p:sp>
+      <p:sp>
+        <p:nvSpPr>
+          <p:cNvPr id="15" name="Shape 12"/>
+          <p:cNvSpPr/>
+          <p:nvPr/>
+        </p:nvSpPr>
+        <p:spPr>
+          <a:xfrm>
+            <a:off x="7864805" y="91440"/>
+            <a:ext cx="27432" cy="274320"/>
+          </a:xfrm>
+          <a:prstGeom prst="rect">
+            <a:avLst/>
+          </a:prstGeom>
+          <a:solidFill>
+            <a:srgbClr val="B45309"/>
+          </a:solidFill>
+          <a:ln w="12700">
+            <a:solidFill>
+              <a:srgbClr val="B45309"/>
+            </a:solidFill>
+            <a:prstDash val="solid"/>
+          </a:ln>
+        </p:spPr>
+      </p:sp>
+      <p:pic>
+        <p:nvPicPr>
+          <p:cNvPr id="16" name="Image 1" descr="preencoded.png">    </p:cNvPr>
+          <p:cNvPicPr>
+            <a:picLocks noChangeAspect="1"/>
+          </p:cNvPicPr>
+          <p:nvPr/>
+        </p:nvPicPr>
+        <p:blipFill>
+          <a:blip r:embed="rId2"/>
+          <a:stretch>
+            <a:fillRect/>
+          </a:stretch>
+        </p:blipFill>
+        <p:spPr>
+          <a:xfrm>
+            <a:off x="7937957" y="128016"/>
+            <a:ext cx="201168" cy="201168"/>
+          </a:xfrm>
+          <a:prstGeom prst="rect">
+            <a:avLst/>
+          </a:prstGeom>
+        </p:spPr>
+      </p:pic>
+      <p:sp>
+        <p:nvSpPr>
+          <p:cNvPr id="17" name="Text 13"/>
+          <p:cNvSpPr txBox="1"/>
+          <p:nvPr/>
+        </p:nvSpPr>
+        <p:spPr>
+          <a:xfrm>
+            <a:off x="8193989" y="91440"/>
+            <a:ext cx="3412490" cy="274320"/>
+          </a:xfrm>
+          <a:prstGeom prst="rect">
+            <a:avLst/>
+          </a:prstGeom>
+          <a:noFill/>
+          <a:ln/>
+        </p:spPr>
+        <p:txBody>
+          <a:bodyPr wrap="square" lIns="0" tIns="0" rIns="0" bIns="0" rtlCol="0" anchor="ctr"/>
+          <a:lstStyle/>
+          <a:p>
+            <a:pPr indent="0" marL="0">
+              <a:buNone/>
+            </a:pPr>
+            <a:r>
+              <a:rPr lang="en-US" sz="1100" b="1" dirty="0">
+                <a:solidFill>
+                  <a:srgbClr val="92400E"/>
+                </a:solidFill>
+                <a:latin typeface="Calibri" pitchFamily="34" charset="0"/>
+                <a:ea typeface="Calibri" pitchFamily="34" charset="-122"/>
+                <a:cs typeface="Calibri" pitchFamily="34" charset="-120"/>
+              </a:rPr>
+              <a:t>DA UTILIZZARE OGGI</a:t>
+            </a:r>
+            <a:pPr indent="0" marL="0">
+              <a:buNone/>
+            </a:pPr>
+            <a:r>
+              <a:rPr lang="en-US" sz="1100" dirty="0">
+                <a:solidFill>
+                  <a:srgbClr val="92400E"/>
+                </a:solidFill>
+                <a:latin typeface="Calibri" pitchFamily="34" charset="0"/>
+                <a:ea typeface="Calibri" pitchFamily="34" charset="-122"/>
+                <a:cs typeface="Calibri" pitchFamily="34" charset="-120"/>
+              </a:rPr>
+              <a:t> · il debugger di PRG32-QT</a:t>
+            </a:r>
+            <a:endParaRPr lang="en-US" sz="1100" dirty="0"/>
           </a:p>
         </p:txBody>
       </p:sp>
@@ -6621,6 +7519,133 @@
       </p:sp>
       <p:sp>
         <p:nvSpPr>
+          <p:cNvPr id="5" name="Shape 2"/>
+          <p:cNvSpPr/>
+          <p:nvPr/>
+        </p:nvSpPr>
+        <p:spPr>
+          <a:xfrm>
+            <a:off x="7460691" y="91440"/>
+            <a:ext cx="4182364" cy="274320"/>
+          </a:xfrm>
+          <a:prstGeom prst="rect">
+            <a:avLst/>
+          </a:prstGeom>
+          <a:solidFill>
+            <a:srgbClr val="E0F2FE"/>
+          </a:solidFill>
+          <a:ln w="12700">
+            <a:solidFill>
+              <a:srgbClr val="0369A1"/>
+            </a:solidFill>
+            <a:prstDash val="solid"/>
+          </a:ln>
+        </p:spPr>
+      </p:sp>
+      <p:sp>
+        <p:nvSpPr>
+          <p:cNvPr id="6" name="Shape 3"/>
+          <p:cNvSpPr/>
+          <p:nvPr/>
+        </p:nvSpPr>
+        <p:spPr>
+          <a:xfrm>
+            <a:off x="7460691" y="91440"/>
+            <a:ext cx="73152" cy="274320"/>
+          </a:xfrm>
+          <a:prstGeom prst="rect">
+            <a:avLst/>
+          </a:prstGeom>
+          <a:solidFill>
+            <a:srgbClr val="0369A1"/>
+          </a:solidFill>
+          <a:ln w="12700">
+            <a:solidFill>
+              <a:srgbClr val="0369A1"/>
+            </a:solidFill>
+            <a:prstDash val="solid"/>
+          </a:ln>
+        </p:spPr>
+      </p:sp>
+      <p:pic>
+        <p:nvPicPr>
+          <p:cNvPr id="7" name="Image 0" descr="preencoded.png">    </p:cNvPr>
+          <p:cNvPicPr>
+            <a:picLocks noChangeAspect="1"/>
+          </p:cNvPicPr>
+          <p:nvPr/>
+        </p:nvPicPr>
+        <p:blipFill>
+          <a:blip r:embed="rId1"/>
+          <a:stretch>
+            <a:fillRect/>
+          </a:stretch>
+        </p:blipFill>
+        <p:spPr>
+          <a:xfrm>
+            <a:off x="7588707" y="128016"/>
+            <a:ext cx="201168" cy="201168"/>
+          </a:xfrm>
+          <a:prstGeom prst="rect">
+            <a:avLst/>
+          </a:prstGeom>
+        </p:spPr>
+      </p:pic>
+      <p:sp>
+        <p:nvSpPr>
+          <p:cNvPr id="8" name="Text 4"/>
+          <p:cNvSpPr txBox="1"/>
+          <p:nvPr/>
+        </p:nvSpPr>
+        <p:spPr>
+          <a:xfrm>
+            <a:off x="7844739" y="91440"/>
+            <a:ext cx="3761740" cy="274320"/>
+          </a:xfrm>
+          <a:prstGeom prst="rect">
+            <a:avLst/>
+          </a:prstGeom>
+          <a:noFill/>
+          <a:ln/>
+        </p:spPr>
+        <p:txBody>
+          <a:bodyPr wrap="square" lIns="0" tIns="0" rIns="0" bIns="0" rtlCol="0" anchor="ctr"/>
+          <a:lstStyle/>
+          <a:p>
+            <a:pPr indent="0" marL="0">
+              <a:buNone/>
+            </a:pPr>
+            <a:r>
+              <a:rPr lang="en-US" sz="1100" b="1" dirty="0">
+                <a:solidFill>
+                  <a:srgbClr val="075985"/>
+                </a:solidFill>
+                <a:latin typeface="Calibri" pitchFamily="34" charset="0"/>
+                <a:ea typeface="Calibri" pitchFamily="34" charset="-122"/>
+                <a:cs typeface="Calibri" pitchFamily="34" charset="-120"/>
+              </a:rPr>
+              <a:t>DA COMPRENDERE OGGI</a:t>
+            </a:r>
+            <a:pPr indent="0" marL="0">
+              <a:buNone/>
+            </a:pPr>
+            <a:r>
+              <a:rPr lang="en-US" sz="1100" dirty="0">
+                <a:solidFill>
+                  <a:srgbClr val="075985"/>
+                </a:solidFill>
+                <a:latin typeface="Calibri" pitchFamily="34" charset="0"/>
+                <a:ea typeface="Calibri" pitchFamily="34" charset="-122"/>
+                <a:cs typeface="Calibri" pitchFamily="34" charset="-120"/>
+              </a:rPr>
+              <a:t> · seguire a mano l'esecuzione</a:t>
+            </a:r>
+            <a:endParaRPr lang="en-US" sz="1100" dirty="0"/>
+          </a:p>
+        </p:txBody>
+      </p:sp>
+      <p:sp>
+        <p:nvSpPr>
           <p:cNvPr id="25" name="Slide Number Placeholder 0"/>
           <p:cNvSpPr>
             <a:spLocks noGrp="1"/>
@@ -8824,6 +9849,183 @@
           </a:graphicData>
         </a:graphic>
       </p:graphicFrame>
+      <p:sp>
+        <p:nvSpPr>
+          <p:cNvPr id="4" name="Shape 1"/>
+          <p:cNvSpPr/>
+          <p:nvPr/>
+        </p:nvSpPr>
+        <p:spPr>
+          <a:xfrm>
+            <a:off x="7726121" y="91440"/>
+            <a:ext cx="3916934" cy="274320"/>
+          </a:xfrm>
+          <a:prstGeom prst="rect">
+            <a:avLst/>
+          </a:prstGeom>
+          <a:solidFill>
+            <a:srgbClr val="F3E8FF"/>
+          </a:solidFill>
+          <a:ln w="12700">
+            <a:solidFill>
+              <a:srgbClr val="7E22CE"/>
+            </a:solidFill>
+            <a:prstDash val="dash"/>
+          </a:ln>
+        </p:spPr>
+      </p:sp>
+      <p:sp>
+        <p:nvSpPr>
+          <p:cNvPr id="5" name="Shape 2"/>
+          <p:cNvSpPr/>
+          <p:nvPr/>
+        </p:nvSpPr>
+        <p:spPr>
+          <a:xfrm>
+            <a:off x="7753553" y="128016"/>
+            <a:ext cx="45720" cy="45720"/>
+          </a:xfrm>
+          <a:prstGeom prst="rect">
+            <a:avLst/>
+          </a:prstGeom>
+          <a:solidFill>
+            <a:srgbClr val="7E22CE"/>
+          </a:solidFill>
+          <a:ln w="12700">
+            <a:solidFill>
+              <a:srgbClr val="7E22CE"/>
+            </a:solidFill>
+            <a:prstDash val="solid"/>
+          </a:ln>
+        </p:spPr>
+      </p:sp>
+      <p:sp>
+        <p:nvSpPr>
+          <p:cNvPr id="6" name="Shape 3"/>
+          <p:cNvSpPr/>
+          <p:nvPr/>
+        </p:nvSpPr>
+        <p:spPr>
+          <a:xfrm>
+            <a:off x="7753553" y="205740"/>
+            <a:ext cx="45720" cy="45720"/>
+          </a:xfrm>
+          <a:prstGeom prst="rect">
+            <a:avLst/>
+          </a:prstGeom>
+          <a:solidFill>
+            <a:srgbClr val="7E22CE"/>
+          </a:solidFill>
+          <a:ln w="12700">
+            <a:solidFill>
+              <a:srgbClr val="7E22CE"/>
+            </a:solidFill>
+            <a:prstDash val="solid"/>
+          </a:ln>
+        </p:spPr>
+      </p:sp>
+      <p:sp>
+        <p:nvSpPr>
+          <p:cNvPr id="7" name="Shape 4"/>
+          <p:cNvSpPr/>
+          <p:nvPr/>
+        </p:nvSpPr>
+        <p:spPr>
+          <a:xfrm>
+            <a:off x="7753553" y="283464"/>
+            <a:ext cx="45720" cy="45720"/>
+          </a:xfrm>
+          <a:prstGeom prst="rect">
+            <a:avLst/>
+          </a:prstGeom>
+          <a:solidFill>
+            <a:srgbClr val="7E22CE"/>
+          </a:solidFill>
+          <a:ln w="12700">
+            <a:solidFill>
+              <a:srgbClr val="7E22CE"/>
+            </a:solidFill>
+            <a:prstDash val="solid"/>
+          </a:ln>
+        </p:spPr>
+      </p:sp>
+      <p:pic>
+        <p:nvPicPr>
+          <p:cNvPr id="8" name="Image 0" descr="preencoded.png">    </p:cNvPr>
+          <p:cNvPicPr>
+            <a:picLocks noChangeAspect="1"/>
+          </p:cNvPicPr>
+          <p:nvPr/>
+        </p:nvPicPr>
+        <p:blipFill>
+          <a:blip r:embed="rId1"/>
+          <a:stretch>
+            <a:fillRect/>
+          </a:stretch>
+        </p:blipFill>
+        <p:spPr>
+          <a:xfrm>
+            <a:off x="7854137" y="128016"/>
+            <a:ext cx="201168" cy="201168"/>
+          </a:xfrm>
+          <a:prstGeom prst="rect">
+            <a:avLst/>
+          </a:prstGeom>
+        </p:spPr>
+      </p:pic>
+      <p:sp>
+        <p:nvSpPr>
+          <p:cNvPr id="9" name="Text 5"/>
+          <p:cNvSpPr txBox="1"/>
+          <p:nvPr/>
+        </p:nvSpPr>
+        <p:spPr>
+          <a:xfrm>
+            <a:off x="8110169" y="91440"/>
+            <a:ext cx="3496310" cy="274320"/>
+          </a:xfrm>
+          <a:prstGeom prst="rect">
+            <a:avLst/>
+          </a:prstGeom>
+          <a:noFill/>
+          <a:ln/>
+        </p:spPr>
+        <p:txBody>
+          <a:bodyPr wrap="square" lIns="0" tIns="0" rIns="0" bIns="0" rtlCol="0" anchor="ctr"/>
+          <a:lstStyle/>
+          <a:p>
+            <a:pPr indent="0" marL="0">
+              <a:buNone/>
+            </a:pPr>
+            <a:r>
+              <a:rPr lang="en-US" sz="1100" b="1" dirty="0">
+                <a:solidFill>
+                  <a:srgbClr val="6B21A8"/>
+                </a:solidFill>
+                <a:latin typeface="Calibri" pitchFamily="34" charset="0"/>
+                <a:ea typeface="Calibri" pitchFamily="34" charset="-122"/>
+                <a:cs typeface="Calibri" pitchFamily="34" charset="-120"/>
+              </a:rPr>
+              <a:t>DA COMPRENDERE PIÙ AVANTI</a:t>
+            </a:r>
+            <a:pPr indent="0" marL="0">
+              <a:buNone/>
+            </a:pPr>
+            <a:r>
+              <a:rPr lang="en-US" sz="1100" b="1" dirty="0">
+                <a:solidFill>
+                  <a:srgbClr val="6B21A8"/>
+                </a:solidFill>
+                <a:latin typeface="Calibri" pitchFamily="34" charset="0"/>
+                <a:ea typeface="Calibri" pitchFamily="34" charset="-122"/>
+                <a:cs typeface="Calibri" pitchFamily="34" charset="-120"/>
+              </a:rPr>
+              <a:t> → Lezioni 04–19</a:t>
+            </a:r>
+            <a:endParaRPr lang="en-US" sz="1100" dirty="0"/>
+          </a:p>
+        </p:txBody>
+      </p:sp>
       <p:sp>
         <p:nvSpPr>
           <p:cNvPr id="25" name="Slide Number Placeholder 0"/>
@@ -14564,6 +15766,133 @@
       </p:sp>
       <p:sp>
         <p:nvSpPr>
+          <p:cNvPr id="19" name="Shape 17"/>
+          <p:cNvSpPr/>
+          <p:nvPr/>
+        </p:nvSpPr>
+        <p:spPr>
+          <a:xfrm>
+            <a:off x="6672783" y="91440"/>
+            <a:ext cx="4970272" cy="274320"/>
+          </a:xfrm>
+          <a:prstGeom prst="rect">
+            <a:avLst/>
+          </a:prstGeom>
+          <a:solidFill>
+            <a:srgbClr val="E0F2FE"/>
+          </a:solidFill>
+          <a:ln w="12700">
+            <a:solidFill>
+              <a:srgbClr val="0369A1"/>
+            </a:solidFill>
+            <a:prstDash val="solid"/>
+          </a:ln>
+        </p:spPr>
+      </p:sp>
+      <p:sp>
+        <p:nvSpPr>
+          <p:cNvPr id="20" name="Shape 18"/>
+          <p:cNvSpPr/>
+          <p:nvPr/>
+        </p:nvSpPr>
+        <p:spPr>
+          <a:xfrm>
+            <a:off x="6672783" y="91440"/>
+            <a:ext cx="73152" cy="274320"/>
+          </a:xfrm>
+          <a:prstGeom prst="rect">
+            <a:avLst/>
+          </a:prstGeom>
+          <a:solidFill>
+            <a:srgbClr val="0369A1"/>
+          </a:solidFill>
+          <a:ln w="12700">
+            <a:solidFill>
+              <a:srgbClr val="0369A1"/>
+            </a:solidFill>
+            <a:prstDash val="solid"/>
+          </a:ln>
+        </p:spPr>
+      </p:sp>
+      <p:pic>
+        <p:nvPicPr>
+          <p:cNvPr id="21" name="Image 0" descr="preencoded.png">    </p:cNvPr>
+          <p:cNvPicPr>
+            <a:picLocks noChangeAspect="1"/>
+          </p:cNvPicPr>
+          <p:nvPr/>
+        </p:nvPicPr>
+        <p:blipFill>
+          <a:blip r:embed="rId1"/>
+          <a:stretch>
+            <a:fillRect/>
+          </a:stretch>
+        </p:blipFill>
+        <p:spPr>
+          <a:xfrm>
+            <a:off x="6800799" y="128016"/>
+            <a:ext cx="201168" cy="201168"/>
+          </a:xfrm>
+          <a:prstGeom prst="rect">
+            <a:avLst/>
+          </a:prstGeom>
+        </p:spPr>
+      </p:pic>
+      <p:sp>
+        <p:nvSpPr>
+          <p:cNvPr id="22" name="Text 19"/>
+          <p:cNvSpPr txBox="1"/>
+          <p:nvPr/>
+        </p:nvSpPr>
+        <p:spPr>
+          <a:xfrm>
+            <a:off x="7056831" y="91440"/>
+            <a:ext cx="4549648" cy="274320"/>
+          </a:xfrm>
+          <a:prstGeom prst="rect">
+            <a:avLst/>
+          </a:prstGeom>
+          <a:noFill/>
+          <a:ln/>
+        </p:spPr>
+        <p:txBody>
+          <a:bodyPr wrap="square" lIns="0" tIns="0" rIns="0" bIns="0" rtlCol="0" anchor="ctr"/>
+          <a:lstStyle/>
+          <a:p>
+            <a:pPr indent="0" marL="0">
+              <a:buNone/>
+            </a:pPr>
+            <a:r>
+              <a:rPr lang="en-US" sz="1100" b="1" dirty="0">
+                <a:solidFill>
+                  <a:srgbClr val="075985"/>
+                </a:solidFill>
+                <a:latin typeface="Calibri" pitchFamily="34" charset="0"/>
+                <a:ea typeface="Calibri" pitchFamily="34" charset="-122"/>
+                <a:cs typeface="Calibri" pitchFamily="34" charset="-120"/>
+              </a:rPr>
+              <a:t>DA COMPRENDERE OGGI</a:t>
+            </a:r>
+            <a:pPr indent="0" marL="0">
+              <a:buNone/>
+            </a:pPr>
+            <a:r>
+              <a:rPr lang="en-US" sz="1100" dirty="0">
+                <a:solidFill>
+                  <a:srgbClr val="075985"/>
+                </a:solidFill>
+                <a:latin typeface="Calibri" pitchFamily="34" charset="0"/>
+                <a:ea typeface="Calibri" pitchFamily="34" charset="-122"/>
+                <a:cs typeface="Calibri" pitchFamily="34" charset="-120"/>
+              </a:rPr>
+              <a:t> · registri, calcolo, trasferimento, salto</a:t>
+            </a:r>
+            <a:endParaRPr lang="en-US" sz="1100" dirty="0"/>
+          </a:p>
+        </p:txBody>
+      </p:sp>
+      <p:sp>
+        <p:nvSpPr>
           <p:cNvPr id="25" name="Slide Number Placeholder 0"/>
           <p:cNvSpPr>
             <a:spLocks noGrp="1"/>
@@ -16667,6 +17996,299 @@
       </p:sp>
       <p:sp>
         <p:nvSpPr>
+          <p:cNvPr id="5" name="Shape 2"/>
+          <p:cNvSpPr/>
+          <p:nvPr/>
+        </p:nvSpPr>
+        <p:spPr>
+          <a:xfrm>
+            <a:off x="6650431" y="91440"/>
+            <a:ext cx="4992624" cy="274320"/>
+          </a:xfrm>
+          <a:prstGeom prst="rect">
+            <a:avLst/>
+          </a:prstGeom>
+          <a:solidFill>
+            <a:srgbClr val="FEF3C7"/>
+          </a:solidFill>
+          <a:ln w="12700">
+            <a:solidFill>
+              <a:srgbClr val="B45309"/>
+            </a:solidFill>
+            <a:prstDash val="solid"/>
+          </a:ln>
+        </p:spPr>
+      </p:sp>
+      <p:sp>
+        <p:nvSpPr>
+          <p:cNvPr id="6" name="Shape 3"/>
+          <p:cNvSpPr/>
+          <p:nvPr/>
+        </p:nvSpPr>
+        <p:spPr>
+          <a:xfrm>
+            <a:off x="6650431" y="91440"/>
+            <a:ext cx="27432" cy="274320"/>
+          </a:xfrm>
+          <a:prstGeom prst="rect">
+            <a:avLst/>
+          </a:prstGeom>
+          <a:solidFill>
+            <a:srgbClr val="B45309"/>
+          </a:solidFill>
+          <a:ln w="12700">
+            <a:solidFill>
+              <a:srgbClr val="B45309"/>
+            </a:solidFill>
+            <a:prstDash val="solid"/>
+          </a:ln>
+        </p:spPr>
+      </p:sp>
+      <p:sp>
+        <p:nvSpPr>
+          <p:cNvPr id="7" name="Shape 4"/>
+          <p:cNvSpPr/>
+          <p:nvPr/>
+        </p:nvSpPr>
+        <p:spPr>
+          <a:xfrm>
+            <a:off x="6705295" y="91440"/>
+            <a:ext cx="27432" cy="274320"/>
+          </a:xfrm>
+          <a:prstGeom prst="rect">
+            <a:avLst/>
+          </a:prstGeom>
+          <a:solidFill>
+            <a:srgbClr val="B45309"/>
+          </a:solidFill>
+          <a:ln w="12700">
+            <a:solidFill>
+              <a:srgbClr val="B45309"/>
+            </a:solidFill>
+            <a:prstDash val="solid"/>
+          </a:ln>
+        </p:spPr>
+      </p:sp>
+      <p:pic>
+        <p:nvPicPr>
+          <p:cNvPr id="8" name="Image 0" descr="preencoded.png">    </p:cNvPr>
+          <p:cNvPicPr>
+            <a:picLocks noChangeAspect="1"/>
+          </p:cNvPicPr>
+          <p:nvPr/>
+        </p:nvPicPr>
+        <p:blipFill>
+          <a:blip r:embed="rId1"/>
+          <a:stretch>
+            <a:fillRect/>
+          </a:stretch>
+        </p:blipFill>
+        <p:spPr>
+          <a:xfrm>
+            <a:off x="6778447" y="128016"/>
+            <a:ext cx="201168" cy="201168"/>
+          </a:xfrm>
+          <a:prstGeom prst="rect">
+            <a:avLst/>
+          </a:prstGeom>
+        </p:spPr>
+      </p:pic>
+      <p:sp>
+        <p:nvSpPr>
+          <p:cNvPr id="9" name="Text 5"/>
+          <p:cNvSpPr txBox="1"/>
+          <p:nvPr/>
+        </p:nvSpPr>
+        <p:spPr>
+          <a:xfrm>
+            <a:off x="7034479" y="91440"/>
+            <a:ext cx="4572000" cy="274320"/>
+          </a:xfrm>
+          <a:prstGeom prst="rect">
+            <a:avLst/>
+          </a:prstGeom>
+          <a:noFill/>
+          <a:ln/>
+        </p:spPr>
+        <p:txBody>
+          <a:bodyPr wrap="square" lIns="0" tIns="0" rIns="0" bIns="0" rtlCol="0" anchor="ctr"/>
+          <a:lstStyle/>
+          <a:p>
+            <a:pPr indent="0" marL="0">
+              <a:buNone/>
+            </a:pPr>
+            <a:r>
+              <a:rPr lang="en-US" sz="1100" b="1" dirty="0">
+                <a:solidFill>
+                  <a:srgbClr val="92400E"/>
+                </a:solidFill>
+                <a:latin typeface="Calibri" pitchFamily="34" charset="0"/>
+                <a:ea typeface="Calibri" pitchFamily="34" charset="-122"/>
+                <a:cs typeface="Calibri" pitchFamily="34" charset="-120"/>
+              </a:rPr>
+              <a:t>DA UTILIZZARE OGGI</a:t>
+            </a:r>
+            <a:pPr indent="0" marL="0">
+              <a:buNone/>
+            </a:pPr>
+            <a:r>
+              <a:rPr lang="en-US" sz="1100" dirty="0">
+                <a:solidFill>
+                  <a:srgbClr val="92400E"/>
+                </a:solidFill>
+                <a:latin typeface="Calibri" pitchFamily="34" charset="0"/>
+                <a:ea typeface="Calibri" pitchFamily="34" charset="-122"/>
+                <a:cs typeface="Calibri" pitchFamily="34" charset="-120"/>
+              </a:rPr>
+              <a:t> · la convenzione di chiamata</a:t>
+            </a:r>
+            <a:pPr indent="0" marL="0">
+              <a:buNone/>
+            </a:pPr>
+            <a:r>
+              <a:rPr lang="en-US" sz="1100" b="1" dirty="0">
+                <a:solidFill>
+                  <a:srgbClr val="92400E"/>
+                </a:solidFill>
+                <a:latin typeface="Calibri" pitchFamily="34" charset="0"/>
+                <a:ea typeface="Calibri" pitchFamily="34" charset="-122"/>
+                <a:cs typeface="Calibri" pitchFamily="34" charset="-120"/>
+              </a:rPr>
+              <a:t> → Lezione 18</a:t>
+            </a:r>
+            <a:endParaRPr lang="en-US" sz="1100" dirty="0"/>
+          </a:p>
+        </p:txBody>
+      </p:sp>
+      <p:sp>
+        <p:nvSpPr>
+          <p:cNvPr id="10" name="Shape 6"/>
+          <p:cNvSpPr/>
+          <p:nvPr/>
+        </p:nvSpPr>
+        <p:spPr>
+          <a:xfrm>
+            <a:off x="3474542" y="91440"/>
+            <a:ext cx="3066161" cy="274320"/>
+          </a:xfrm>
+          <a:prstGeom prst="rect">
+            <a:avLst/>
+          </a:prstGeom>
+          <a:solidFill>
+            <a:srgbClr val="E0F2FE"/>
+          </a:solidFill>
+          <a:ln w="12700">
+            <a:solidFill>
+              <a:srgbClr val="0369A1"/>
+            </a:solidFill>
+            <a:prstDash val="solid"/>
+          </a:ln>
+        </p:spPr>
+      </p:sp>
+      <p:sp>
+        <p:nvSpPr>
+          <p:cNvPr id="11" name="Shape 7"/>
+          <p:cNvSpPr/>
+          <p:nvPr/>
+        </p:nvSpPr>
+        <p:spPr>
+          <a:xfrm>
+            <a:off x="3474542" y="91440"/>
+            <a:ext cx="73152" cy="274320"/>
+          </a:xfrm>
+          <a:prstGeom prst="rect">
+            <a:avLst/>
+          </a:prstGeom>
+          <a:solidFill>
+            <a:srgbClr val="0369A1"/>
+          </a:solidFill>
+          <a:ln w="12700">
+            <a:solidFill>
+              <a:srgbClr val="0369A1"/>
+            </a:solidFill>
+            <a:prstDash val="solid"/>
+          </a:ln>
+        </p:spPr>
+      </p:sp>
+      <p:pic>
+        <p:nvPicPr>
+          <p:cNvPr id="12" name="Image 1" descr="preencoded.png">    </p:cNvPr>
+          <p:cNvPicPr>
+            <a:picLocks noChangeAspect="1"/>
+          </p:cNvPicPr>
+          <p:nvPr/>
+        </p:nvPicPr>
+        <p:blipFill>
+          <a:blip r:embed="rId2"/>
+          <a:stretch>
+            <a:fillRect/>
+          </a:stretch>
+        </p:blipFill>
+        <p:spPr>
+          <a:xfrm>
+            <a:off x="3602558" y="128016"/>
+            <a:ext cx="201168" cy="201168"/>
+          </a:xfrm>
+          <a:prstGeom prst="rect">
+            <a:avLst/>
+          </a:prstGeom>
+        </p:spPr>
+      </p:pic>
+      <p:sp>
+        <p:nvSpPr>
+          <p:cNvPr id="13" name="Text 8"/>
+          <p:cNvSpPr txBox="1"/>
+          <p:nvPr/>
+        </p:nvSpPr>
+        <p:spPr>
+          <a:xfrm>
+            <a:off x="3858590" y="91440"/>
+            <a:ext cx="2645537" cy="274320"/>
+          </a:xfrm>
+          <a:prstGeom prst="rect">
+            <a:avLst/>
+          </a:prstGeom>
+          <a:noFill/>
+          <a:ln/>
+        </p:spPr>
+        <p:txBody>
+          <a:bodyPr wrap="square" lIns="0" tIns="0" rIns="0" bIns="0" rtlCol="0" anchor="ctr"/>
+          <a:lstStyle/>
+          <a:p>
+            <a:pPr indent="0" marL="0">
+              <a:buNone/>
+            </a:pPr>
+            <a:r>
+              <a:rPr lang="en-US" sz="1100" b="1" dirty="0">
+                <a:solidFill>
+                  <a:srgbClr val="075985"/>
+                </a:solidFill>
+                <a:latin typeface="Calibri" pitchFamily="34" charset="0"/>
+                <a:ea typeface="Calibri" pitchFamily="34" charset="-122"/>
+                <a:cs typeface="Calibri" pitchFamily="34" charset="-120"/>
+              </a:rPr>
+              <a:t>DA COMPRENDERE OGGI</a:t>
+            </a:r>
+            <a:pPr indent="0" marL="0">
+              <a:buNone/>
+            </a:pPr>
+            <a:r>
+              <a:rPr lang="en-US" sz="1100" dirty="0">
+                <a:solidFill>
+                  <a:srgbClr val="075985"/>
+                </a:solidFill>
+                <a:latin typeface="Calibri" pitchFamily="34" charset="0"/>
+                <a:ea typeface="Calibri" pitchFamily="34" charset="-122"/>
+                <a:cs typeface="Calibri" pitchFamily="34" charset="-120"/>
+              </a:rPr>
+              <a:t> · i registri</a:t>
+            </a:r>
+            <a:endParaRPr lang="en-US" sz="1100" dirty="0"/>
+          </a:p>
+        </p:txBody>
+      </p:sp>
+      <p:sp>
+        <p:nvSpPr>
           <p:cNvPr id="25" name="Slide Number Placeholder 0"/>
           <p:cNvSpPr>
             <a:spLocks noGrp="1"/>
@@ -17231,6 +18853,133 @@
               <a:t>Il firmware trova le tre funzioni per nome: un prefisso scelto da voi, seguito da _init, _update e _draw. È l'intero contratto tra il vostro gioco e la macchina.</a:t>
             </a:r>
             <a:endParaRPr lang="en-US" sz="2000" dirty="0"/>
+          </a:p>
+        </p:txBody>
+      </p:sp>
+      <p:sp>
+        <p:nvSpPr>
+          <p:cNvPr id="16" name="Shape 14"/>
+          <p:cNvSpPr/>
+          <p:nvPr/>
+        </p:nvSpPr>
+        <p:spPr>
+          <a:xfrm>
+            <a:off x="7526350" y="91440"/>
+            <a:ext cx="4116705" cy="274320"/>
+          </a:xfrm>
+          <a:prstGeom prst="rect">
+            <a:avLst/>
+          </a:prstGeom>
+          <a:solidFill>
+            <a:srgbClr val="E0F2FE"/>
+          </a:solidFill>
+          <a:ln w="12700">
+            <a:solidFill>
+              <a:srgbClr val="0369A1"/>
+            </a:solidFill>
+            <a:prstDash val="solid"/>
+          </a:ln>
+        </p:spPr>
+      </p:sp>
+      <p:sp>
+        <p:nvSpPr>
+          <p:cNvPr id="17" name="Shape 15"/>
+          <p:cNvSpPr/>
+          <p:nvPr/>
+        </p:nvSpPr>
+        <p:spPr>
+          <a:xfrm>
+            <a:off x="7526350" y="91440"/>
+            <a:ext cx="73152" cy="274320"/>
+          </a:xfrm>
+          <a:prstGeom prst="rect">
+            <a:avLst/>
+          </a:prstGeom>
+          <a:solidFill>
+            <a:srgbClr val="0369A1"/>
+          </a:solidFill>
+          <a:ln w="12700">
+            <a:solidFill>
+              <a:srgbClr val="0369A1"/>
+            </a:solidFill>
+            <a:prstDash val="solid"/>
+          </a:ln>
+        </p:spPr>
+      </p:sp>
+      <p:pic>
+        <p:nvPicPr>
+          <p:cNvPr id="18" name="Image 0" descr="preencoded.png">    </p:cNvPr>
+          <p:cNvPicPr>
+            <a:picLocks noChangeAspect="1"/>
+          </p:cNvPicPr>
+          <p:nvPr/>
+        </p:nvPicPr>
+        <p:blipFill>
+          <a:blip r:embed="rId1"/>
+          <a:stretch>
+            <a:fillRect/>
+          </a:stretch>
+        </p:blipFill>
+        <p:spPr>
+          <a:xfrm>
+            <a:off x="7654366" y="128016"/>
+            <a:ext cx="201168" cy="201168"/>
+          </a:xfrm>
+          <a:prstGeom prst="rect">
+            <a:avLst/>
+          </a:prstGeom>
+        </p:spPr>
+      </p:pic>
+      <p:sp>
+        <p:nvSpPr>
+          <p:cNvPr id="19" name="Text 16"/>
+          <p:cNvSpPr txBox="1"/>
+          <p:nvPr/>
+        </p:nvSpPr>
+        <p:spPr>
+          <a:xfrm>
+            <a:off x="7910398" y="91440"/>
+            <a:ext cx="3696081" cy="274320"/>
+          </a:xfrm>
+          <a:prstGeom prst="rect">
+            <a:avLst/>
+          </a:prstGeom>
+          <a:noFill/>
+          <a:ln/>
+        </p:spPr>
+        <p:txBody>
+          <a:bodyPr wrap="square" lIns="0" tIns="0" rIns="0" bIns="0" rtlCol="0" anchor="ctr"/>
+          <a:lstStyle/>
+          <a:p>
+            <a:pPr indent="0" marL="0">
+              <a:buNone/>
+            </a:pPr>
+            <a:r>
+              <a:rPr lang="en-US" sz="1100" b="1" dirty="0">
+                <a:solidFill>
+                  <a:srgbClr val="075985"/>
+                </a:solidFill>
+                <a:latin typeface="Calibri" pitchFamily="34" charset="0"/>
+                <a:ea typeface="Calibri" pitchFamily="34" charset="-122"/>
+                <a:cs typeface="Calibri" pitchFamily="34" charset="-120"/>
+              </a:rPr>
+              <a:t>DA COMPRENDERE OGGI</a:t>
+            </a:r>
+            <a:pPr indent="0" marL="0">
+              <a:buNone/>
+            </a:pPr>
+            <a:r>
+              <a:rPr lang="en-US" sz="1100" dirty="0">
+                <a:solidFill>
+                  <a:srgbClr val="075985"/>
+                </a:solidFill>
+                <a:latin typeface="Calibri" pitchFamily="34" charset="0"/>
+                <a:ea typeface="Calibri" pitchFamily="34" charset="-122"/>
+                <a:cs typeface="Calibri" pitchFamily="34" charset="-120"/>
+              </a:rPr>
+              <a:t> · contratto init/update/draw</a:t>
+            </a:r>
+            <a:endParaRPr lang="en-US" sz="1100" dirty="0"/>
           </a:p>
         </p:txBody>
       </p:sp>
@@ -18340,6 +20089,324 @@
               <a:t>Lo stack cresce verso il basso: si sottrae da sp per allocare, si somma per rilasciare.</a:t>
             </a:r>
             <a:endParaRPr lang="en-US" sz="1400" dirty="0"/>
+          </a:p>
+        </p:txBody>
+      </p:sp>
+      <p:sp>
+        <p:nvSpPr>
+          <p:cNvPr id="28" name="Shape 26"/>
+          <p:cNvSpPr/>
+          <p:nvPr/>
+        </p:nvSpPr>
+        <p:spPr>
+          <a:xfrm>
+            <a:off x="7291654" y="91440"/>
+            <a:ext cx="4351401" cy="274320"/>
+          </a:xfrm>
+          <a:prstGeom prst="rect">
+            <a:avLst/>
+          </a:prstGeom>
+          <a:solidFill>
+            <a:srgbClr val="F3E8FF"/>
+          </a:solidFill>
+          <a:ln w="12700">
+            <a:solidFill>
+              <a:srgbClr val="7E22CE"/>
+            </a:solidFill>
+            <a:prstDash val="dash"/>
+          </a:ln>
+        </p:spPr>
+      </p:sp>
+      <p:sp>
+        <p:nvSpPr>
+          <p:cNvPr id="29" name="Shape 27"/>
+          <p:cNvSpPr/>
+          <p:nvPr/>
+        </p:nvSpPr>
+        <p:spPr>
+          <a:xfrm>
+            <a:off x="7319086" y="128016"/>
+            <a:ext cx="45720" cy="45720"/>
+          </a:xfrm>
+          <a:prstGeom prst="rect">
+            <a:avLst/>
+          </a:prstGeom>
+          <a:solidFill>
+            <a:srgbClr val="7E22CE"/>
+          </a:solidFill>
+          <a:ln w="12700">
+            <a:solidFill>
+              <a:srgbClr val="7E22CE"/>
+            </a:solidFill>
+            <a:prstDash val="solid"/>
+          </a:ln>
+        </p:spPr>
+      </p:sp>
+      <p:sp>
+        <p:nvSpPr>
+          <p:cNvPr id="30" name="Shape 28"/>
+          <p:cNvSpPr/>
+          <p:nvPr/>
+        </p:nvSpPr>
+        <p:spPr>
+          <a:xfrm>
+            <a:off x="7319086" y="205740"/>
+            <a:ext cx="45720" cy="45720"/>
+          </a:xfrm>
+          <a:prstGeom prst="rect">
+            <a:avLst/>
+          </a:prstGeom>
+          <a:solidFill>
+            <a:srgbClr val="7E22CE"/>
+          </a:solidFill>
+          <a:ln w="12700">
+            <a:solidFill>
+              <a:srgbClr val="7E22CE"/>
+            </a:solidFill>
+            <a:prstDash val="solid"/>
+          </a:ln>
+        </p:spPr>
+      </p:sp>
+      <p:sp>
+        <p:nvSpPr>
+          <p:cNvPr id="31" name="Shape 29"/>
+          <p:cNvSpPr/>
+          <p:nvPr/>
+        </p:nvSpPr>
+        <p:spPr>
+          <a:xfrm>
+            <a:off x="7319086" y="283464"/>
+            <a:ext cx="45720" cy="45720"/>
+          </a:xfrm>
+          <a:prstGeom prst="rect">
+            <a:avLst/>
+          </a:prstGeom>
+          <a:solidFill>
+            <a:srgbClr val="7E22CE"/>
+          </a:solidFill>
+          <a:ln w="12700">
+            <a:solidFill>
+              <a:srgbClr val="7E22CE"/>
+            </a:solidFill>
+            <a:prstDash val="solid"/>
+          </a:ln>
+        </p:spPr>
+      </p:sp>
+      <p:pic>
+        <p:nvPicPr>
+          <p:cNvPr id="32" name="Image 0" descr="preencoded.png">    </p:cNvPr>
+          <p:cNvPicPr>
+            <a:picLocks noChangeAspect="1"/>
+          </p:cNvPicPr>
+          <p:nvPr/>
+        </p:nvPicPr>
+        <p:blipFill>
+          <a:blip r:embed="rId1"/>
+          <a:stretch>
+            <a:fillRect/>
+          </a:stretch>
+        </p:blipFill>
+        <p:spPr>
+          <a:xfrm>
+            <a:off x="7419670" y="128016"/>
+            <a:ext cx="201168" cy="201168"/>
+          </a:xfrm>
+          <a:prstGeom prst="rect">
+            <a:avLst/>
+          </a:prstGeom>
+        </p:spPr>
+      </p:pic>
+      <p:sp>
+        <p:nvSpPr>
+          <p:cNvPr id="33" name="Text 30"/>
+          <p:cNvSpPr txBox="1"/>
+          <p:nvPr/>
+        </p:nvSpPr>
+        <p:spPr>
+          <a:xfrm>
+            <a:off x="7675702" y="91440"/>
+            <a:ext cx="3930777" cy="274320"/>
+          </a:xfrm>
+          <a:prstGeom prst="rect">
+            <a:avLst/>
+          </a:prstGeom>
+          <a:noFill/>
+          <a:ln/>
+        </p:spPr>
+        <p:txBody>
+          <a:bodyPr wrap="square" lIns="0" tIns="0" rIns="0" bIns="0" rtlCol="0" anchor="ctr"/>
+          <a:lstStyle/>
+          <a:p>
+            <a:pPr indent="0" marL="0">
+              <a:buNone/>
+            </a:pPr>
+            <a:r>
+              <a:rPr lang="en-US" sz="1100" b="1" dirty="0">
+                <a:solidFill>
+                  <a:srgbClr val="6B21A8"/>
+                </a:solidFill>
+                <a:latin typeface="Calibri" pitchFamily="34" charset="0"/>
+                <a:ea typeface="Calibri" pitchFamily="34" charset="-122"/>
+                <a:cs typeface="Calibri" pitchFamily="34" charset="-120"/>
+              </a:rPr>
+              <a:t>DA COMPRENDERE PIÙ AVANTI</a:t>
+            </a:r>
+            <a:pPr indent="0" marL="0">
+              <a:buNone/>
+            </a:pPr>
+            <a:r>
+              <a:rPr lang="en-US" sz="1100" dirty="0">
+                <a:solidFill>
+                  <a:srgbClr val="6B21A8"/>
+                </a:solidFill>
+                <a:latin typeface="Calibri" pitchFamily="34" charset="0"/>
+                <a:ea typeface="Calibri" pitchFamily="34" charset="-122"/>
+                <a:cs typeface="Calibri" pitchFamily="34" charset="-120"/>
+              </a:rPr>
+              <a:t> · la pila</a:t>
+            </a:r>
+            <a:pPr indent="0" marL="0">
+              <a:buNone/>
+            </a:pPr>
+            <a:r>
+              <a:rPr lang="en-US" sz="1100" b="1" dirty="0">
+                <a:solidFill>
+                  <a:srgbClr val="6B21A8"/>
+                </a:solidFill>
+                <a:latin typeface="Calibri" pitchFamily="34" charset="0"/>
+                <a:ea typeface="Calibri" pitchFamily="34" charset="-122"/>
+                <a:cs typeface="Calibri" pitchFamily="34" charset="-120"/>
+              </a:rPr>
+              <a:t> → Lezione 18</a:t>
+            </a:r>
+            <a:endParaRPr lang="en-US" sz="1100" dirty="0"/>
+          </a:p>
+        </p:txBody>
+      </p:sp>
+      <p:sp>
+        <p:nvSpPr>
+          <p:cNvPr id="34" name="Shape 31"/>
+          <p:cNvSpPr/>
+          <p:nvPr/>
+        </p:nvSpPr>
+        <p:spPr>
+          <a:xfrm>
+            <a:off x="3590493" y="91440"/>
+            <a:ext cx="3591433" cy="274320"/>
+          </a:xfrm>
+          <a:prstGeom prst="rect">
+            <a:avLst/>
+          </a:prstGeom>
+          <a:solidFill>
+            <a:srgbClr val="E0F2FE"/>
+          </a:solidFill>
+          <a:ln w="12700">
+            <a:solidFill>
+              <a:srgbClr val="0369A1"/>
+            </a:solidFill>
+            <a:prstDash val="solid"/>
+          </a:ln>
+        </p:spPr>
+      </p:sp>
+      <p:sp>
+        <p:nvSpPr>
+          <p:cNvPr id="35" name="Shape 32"/>
+          <p:cNvSpPr/>
+          <p:nvPr/>
+        </p:nvSpPr>
+        <p:spPr>
+          <a:xfrm>
+            <a:off x="3590493" y="91440"/>
+            <a:ext cx="73152" cy="274320"/>
+          </a:xfrm>
+          <a:prstGeom prst="rect">
+            <a:avLst/>
+          </a:prstGeom>
+          <a:solidFill>
+            <a:srgbClr val="0369A1"/>
+          </a:solidFill>
+          <a:ln w="12700">
+            <a:solidFill>
+              <a:srgbClr val="0369A1"/>
+            </a:solidFill>
+            <a:prstDash val="solid"/>
+          </a:ln>
+        </p:spPr>
+      </p:sp>
+      <p:pic>
+        <p:nvPicPr>
+          <p:cNvPr id="36" name="Image 1" descr="preencoded.png">    </p:cNvPr>
+          <p:cNvPicPr>
+            <a:picLocks noChangeAspect="1"/>
+          </p:cNvPicPr>
+          <p:nvPr/>
+        </p:nvPicPr>
+        <p:blipFill>
+          <a:blip r:embed="rId2"/>
+          <a:stretch>
+            <a:fillRect/>
+          </a:stretch>
+        </p:blipFill>
+        <p:spPr>
+          <a:xfrm>
+            <a:off x="3718509" y="128016"/>
+            <a:ext cx="201168" cy="201168"/>
+          </a:xfrm>
+          <a:prstGeom prst="rect">
+            <a:avLst/>
+          </a:prstGeom>
+        </p:spPr>
+      </p:pic>
+      <p:sp>
+        <p:nvSpPr>
+          <p:cNvPr id="37" name="Text 33"/>
+          <p:cNvSpPr txBox="1"/>
+          <p:nvPr/>
+        </p:nvSpPr>
+        <p:spPr>
+          <a:xfrm>
+            <a:off x="3974541" y="91440"/>
+            <a:ext cx="3170809" cy="274320"/>
+          </a:xfrm>
+          <a:prstGeom prst="rect">
+            <a:avLst/>
+          </a:prstGeom>
+          <a:noFill/>
+          <a:ln/>
+        </p:spPr>
+        <p:txBody>
+          <a:bodyPr wrap="square" lIns="0" tIns="0" rIns="0" bIns="0" rtlCol="0" anchor="ctr"/>
+          <a:lstStyle/>
+          <a:p>
+            <a:pPr indent="0" marL="0">
+              <a:buNone/>
+            </a:pPr>
+            <a:r>
+              <a:rPr lang="en-US" sz="1100" b="1" dirty="0">
+                <a:solidFill>
+                  <a:srgbClr val="075985"/>
+                </a:solidFill>
+                <a:latin typeface="Calibri" pitchFamily="34" charset="0"/>
+                <a:ea typeface="Calibri" pitchFamily="34" charset="-122"/>
+                <a:cs typeface="Calibri" pitchFamily="34" charset="-120"/>
+              </a:rPr>
+              <a:t>DA COMPRENDERE OGGI</a:t>
+            </a:r>
+            <a:pPr indent="0" marL="0">
+              <a:buNone/>
+            </a:pPr>
+            <a:r>
+              <a:rPr lang="en-US" sz="1100" dirty="0">
+                <a:solidFill>
+                  <a:srgbClr val="075985"/>
+                </a:solidFill>
+                <a:latin typeface="Calibri" pitchFamily="34" charset="0"/>
+                <a:ea typeface="Calibri" pitchFamily="34" charset="-122"/>
+                <a:cs typeface="Calibri" pitchFamily="34" charset="-120"/>
+              </a:rPr>
+              <a:t> · perché si salva ra</a:t>
+            </a:r>
+            <a:endParaRPr lang="en-US" sz="1100" dirty="0"/>
           </a:p>
         </p:txBody>
       </p:sp>
@@ -19205,6 +21272,324 @@
       </p:sp>
       <p:sp>
         <p:nvSpPr>
+          <p:cNvPr id="20" name="Shape 18"/>
+          <p:cNvSpPr/>
+          <p:nvPr/>
+        </p:nvSpPr>
+        <p:spPr>
+          <a:xfrm>
+            <a:off x="6175451" y="91440"/>
+            <a:ext cx="5467604" cy="274320"/>
+          </a:xfrm>
+          <a:prstGeom prst="rect">
+            <a:avLst/>
+          </a:prstGeom>
+          <a:solidFill>
+            <a:srgbClr val="F3E8FF"/>
+          </a:solidFill>
+          <a:ln w="12700">
+            <a:solidFill>
+              <a:srgbClr val="7E22CE"/>
+            </a:solidFill>
+            <a:prstDash val="dash"/>
+          </a:ln>
+        </p:spPr>
+      </p:sp>
+      <p:sp>
+        <p:nvSpPr>
+          <p:cNvPr id="21" name="Shape 19"/>
+          <p:cNvSpPr/>
+          <p:nvPr/>
+        </p:nvSpPr>
+        <p:spPr>
+          <a:xfrm>
+            <a:off x="6202883" y="128016"/>
+            <a:ext cx="45720" cy="45720"/>
+          </a:xfrm>
+          <a:prstGeom prst="rect">
+            <a:avLst/>
+          </a:prstGeom>
+          <a:solidFill>
+            <a:srgbClr val="7E22CE"/>
+          </a:solidFill>
+          <a:ln w="12700">
+            <a:solidFill>
+              <a:srgbClr val="7E22CE"/>
+            </a:solidFill>
+            <a:prstDash val="solid"/>
+          </a:ln>
+        </p:spPr>
+      </p:sp>
+      <p:sp>
+        <p:nvSpPr>
+          <p:cNvPr id="22" name="Shape 20"/>
+          <p:cNvSpPr/>
+          <p:nvPr/>
+        </p:nvSpPr>
+        <p:spPr>
+          <a:xfrm>
+            <a:off x="6202883" y="205740"/>
+            <a:ext cx="45720" cy="45720"/>
+          </a:xfrm>
+          <a:prstGeom prst="rect">
+            <a:avLst/>
+          </a:prstGeom>
+          <a:solidFill>
+            <a:srgbClr val="7E22CE"/>
+          </a:solidFill>
+          <a:ln w="12700">
+            <a:solidFill>
+              <a:srgbClr val="7E22CE"/>
+            </a:solidFill>
+            <a:prstDash val="solid"/>
+          </a:ln>
+        </p:spPr>
+      </p:sp>
+      <p:sp>
+        <p:nvSpPr>
+          <p:cNvPr id="23" name="Shape 21"/>
+          <p:cNvSpPr/>
+          <p:nvPr/>
+        </p:nvSpPr>
+        <p:spPr>
+          <a:xfrm>
+            <a:off x="6202883" y="283464"/>
+            <a:ext cx="45720" cy="45720"/>
+          </a:xfrm>
+          <a:prstGeom prst="rect">
+            <a:avLst/>
+          </a:prstGeom>
+          <a:solidFill>
+            <a:srgbClr val="7E22CE"/>
+          </a:solidFill>
+          <a:ln w="12700">
+            <a:solidFill>
+              <a:srgbClr val="7E22CE"/>
+            </a:solidFill>
+            <a:prstDash val="solid"/>
+          </a:ln>
+        </p:spPr>
+      </p:sp>
+      <p:pic>
+        <p:nvPicPr>
+          <p:cNvPr id="24" name="Image 0" descr="preencoded.png">    </p:cNvPr>
+          <p:cNvPicPr>
+            <a:picLocks noChangeAspect="1"/>
+          </p:cNvPicPr>
+          <p:nvPr/>
+        </p:nvPicPr>
+        <p:blipFill>
+          <a:blip r:embed="rId1"/>
+          <a:stretch>
+            <a:fillRect/>
+          </a:stretch>
+        </p:blipFill>
+        <p:spPr>
+          <a:xfrm>
+            <a:off x="6303467" y="128016"/>
+            <a:ext cx="201168" cy="201168"/>
+          </a:xfrm>
+          <a:prstGeom prst="rect">
+            <a:avLst/>
+          </a:prstGeom>
+        </p:spPr>
+      </p:pic>
+      <p:sp>
+        <p:nvSpPr>
+          <p:cNvPr id="25" name="Text 22"/>
+          <p:cNvSpPr txBox="1"/>
+          <p:nvPr/>
+        </p:nvSpPr>
+        <p:spPr>
+          <a:xfrm>
+            <a:off x="6559499" y="91440"/>
+            <a:ext cx="5046980" cy="274320"/>
+          </a:xfrm>
+          <a:prstGeom prst="rect">
+            <a:avLst/>
+          </a:prstGeom>
+          <a:noFill/>
+          <a:ln/>
+        </p:spPr>
+        <p:txBody>
+          <a:bodyPr wrap="square" lIns="0" tIns="0" rIns="0" bIns="0" rtlCol="0" anchor="ctr"/>
+          <a:lstStyle/>
+          <a:p>
+            <a:pPr indent="0" marL="0">
+              <a:buNone/>
+            </a:pPr>
+            <a:r>
+              <a:rPr lang="en-US" sz="1100" b="1" dirty="0">
+                <a:solidFill>
+                  <a:srgbClr val="6B21A8"/>
+                </a:solidFill>
+                <a:latin typeface="Calibri" pitchFamily="34" charset="0"/>
+                <a:ea typeface="Calibri" pitchFamily="34" charset="-122"/>
+                <a:cs typeface="Calibri" pitchFamily="34" charset="-120"/>
+              </a:rPr>
+              <a:t>DA COMPRENDERE PIÙ AVANTI</a:t>
+            </a:r>
+            <a:pPr indent="0" marL="0">
+              <a:buNone/>
+            </a:pPr>
+            <a:r>
+              <a:rPr lang="en-US" sz="1100" dirty="0">
+                <a:solidFill>
+                  <a:srgbClr val="6B21A8"/>
+                </a:solidFill>
+                <a:latin typeface="Calibri" pitchFamily="34" charset="0"/>
+                <a:ea typeface="Calibri" pitchFamily="34" charset="-122"/>
+                <a:cs typeface="Calibri" pitchFamily="34" charset="-120"/>
+              </a:rPr>
+              <a:t> · i modi di indirizzamento</a:t>
+            </a:r>
+            <a:pPr indent="0" marL="0">
+              <a:buNone/>
+            </a:pPr>
+            <a:r>
+              <a:rPr lang="en-US" sz="1100" b="1" dirty="0">
+                <a:solidFill>
+                  <a:srgbClr val="6B21A8"/>
+                </a:solidFill>
+                <a:latin typeface="Calibri" pitchFamily="34" charset="0"/>
+                <a:ea typeface="Calibri" pitchFamily="34" charset="-122"/>
+                <a:cs typeface="Calibri" pitchFamily="34" charset="-120"/>
+              </a:rPr>
+              <a:t> → Lezione 19</a:t>
+            </a:r>
+            <a:endParaRPr lang="en-US" sz="1100" dirty="0"/>
+          </a:p>
+        </p:txBody>
+      </p:sp>
+      <p:sp>
+        <p:nvSpPr>
+          <p:cNvPr id="26" name="Shape 23"/>
+          <p:cNvSpPr/>
+          <p:nvPr/>
+        </p:nvSpPr>
+        <p:spPr>
+          <a:xfrm>
+            <a:off x="1686382" y="91440"/>
+            <a:ext cx="4379341" cy="274320"/>
+          </a:xfrm>
+          <a:prstGeom prst="rect">
+            <a:avLst/>
+          </a:prstGeom>
+          <a:solidFill>
+            <a:srgbClr val="E0F2FE"/>
+          </a:solidFill>
+          <a:ln w="12700">
+            <a:solidFill>
+              <a:srgbClr val="0369A1"/>
+            </a:solidFill>
+            <a:prstDash val="solid"/>
+          </a:ln>
+        </p:spPr>
+      </p:sp>
+      <p:sp>
+        <p:nvSpPr>
+          <p:cNvPr id="27" name="Shape 24"/>
+          <p:cNvSpPr/>
+          <p:nvPr/>
+        </p:nvSpPr>
+        <p:spPr>
+          <a:xfrm>
+            <a:off x="1686382" y="91440"/>
+            <a:ext cx="73152" cy="274320"/>
+          </a:xfrm>
+          <a:prstGeom prst="rect">
+            <a:avLst/>
+          </a:prstGeom>
+          <a:solidFill>
+            <a:srgbClr val="0369A1"/>
+          </a:solidFill>
+          <a:ln w="12700">
+            <a:solidFill>
+              <a:srgbClr val="0369A1"/>
+            </a:solidFill>
+            <a:prstDash val="solid"/>
+          </a:ln>
+        </p:spPr>
+      </p:sp>
+      <p:pic>
+        <p:nvPicPr>
+          <p:cNvPr id="28" name="Image 1" descr="preencoded.png">    </p:cNvPr>
+          <p:cNvPicPr>
+            <a:picLocks noChangeAspect="1"/>
+          </p:cNvPicPr>
+          <p:nvPr/>
+        </p:nvPicPr>
+        <p:blipFill>
+          <a:blip r:embed="rId2"/>
+          <a:stretch>
+            <a:fillRect/>
+          </a:stretch>
+        </p:blipFill>
+        <p:spPr>
+          <a:xfrm>
+            <a:off x="1814398" y="128016"/>
+            <a:ext cx="201168" cy="201168"/>
+          </a:xfrm>
+          <a:prstGeom prst="rect">
+            <a:avLst/>
+          </a:prstGeom>
+        </p:spPr>
+      </p:pic>
+      <p:sp>
+        <p:nvSpPr>
+          <p:cNvPr id="29" name="Text 25"/>
+          <p:cNvSpPr txBox="1"/>
+          <p:nvPr/>
+        </p:nvSpPr>
+        <p:spPr>
+          <a:xfrm>
+            <a:off x="2070430" y="91440"/>
+            <a:ext cx="3958717" cy="274320"/>
+          </a:xfrm>
+          <a:prstGeom prst="rect">
+            <a:avLst/>
+          </a:prstGeom>
+          <a:noFill/>
+          <a:ln/>
+        </p:spPr>
+        <p:txBody>
+          <a:bodyPr wrap="square" lIns="0" tIns="0" rIns="0" bIns="0" rtlCol="0" anchor="ctr"/>
+          <a:lstStyle/>
+          <a:p>
+            <a:pPr indent="0" marL="0">
+              <a:buNone/>
+            </a:pPr>
+            <a:r>
+              <a:rPr lang="en-US" sz="1100" b="1" dirty="0">
+                <a:solidFill>
+                  <a:srgbClr val="075985"/>
+                </a:solidFill>
+                <a:latin typeface="Calibri" pitchFamily="34" charset="0"/>
+                <a:ea typeface="Calibri" pitchFamily="34" charset="-122"/>
+                <a:cs typeface="Calibri" pitchFamily="34" charset="-120"/>
+              </a:rPr>
+              <a:t>DA COMPRENDERE OGGI</a:t>
+            </a:r>
+            <a:pPr indent="0" marL="0">
+              <a:buNone/>
+            </a:pPr>
+            <a:r>
+              <a:rPr lang="en-US" sz="1100" dirty="0">
+                <a:solidFill>
+                  <a:srgbClr val="075985"/>
+                </a:solidFill>
+                <a:latin typeface="Calibri" pitchFamily="34" charset="0"/>
+                <a:ea typeface="Calibri" pitchFamily="34" charset="-122"/>
+                <a:cs typeface="Calibri" pitchFamily="34" charset="-120"/>
+              </a:rPr>
+              <a:t> · indirizzo, valore, load, store</a:t>
+            </a:r>
+            <a:endParaRPr lang="en-US" sz="1100" dirty="0"/>
+          </a:p>
+        </p:txBody>
+      </p:sp>
+      <p:sp>
+        <p:nvSpPr>
           <p:cNvPr id="25" name="Slide Number Placeholder 0"/>
           <p:cNvSpPr>
             <a:spLocks noGrp="1"/>
@@ -20995,6 +23380,133 @@
       </p:graphicFrame>
       <p:sp>
         <p:nvSpPr>
+          <p:cNvPr id="4" name="Shape 1"/>
+          <p:cNvSpPr/>
+          <p:nvPr/>
+        </p:nvSpPr>
+        <p:spPr>
+          <a:xfrm>
+            <a:off x="7854645" y="91440"/>
+            <a:ext cx="3788410" cy="274320"/>
+          </a:xfrm>
+          <a:prstGeom prst="rect">
+            <a:avLst/>
+          </a:prstGeom>
+          <a:solidFill>
+            <a:srgbClr val="E0F2FE"/>
+          </a:solidFill>
+          <a:ln w="12700">
+            <a:solidFill>
+              <a:srgbClr val="0369A1"/>
+            </a:solidFill>
+            <a:prstDash val="solid"/>
+          </a:ln>
+        </p:spPr>
+      </p:sp>
+      <p:sp>
+        <p:nvSpPr>
+          <p:cNvPr id="5" name="Shape 2"/>
+          <p:cNvSpPr/>
+          <p:nvPr/>
+        </p:nvSpPr>
+        <p:spPr>
+          <a:xfrm>
+            <a:off x="7854645" y="91440"/>
+            <a:ext cx="73152" cy="274320"/>
+          </a:xfrm>
+          <a:prstGeom prst="rect">
+            <a:avLst/>
+          </a:prstGeom>
+          <a:solidFill>
+            <a:srgbClr val="0369A1"/>
+          </a:solidFill>
+          <a:ln w="12700">
+            <a:solidFill>
+              <a:srgbClr val="0369A1"/>
+            </a:solidFill>
+            <a:prstDash val="solid"/>
+          </a:ln>
+        </p:spPr>
+      </p:sp>
+      <p:pic>
+        <p:nvPicPr>
+          <p:cNvPr id="6" name="Image 0" descr="preencoded.png">    </p:cNvPr>
+          <p:cNvPicPr>
+            <a:picLocks noChangeAspect="1"/>
+          </p:cNvPicPr>
+          <p:nvPr/>
+        </p:nvPicPr>
+        <p:blipFill>
+          <a:blip r:embed="rId1"/>
+          <a:stretch>
+            <a:fillRect/>
+          </a:stretch>
+        </p:blipFill>
+        <p:spPr>
+          <a:xfrm>
+            <a:off x="7982661" y="128016"/>
+            <a:ext cx="201168" cy="201168"/>
+          </a:xfrm>
+          <a:prstGeom prst="rect">
+            <a:avLst/>
+          </a:prstGeom>
+        </p:spPr>
+      </p:pic>
+      <p:sp>
+        <p:nvSpPr>
+          <p:cNvPr id="7" name="Text 3"/>
+          <p:cNvSpPr txBox="1"/>
+          <p:nvPr/>
+        </p:nvSpPr>
+        <p:spPr>
+          <a:xfrm>
+            <a:off x="8238693" y="91440"/>
+            <a:ext cx="3367786" cy="274320"/>
+          </a:xfrm>
+          <a:prstGeom prst="rect">
+            <a:avLst/>
+          </a:prstGeom>
+          <a:noFill/>
+          <a:ln/>
+        </p:spPr>
+        <p:txBody>
+          <a:bodyPr wrap="square" lIns="0" tIns="0" rIns="0" bIns="0" rtlCol="0" anchor="ctr"/>
+          <a:lstStyle/>
+          <a:p>
+            <a:pPr indent="0" marL="0">
+              <a:buNone/>
+            </a:pPr>
+            <a:r>
+              <a:rPr lang="en-US" sz="1100" b="1" dirty="0">
+                <a:solidFill>
+                  <a:srgbClr val="075985"/>
+                </a:solidFill>
+                <a:latin typeface="Calibri" pitchFamily="34" charset="0"/>
+                <a:ea typeface="Calibri" pitchFamily="34" charset="-122"/>
+                <a:cs typeface="Calibri" pitchFamily="34" charset="-120"/>
+              </a:rPr>
+              <a:t>DA COMPRENDERE OGGI</a:t>
+            </a:r>
+            <a:pPr indent="0" marL="0">
+              <a:buNone/>
+            </a:pPr>
+            <a:r>
+              <a:rPr lang="en-US" sz="1100" dirty="0">
+                <a:solidFill>
+                  <a:srgbClr val="075985"/>
+                </a:solidFill>
+                <a:latin typeface="Calibri" pitchFamily="34" charset="0"/>
+                <a:ea typeface="Calibri" pitchFamily="34" charset="-122"/>
+                <a:cs typeface="Calibri" pitchFamily="34" charset="-120"/>
+              </a:rPr>
+              <a:t> · le istruzioni di base</a:t>
+            </a:r>
+            <a:endParaRPr lang="en-US" sz="1100" dirty="0"/>
+          </a:p>
+        </p:txBody>
+      </p:sp>
+      <p:sp>
+        <p:nvSpPr>
           <p:cNvPr id="25" name="Slide Number Placeholder 0"/>
           <p:cNvSpPr>
             <a:spLocks noGrp="1"/>
@@ -22580,6 +25092,133 @@
           </a:graphicData>
         </a:graphic>
       </p:graphicFrame>
+      <p:sp>
+        <p:nvSpPr>
+          <p:cNvPr id="4" name="Shape 1"/>
+          <p:cNvSpPr/>
+          <p:nvPr/>
+        </p:nvSpPr>
+        <p:spPr>
+          <a:xfrm>
+            <a:off x="7920304" y="91440"/>
+            <a:ext cx="3722751" cy="274320"/>
+          </a:xfrm>
+          <a:prstGeom prst="rect">
+            <a:avLst/>
+          </a:prstGeom>
+          <a:solidFill>
+            <a:srgbClr val="E0F2FE"/>
+          </a:solidFill>
+          <a:ln w="12700">
+            <a:solidFill>
+              <a:srgbClr val="0369A1"/>
+            </a:solidFill>
+            <a:prstDash val="solid"/>
+          </a:ln>
+        </p:spPr>
+      </p:sp>
+      <p:sp>
+        <p:nvSpPr>
+          <p:cNvPr id="5" name="Shape 2"/>
+          <p:cNvSpPr/>
+          <p:nvPr/>
+        </p:nvSpPr>
+        <p:spPr>
+          <a:xfrm>
+            <a:off x="7920304" y="91440"/>
+            <a:ext cx="73152" cy="274320"/>
+          </a:xfrm>
+          <a:prstGeom prst="rect">
+            <a:avLst/>
+          </a:prstGeom>
+          <a:solidFill>
+            <a:srgbClr val="0369A1"/>
+          </a:solidFill>
+          <a:ln w="12700">
+            <a:solidFill>
+              <a:srgbClr val="0369A1"/>
+            </a:solidFill>
+            <a:prstDash val="solid"/>
+          </a:ln>
+        </p:spPr>
+      </p:sp>
+      <p:pic>
+        <p:nvPicPr>
+          <p:cNvPr id="6" name="Image 0" descr="preencoded.png">    </p:cNvPr>
+          <p:cNvPicPr>
+            <a:picLocks noChangeAspect="1"/>
+          </p:cNvPicPr>
+          <p:nvPr/>
+        </p:nvPicPr>
+        <p:blipFill>
+          <a:blip r:embed="rId1"/>
+          <a:stretch>
+            <a:fillRect/>
+          </a:stretch>
+        </p:blipFill>
+        <p:spPr>
+          <a:xfrm>
+            <a:off x="8048320" y="128016"/>
+            <a:ext cx="201168" cy="201168"/>
+          </a:xfrm>
+          <a:prstGeom prst="rect">
+            <a:avLst/>
+          </a:prstGeom>
+        </p:spPr>
+      </p:pic>
+      <p:sp>
+        <p:nvSpPr>
+          <p:cNvPr id="7" name="Text 3"/>
+          <p:cNvSpPr txBox="1"/>
+          <p:nvPr/>
+        </p:nvSpPr>
+        <p:spPr>
+          <a:xfrm>
+            <a:off x="8304352" y="91440"/>
+            <a:ext cx="3302127" cy="274320"/>
+          </a:xfrm>
+          <a:prstGeom prst="rect">
+            <a:avLst/>
+          </a:prstGeom>
+          <a:noFill/>
+          <a:ln/>
+        </p:spPr>
+        <p:txBody>
+          <a:bodyPr wrap="square" lIns="0" tIns="0" rIns="0" bIns="0" rtlCol="0" anchor="ctr"/>
+          <a:lstStyle/>
+          <a:p>
+            <a:pPr indent="0" marL="0">
+              <a:buNone/>
+            </a:pPr>
+            <a:r>
+              <a:rPr lang="en-US" sz="1100" b="1" dirty="0">
+                <a:solidFill>
+                  <a:srgbClr val="075985"/>
+                </a:solidFill>
+                <a:latin typeface="Calibri" pitchFamily="34" charset="0"/>
+                <a:ea typeface="Calibri" pitchFamily="34" charset="-122"/>
+                <a:cs typeface="Calibri" pitchFamily="34" charset="-120"/>
+              </a:rPr>
+              <a:t>DA COMPRENDERE OGGI</a:t>
+            </a:r>
+            <a:pPr indent="0" marL="0">
+              <a:buNone/>
+            </a:pPr>
+            <a:r>
+              <a:rPr lang="en-US" sz="1100" dirty="0">
+                <a:solidFill>
+                  <a:srgbClr val="075985"/>
+                </a:solidFill>
+                <a:latin typeface="Calibri" pitchFamily="34" charset="0"/>
+                <a:ea typeface="Calibri" pitchFamily="34" charset="-122"/>
+                <a:cs typeface="Calibri" pitchFamily="34" charset="-120"/>
+              </a:rPr>
+              <a:t> · le pseudo-istruzioni</a:t>
+            </a:r>
+            <a:endParaRPr lang="en-US" sz="1100" dirty="0"/>
+          </a:p>
+        </p:txBody>
+      </p:sp>
       <p:sp>
         <p:nvSpPr>
           <p:cNvPr id="25" name="Slide Number Placeholder 0"/>

--- a/it/slides/02-Architettura_dei_Calcolatori-Primo_Contatto_con_Assembly_RISC-V.pptx
+++ b/it/slides/02-Architettura_dei_Calcolatori-Primo_Contatto_con_Assembly_RISC-V.pptx
@@ -123,26 +123,26 @@
   <p:extLst>
     <p:ext uri="{521415D9-36F7-43E2-AB2F-B90AF26B5E84}">
       <p14:sectionLst xmlns:p14="http://schemas.microsoft.com/office/powerpoint/2010/main">
-        <p14:section name="Apertura" id="{434f30f8-fdd0-613a-0012-66d6febc5067}">
+        <p14:section name="Apertura" id="{78667e44-c8d0-6c20-880f-9401f9fc84bb}">
           <p14:sldIdLst>
             <p14:sldId id="256"/>
             <p14:sldId id="257"/>
           </p14:sldIdLst>
         </p14:section>
-        <p14:section name="La macchina" id="{b4a8e490-27de-56d8-b262-7b7d539017a4}">
+        <p14:section name="La macchina" id="{9773816d-ddad-ff05-024c-f9af8a18d217}">
           <p14:sldIdLst>
             <p14:sldId id="258"/>
             <p14:sldId id="259"/>
             <p14:sldId id="260"/>
           </p14:sldIdLst>
         </p14:section>
-        <p14:section name="La prima cartuccia" id="{663d482a-4980-0891-eb94-70c7d48492f2}">
+        <p14:section name="La prima cartuccia" id="{8e264e78-7258-467c-9767-51d8d7a242cd}">
           <p14:sldIdLst>
             <p14:sldId id="261"/>
             <p14:sldId id="262"/>
           </p14:sldIdLst>
         </p14:section>
-        <p14:section name="Leggere ciò che avete scritto" id="{0d85e61b-8ba5-91e5-2c1f-d167d2783575}">
+        <p14:section name="Leggere ciò che avete scritto" id="{1b611c0e-f1a4-5a64-cd15-27069258d7fb}">
           <p14:sldIdLst>
             <p14:sldId id="263"/>
             <p14:sldId id="264"/>
@@ -151,7 +151,7 @@
             <p14:sldId id="267"/>
           </p14:sldIdLst>
         </p14:section>
-        <p14:section name="Che cosa viene dopo" id="{882cd071-16c5-3085-20e0-6802505a22bd}">
+        <p14:section name="Che cosa viene dopo" id="{0afa06fa-e489-361d-fb11-6cf2aed1eb8c}">
           <p14:sldIdLst>
             <p14:sldId id="268"/>
             <p14:sldId id="269"/>
@@ -1734,7 +1734,7 @@
               <a:rPr lang="en-US" dirty="0"/>
               <a:t>Perché salvare ra? L'istruzione call scrive in ra l'indirizzo a cui tornare. Ma la funzione che chiamate può fare a sua volta delle chiamate, e ognuna sovrascrive ra. Perciò una funzione che ne chiama un'altra deve prima salvare in memoria il proprio ra: abbassa sp di 16 per fare spazio, il frame di stack, e memorizza ra in 12(sp). Dopo la chiamata fa il contrario. Il disegno mostra il frame: lo stack cresce verso gli indirizzi bassi. Dimenticare questa coppia di operazioni è il classico primo bug: la funzione ritorna nel posto sbagliato.
 DA COMPRENDERE OGGI: perché si salva ra. DA COMPRENDERE PIÙ AVANTI: la pila (si studia nella Lezione 18).
-Per il docente: La convenzione richiede che sp resti allineato a 16 byte tra una chiamata e l'altra: per questo il frame è di 16 byte anche se ne servono solo 4. Lo stack è trattato formalmente nelle lezioni sulla memoria e sui sottoprogrammi.</a:t>
+Per il docente: La convenzione richiede che sp resti allineato a 16 byte tra una chiamata e l'altra: per questo il frame è di 16 byte anche se ne servono solo 4. Lo stack, con push e pop, è trattato formalmente nella Lezione 18.</a:t>
             </a:r>
             <a:endParaRPr lang="en-US" dirty="0"/>
           </a:p>

--- a/it/slides/02-Architettura_dei_Calcolatori-Primo_Contatto_con_Assembly_RISC-V.pptx
+++ b/it/slides/02-Architettura_dei_Calcolatori-Primo_Contatto_con_Assembly_RISC-V.pptx
@@ -123,26 +123,26 @@
   <p:extLst>
     <p:ext uri="{521415D9-36F7-43E2-AB2F-B90AF26B5E84}">
       <p14:sectionLst xmlns:p14="http://schemas.microsoft.com/office/powerpoint/2010/main">
-        <p14:section name="Apertura" id="{78667e44-c8d0-6c20-880f-9401f9fc84bb}">
+        <p14:section name="Apertura" id="{547a90eb-543d-b221-80ef-95e54b0807ce}">
           <p14:sldIdLst>
             <p14:sldId id="256"/>
             <p14:sldId id="257"/>
           </p14:sldIdLst>
         </p14:section>
-        <p14:section name="La macchina" id="{9773816d-ddad-ff05-024c-f9af8a18d217}">
+        <p14:section name="La macchina" id="{99d164ff-ac22-9d4f-9de1-113c288f4bdb}">
           <p14:sldIdLst>
             <p14:sldId id="258"/>
             <p14:sldId id="259"/>
             <p14:sldId id="260"/>
           </p14:sldIdLst>
         </p14:section>
-        <p14:section name="La prima cartuccia" id="{8e264e78-7258-467c-9767-51d8d7a242cd}">
+        <p14:section name="La prima cartuccia" id="{1f5ec33c-7d03-583d-69d7-fe0aa51c0821}">
           <p14:sldIdLst>
             <p14:sldId id="261"/>
             <p14:sldId id="262"/>
           </p14:sldIdLst>
         </p14:section>
-        <p14:section name="Leggere ciò che avete scritto" id="{1b611c0e-f1a4-5a64-cd15-27069258d7fb}">
+        <p14:section name="Leggere ciò che avete scritto" id="{d542f7e5-f6fd-3aed-e431-065278e174b0}">
           <p14:sldIdLst>
             <p14:sldId id="263"/>
             <p14:sldId id="264"/>
@@ -151,7 +151,7 @@
             <p14:sldId id="267"/>
           </p14:sldIdLst>
         </p14:section>
-        <p14:section name="Che cosa viene dopo" id="{0afa06fa-e489-361d-fb11-6cf2aed1eb8c}">
+        <p14:section name="Che cosa viene dopo" id="{5b191d9e-62ec-35cb-156e-72ba8409b2ac}">
           <p14:sldIdLst>
             <p14:sldId id="268"/>
             <p14:sldId id="269"/>
@@ -564,7 +564,7 @@
           <a:p>
             <a:r>
               <a:rPr lang="en-US" dirty="0"/>
-              <a:t>È la prima lezione in cui scrivete un programma, e viene di proposito prima di ogni teoria. In due ore costruite quattro piccole cartucce, ognuna un programma completo che gira. Oggi non capirete ogni dettaglio, e nessuno se lo aspetta: lo scopo è vedere al lavoro i registri, la memoria e una chiamata di funzione, così che le lezioni successive abbiano qualcosa di concreto da spiegare. La citazione dà il tono: meno parole, più codice.
+              <a:t>È la prima lezione in cui si scrive un programma, e precede di proposito ogni teoria. Nell'arco di due ore lo studente costruisce quattro piccole cartucce, ciascuna un programma completo che gira. La piena comprensione di ogni dettaglio oggi non è né attesa né richiesta. Lo scopo è osservare al lavoro registri, memoria e una chiamata di procedura, così che le lezioni successive abbiano fenomeni concreti da spiegare. La citazione fissa il tono della sessione: meno parole, più codice.
 Stato di apprendimento: DA COMPRENDERE OGGI, alla fine di questa lezione lo spiegate, lo seguite passo passo e lo applicate da soli; DA UTILIZZARE OGGI, oggi seguite e usate la ricetta; come funziona dentro si spiega più avanti, o non fa parte del corso; DA COMPRENDERE PIÙ AVANTI, riconoscete il nome e lo scopo; lo spiega una lezione successiva. Una slide senza etichetta è contesto: una storia, un esempio, una domanda, un esercizio.
 Stato di apprendimento di questa lezione. DA COMPRENDERE OGGI: registri, calcolo, trasferimento, salto; i registri; contratto init/update/draw; gli argomenti in a0 ... a7; perché si salva ra; indirizzo, valore, load, store; le istruzioni di base; le pseudo-istruzioni; un'istruzione è un numero; seguire a mano l'esecuzione. DA UTILIZZARE OGGI: la convenzione di chiamata (Lezione 18); le maschere di bit (Lezione 08) e, usati senza essere studiati nel corso, le direttive dell'assemblatore, gli strumenti di PRG32, le chiamate del runtime PRG32, il debugger di PRG32-QT, il programma completo. DA COMPRENDERE PIÙ AVANTI: la pila (Lezione 18); i modi di indirizzamento (Lezione 19); formati delle istruzioni (Lezione 19); l'esadecimale (Lezione 04); il complemento a due (Lezione 05); la virgola fissa (Lezione 06); l'algebra di Boole (Lezione 08); il sommatore (Lezione 09); dai volt ai bit (Lezione 10); latch e flip-flop (Lezione 13); il ciclo del processore (Lezione 19); il progetto Verm1 (Lezione 07). Una slide senza etichetta è contesto: una storia, un esempio, una domanda, un esercizio.
 Per il docente: Lezione nuova del 2026/27. È il turno «gioca» della spirale per tutta la prima metà del corso: ogni lezione successiva rimanda a qualcosa scritto qui. I quattro passi sono quelli verificati del laboratorio 05-asm-first-contact del libro di PRG32; eseguirli dal vivo (labs/run.sh 05-asm-first-contact/stepN_....S first).</a:t>
@@ -655,7 +655,7 @@
           <a:p>
             <a:r>
               <a:rPr lang="en-US" dirty="0"/>
-              <a:t>Un'istruzione è un numero. addi t1, t1, 1 è la parola di 32 bit 0x00130313, e la striscia colorata ne mostra i campi: dodici bit per la costante 1, cinque per il registro sorgente (t1 è il registro numero 6), tre che dicono «somma», cinque per la destinazione, sette per il tipo di istruzione. Il formato non va imparato adesso. Tenete l'idea: l'assembly è una scrittura leggibile del codice macchina, e il processore legge questi campi con circuiti che imparerete a progettare.
+              <a:t>Un'istruzione è un numero. addi t1, t1, 1 è la parola a 32 bit 0x00130313, e la striscia colorata ne mostra i campi: dodici bit per la costante 1, cinque per il registro sorgente (t1 è il registro numero 6), tre che selezionano l'addizione, cinque per il registro destinazione e sette per l'opcode, che identifica la classe dell'istruzione. Il formato non va memorizzato ora; è l'argomento della Lezione 19. Ciò che conta oggi è il principio: l'assembly è una notazione leggibile per il codice macchina, e un'istruzione memorizzata è un dato come un altro. È l'idea del programma memorizzato, che la prossima lezione colloca nel suo contesto storico.
 DA COMPRENDERE OGGI: un'istruzione è un numero. DA COMPRENDERE PIÙ AVANTI: formati delle istruzioni (si studia nella Lezione 19).
 Per il docente: Verifica: 0000 0000 0001 | 00110 | 000 | 00110 | 0010011 = 0000 0000 0001 0011 0000 0011 0001 0011 = 0x00130313. Non spiegare ora i formati; il punto è solo che un'istruzione è un dato. La Lezione 04 (informazione digitale) e le lezioni sul processore tornano su questa slide.</a:t>
             </a:r>
@@ -745,7 +745,7 @@
           <a:p>
             <a:r>
               <a:rPr lang="en-US" dirty="0"/>
-              <a:t>PRG32-QT esegue la stessa cartuccia sul portatile e può fermarsi tra due istruzioni qualsiasi, mostrando tutti i registri. Usatelo ora sul terzo passo: andate su update, mettete in pausa, ed eseguite una alla volta le quattro istruzioni di first_update, osservando t0 e t1. Prima di ogni pressione dite ad alta voce che cosa cambierà. L'ultima riga è una regola da ricordare: la scheda dice la verità sul tempo, PRG32-QT dice la verità su un registro.
+              <a:t>PRG32-QT esegue la stessa cartuccia sul portatile e può fermarsi tra due istruzioni qualsiasi, mostrando ogni registro. Va usato ora sul terzo passo: si va a update, si mette in pausa e si eseguono una alla volta le quattro istruzioni di first_update, osservando t0 e t1. Prima di ogni passo il cambiamento atteso va dichiarato ad alta voce; una previsione resa esplicita è una previsione che può essere sbagliata, e quindi informativa. L'ultima riga è un principio da conservare: la scheda è l'autorità sul tempo, PRG32-QT l'autorità sul contenuto di un registro.
 DA UTILIZZARE OGGI: il debugger di PRG32-QT (si usa, non si studia, in questo corso).
 Per il docente: Dimostrare dal vivo: caricare il passo 3, fermarsi su first_update, eseguire quattro passi. Chiedere agli studenti di prevedere ogni registro prima di premere il tasto.</a:t>
             </a:r>
@@ -835,7 +835,7 @@
           <a:p>
             <a:r>
               <a:rPr lang="en-US" dirty="0"/>
-              <a:t>Una traccia a mano: per ogni frame si scrive che cosa ogni istruzione lascia in t1 e in memoria. Nei primi frame non accade nulla di sorprendente. Guardate la riga evidenziata: al frame 256 il contatore diventa 256, eppure la larghezza della barra è 0, perché andi con 255 conserva solo gli otto bit bassi, e 256 in binario è un uno seguito da otto zeri. Tracciare a mano è lento e poco appariscente, ed è l'abilità di debug più utile che imparerete in questo corso.
+              <a:t>Un tracciamento a mano registra, frame per frame, che cosa ogni istruzione lascia in t1 e in memoria. I primi frame non riservano sorprese. La riga evidenziata sì: al frame 256 il contatore raggiunge 256 eppure la larghezza della barra è 0, perché andi con 255 conserva solo gli otto bit meno significativi, e 256 in binario è un uno seguito da otto zeri. L'operazione di maschera calcola quindi il resto modulo 256, un fatto usato oggi e spiegato nella Lezione 08. Il tracciamento a mano è lento e poco brillante, ed è l'abilità di debug più preziosa che questo corso insegni.
 DA COMPRENDERE OGGI: seguire a mano l'esecuzione.
 Per il docente: La traccia a mano è l'abilità di debug più preziosa del corso. 256 = 1 0000 0000 in binario: gli otto bit bassi sono tutti zero, quindi la barra ricomincia.</a:t>
             </a:r>
@@ -925,7 +925,7 @@
           <a:p>
             <a:r>
               <a:rPr lang="en-US" dirty="0"/>
-              <a:t>Ogni riga è una cosa vista oggi, la domanda che solleva e dove si trova la risposta. Perché l'esadecimale? Lezioni 04 e 05. Come fa un registro a contenere un numero negativo? Lezione 05. Che cosa fa AND a trentadue bit in un colpo solo? Lezioni 08 e 09. Come fa un circuito a ricordare un bit? Lezioni 13 e 15. Come viene decodificato ed eseguito 0x00130313? Lezioni 18 e 19. L'ultima riga è il progetto: da tre funzioni e un rettangolo, un gioco intero. Conservate questa tabella: è la mappa del corso vista dal vostro programma.
+              <a:t>Ogni riga della tabella registra qualcosa osservato oggi, la domanda che solleva e la lezione che risponde. Perché l'esadecimale? Lezioni 04 e 05. Come fa un registro a contenere un numero negativo? Lezione 05. Che cosa fa AND a trentadue bit in una volta? Lezioni 08 e 09. Come fa un circuito a ricordare un bit? Lezioni 13 e 15. Come viene decodificato ed eseguito 0x00130313? Lezioni 18 e 19. L'ultima riga è il progetto: da tre funzioni e un rettangolo a un gioco completo. La tabella è la mappa del corso disegnata a partire dal programma dello studente, e conviene tenerla a portata di mano.
 DA COMPRENDERE PIÙ AVANTI: l'esadecimale (si studia nella Lezione 04); il complemento a due (si studia nella Lezione 05); la virgola fissa (si studia nella Lezione 06); l'algebra di Boole (si studia nella Lezione 08); il sommatore (si studia nella Lezione 09); dai volt ai bit (si studia nella Lezione 10); latch e flip-flop (si studia nella Lezione 13); il ciclo del processore (si studia nella Lezione 19); il progetto Verm1 (si studia nella Lezione 07).
 Per il docente: È la mappa in avanti del corso. Conservarne una copia: ogni presentazione successiva si apre indicando una di queste righe. L'ultima riga è il progetto: Verm1 parte nella Lezione 07 esattamente dallo scheletro di oggi.</a:t>
             </a:r>
@@ -1015,8 +1015,8 @@
           <a:p>
             <a:r>
               <a:rPr lang="en-US" dirty="0"/>
-              <a:t>Applicate la distinzione tra indirizzo e valore. la carica in t0 l'indirizzo dell'etichetta; lw usa poi t0 per trovare la locazione e ne copia il contenuto in t1, senza modificare t0. Quindi t0 contiene ancora l'indirizzo. Se avete scelto «il valore», tornate alla slide con le due frecce.
-La chiave è ciò che fa call: scrive in ra l'indirizzo di ritorno. Se poi la vostra funzione deve tornare al proprio chiamante, le serve il vecchio ra, che la chiamata ha appena sovrascritto. a0 è fatto per essere sovrascritto, sp viene ripristinato dalla funzione chiamata, e t0 è un temporaneo che nessuno ha promesso di conservare.
+              <a:t>La prima domanda mette alla prova la distinzione tra indirizzo e valore. la carica in t0 l'indirizzo dell'etichetta; lw usa poi t0 per trovare la parola e ne copia il contenuto in t1, lasciando t0 invariato. t0 contiene quindi ancora l'indirizzo. Chi ha scelto "il valore" torni alla slide con le due frecce.
+La seconda domanda ruota attorno all'effetto di call, che scrive l'indirizzo di ritorno in ra. Una funzione che dovrà poi tornare al proprio chiamante ha bisogno del suo ra originale, che la chiamata ha appena sovrascritto. a0 è fatto per essere sovrascritto, sp è ripristinato dalla funzione chiamata, e t0 è un temporaneo che nessuno si è impegnato a conservare.
 Per il docente: 1. Risposta: B. la carica l'indirizzo dell'etichetta; lw legge poi in t1 il valore memorizzato a quell'indirizzo.
 2. Risposta: C. call scrive in ra l'indirizzo di ritorno. Le chiamate della funzione chiamata lo sovrascriverebbero: una funzione non foglia salva ra sullo stack e lo ripristina prima di ret.</a:t>
             </a:r>
@@ -1106,7 +1106,7 @@
           <a:p>
             <a:r>
               <a:rPr lang="en-US" dirty="0"/>
-              <a:t>Fate il calcolo in binario. 300 è 256 + 44, cioè un uno in posizione 8 seguito dagli otto bit di 44. La maschera 255 è fatta di otto uni: AND conserva gli otto bit bassi e azzera il resto. Rimane 44. Sottraendo 255 da 300 si ottiene 45, una risposta sbagliata che tenta: AND non è una sottrazione.
+              <a:t>Il calcolo si fa meglio in binario. 300 è uguale a 256 + 44: un uno nella posizione 8 seguito dagli otto bit di 44. La maschera 255 è fatta di otto uni, quindi l'AND conserva gli otto bit meno significativi e azzera tutti gli altri. Il risultato è 44. Sottrarre 255 da 300 dà 45, una risposta plausibile ma sbagliata: un AND bit a bit non è una sottrazione, e la distinzione tra operazioni aritmetiche e logiche sugli stessi bit ricorre in tutto il corso.
 Per il docente: Risposta: D. 300 = 256 + 44 = 1 0010 1100 in binario. AND con 1111 1111 conserva gli otto bit bassi: 0010 1100 = 44.</a:t>
             </a:r>
             <a:endParaRPr lang="en-US" dirty="0"/>
@@ -1195,7 +1195,7 @@
           <a:p>
             <a:r>
               <a:rPr lang="en-US" dirty="0"/>
-              <a:t>Dodici termini di questa lezione, con l'italiano usato in aula. Load e store si intendono sempre dal punto di vista del processore: load porta un valore dalla memoria a un registro, store lo rimanda indietro. Un immediato è una costante scritta dentro l'istruzione stessa. Un branch è un salto che avviene solo se vale una condizione. La convenzione di chiamata è l'accordo sui ruoli dei registri.
+              <a:t>Dodici termini della lezione, con l'italiano usato in aula. Load e store si nominano sempre dal punto di vista del processore: un load porta un valore dalla memoria a un registro, uno store lo rimanda indietro. Un immediato è una costante codificata dentro l'istruzione stessa. Un branch è un salto che avviene solo se vale una condizione. La convenzione di chiamata è l'accordo che regola i ruoli dei registri attraverso le chiamate di procedura.
 Per il docente: Il corso si tiene in italiano; slide, note e libro esistono in inglese e in italiano, e la documentazione tecnica di PRG32 è in inglese. Questa tabella si ripete, argomento per argomento, in ogni presentazione.</a:t>
             </a:r>
             <a:endParaRPr lang="en-US" dirty="0"/>
@@ -1284,7 +1284,7 @@
           <a:p>
             <a:r>
               <a:rPr lang="en-US" dirty="0"/>
-              <a:t>Quattro frasi contengono la lezione. Un processore RISC-V è fatto di trentadue registri e di un piccolo insieme di istruzioni che calcolano, spostano e saltano. Un gioco PRG32 sono tre funzioni, con gli argomenti da a0 ad a7, e una funzione che ne chiama un'altra salva ra. Le variabili vivono in memoria: la per l'indirizzo, lw e sw per il valore. Un'istruzione è un numero a 32 bit, e l'assembly è la sua scrittura leggibile. La prossima lezione fa un passo indietro e racconta la storia che ha portato a questa macchina.
+              <a:t>Quattro proposizioni riassumono la lezione. Un processore RISC-V consiste di trentadue registri e di un piccolo insieme di istruzioni che calcolano, trasferiscono dati e cambiano il flusso di controllo. Un gioco PRG32 consiste di tre funzioni; gli argomenti viaggiano da a0 ad a7, e una funzione che ne chiama un'altra deve salvare ra. Le variabili risiedono in memoria: la dà l'indirizzo, lw e sw il valore. Un'istruzione è un numero a 32 bit, e l'assembly è la sua notazione leggibile. La prossima lezione fa un passo indietro per ripercorrere la storia che ha prodotto questa macchina.
 Stato di apprendimento, riepilogo. DA COMPRENDERE OGGI: registri, calcolo, trasferimento, salto; i registri; contratto init/update/draw; gli argomenti in a0 ... a7; perché si salva ra; indirizzo, valore, load, store; le istruzioni di base; le pseudo-istruzioni; un'istruzione è un numero; seguire a mano l'esecuzione. DA UTILIZZARE OGGI: la convenzione di chiamata (Lezione 18); le maschere di bit (Lezione 08) e, usati senza essere studiati nel corso, le direttive dell'assemblatore, gli strumenti di PRG32, le chiamate del runtime PRG32, il debugger di PRG32-QT, il programma completo. DA COMPRENDERE PIÙ AVANTI: la pila (Lezione 18); i modi di indirizzamento (Lezione 19); formati delle istruzioni (Lezione 19); l'esadecimale (Lezione 04); il complemento a due (Lezione 05); la virgola fissa (Lezione 06); l'algebra di Boole (Lezione 08); il sommatore (Lezione 09); dai volt ai bit (Lezione 10); latch e flip-flop (Lezione 13); il ciclo del processore (Lezione 19); il progetto Verm1 (Lezione 07). Una slide senza etichetta è contesto: una storia, un esempio, una domanda, un esercizio.
 Per il docente: Prossima lezione: la storia che ha portato a questa macchina.</a:t>
             </a:r>
@@ -1374,7 +1374,7 @@
           <a:p>
             <a:r>
               <a:rPr lang="en-US" dirty="0"/>
-              <a:t>Sei cose che saprete fare alla fine. Le prime quattro sono pratiche: compilare ed eseguire una cartuccia, nominare i registri, chiamare una funzione con i suoi argomenti, conservare un valore in memoria tra un frame e l'altro. La quinta è un cambio di punto di vista: un'istruzione è un numero a 32 bit. La sesta è la più importante per il corso: uscirete con un elenco di domande, e ognuna è l'argomento di una lezione successiva.
+              <a:t>Sei risultati di apprendimento. I primi quattro sono operativi: compilare ed eseguire una cartuccia, nominare i registri, chiamare una funzione con i suoi argomenti, conservare un valore in memoria tra un frame e l'altro. Il quinto è un cambio di prospettiva con conseguenze durature: un'istruzione è un numero a 32 bit. Il sesto è il più importante per il corso nel suo insieme: lo studente esce con un elenco di domande, ciascuna oggetto di una lezione successiva. La lezione di oggi è quindi un inventario di problemi quanto un insieme di risposte.
 Per il docente: Dire esplicitamente agli studenti che oggi non ci si aspetta che capiscano tutto. Oggi si guarda; le prossime lezioni servono a spiegare.</a:t>
             </a:r>
             <a:endParaRPr lang="en-US" dirty="0"/>
@@ -1463,7 +1463,7 @@
           <a:p>
             <a:r>
               <a:rPr lang="en-US" dirty="0"/>
-              <a:t>L'intera macchina in quattro riquadri. Ci sono 32 registri, ciascuno con un valore a 32 bit, e il processore sa calcolare solo su ciò che contengono. Ci sono tre tipi di istruzione. Calcolare: aritmetica e logica tra registri, come add o addi. Spostare: trasferimenti tra un registro e la memoria, lw per caricare una parola e sw per memorizzarla; nient'altro tocca la memoria. Saltare: cambi dell'istruzione che verrà eseguita dopo. Tutto ciò che fa un calcolatore è una lunga sequenza di questi tre tipi.
+              <a:t>L'intera macchina è descritta da quattro schede. Ci sono 32 registri, ciascuno contenente un valore a 32 bit, e il processore può operare solo su valori contenuti nei registri. Le istruzioni si dividono in tre classi. Calcolo: operazioni aritmetiche e logiche tra registri, come add o addi. Trasferimento: spostamenti tra un registro e la memoria, lw per caricare una parola e sw per memorizzarla; nessun'altra istruzione accede alla memoria. Salto: istruzioni che cambiano quale istruzione verrà eseguita dopo. È la disciplina load-store di RISC-V, e ogni calcolo che un computer esegue è una lunga sequenza di questi tre tipi.
 DA COMPRENDERE OGGI: registri, calcolo, trasferimento, salto.
 Per il docente: Questa è quasi tutta la macchina. La ricchezza del calcolo non viene da un insieme di istruzioni ampio, ma dal combinarne uno piccolo in lunghe sequenze.</a:t>
             </a:r>
@@ -1553,7 +1553,7 @@
           <a:p>
             <a:r>
               <a:rPr lang="en-US" dirty="0"/>
-              <a:t>I registri hanno nomi che dicono come si usano. Da a0 ad a7 portano gli argomenti di una chiamata, e a0 riporta indietro il risultato. Da t0 a t6 sono temporanei, liberi da usare e non conservati da una chiamata. Da s0 a s11 sono conservati. ra contiene l'indirizzo di ritorno, sp la cima dello stack, e zero si legge sempre 0. Leggete con cura la didascalia: questi ruoli non sono incisi nell'hardware. Sono un accordo, la convenzione di chiamata, ed è ciò che permette al vostro assembly e al codice C del framework di chiamarsi a vicenda.
+              <a:t>I registri hanno nomi che ne riflettono l'uso. Da a0 ad a7 passano gli argomenti di una chiamata, e a0 restituisce anche il risultato. Da t0 a t6 sono temporanei, liberamente utilizzabili e non conservati attraverso le chiamate. Da s0 a s11 sono conservati attraverso le chiamate. ra contiene l'indirizzo di ritorno, sp la cima dello stack, e zero vale sempre 0. La didascalia contiene il punto essenziale: questi ruoli non sono imposti dall'hardware, che tratta in modo identico i registri da x1 a x31. Sono un accordo, la convenzione di chiamata, ed è questo accordo che permette all'assembly scritto dallo studente e al codice C del framework di chiamarsi a vicenda. Oggi la si usa; la si studia formalmente nella Lezione 18.
 DA COMPRENDERE OGGI: i registri. DA UTILIZZARE OGGI: la convenzione di chiamata (si studia nella Lezione 18).
 Per il docente: I ruoli non sono fissati dall'hardware ma da un accordo: la convenzione di chiamata, o ABI. Rispettarla è ciò che permette al vostro assembly e al codice C del framework di chiamarsi a vicenda.</a:t>
             </a:r>
@@ -1643,7 +1643,7 @@
           <a:p>
             <a:r>
               <a:rPr lang="en-US" dirty="0"/>
-              <a:t>Il contratto con PRG32 è fatto di tre funzioni che scrivete voi. init viene chiamata una volta, all'avvio della cartuccia, per preparare lo stato. update viene chiamata una volta per frame, per leggere l'ingresso e cambiare lo stato. draw viene chiamata una volta per frame, per trasformare lo stato in un'immagine. Il firmware le trova per nome: un prefisso scelto da voi, seguito da _init, _update e _draw. Tenete presente dal primo giorno la divisione dei compiti: update decide, draw mostra.
+              <a:t>L'interfaccia tra un gioco e PRG32 è un contratto di tre funzioni fornite dal programmatore. init è chiamata una volta, all'avvio della cartuccia, per stabilire lo stato iniziale. update è chiamata una volta per frame, per leggere l'ingresso e modificare lo stato. draw è chiamata una volta per frame, per rendere lo stato come immagine. Il firmware le trova per nome: un prefisso scelto dal programmatore seguito da _init, _update e _draw. La separazione delle responsabilità va adottata dal primo giorno: update decide, draw mostra, e nessuna delle due fa il lavoro dell'altra.
 DA COMPRENDERE OGGI: contratto init/update/draw.</a:t>
             </a:r>
             <a:endParaRPr lang="en-US" dirty="0"/>
@@ -1732,7 +1732,7 @@
           <a:p>
             <a:r>
               <a:rPr lang="en-US" dirty="0"/>
-              <a:t>Perché salvare ra? L'istruzione call scrive in ra l'indirizzo a cui tornare. Ma la funzione che chiamate può fare a sua volta delle chiamate, e ognuna sovrascrive ra. Perciò una funzione che ne chiama un'altra deve prima salvare in memoria il proprio ra: abbassa sp di 16 per fare spazio, il frame di stack, e memorizza ra in 12(sp). Dopo la chiamata fa il contrario. Il disegno mostra il frame: lo stack cresce verso gli indirizzi bassi. Dimenticare questa coppia di operazioni è il classico primo bug: la funzione ritorna nel posto sbagliato.
+              <a:t>Perché si deve salvare ra? L'istruzione call scrive in ra l'indirizzo a cui il controllo deve tornare. La funzione chiamata, però, può a sua volta fare chiamate, ciascuna delle quali sovrascrive ra. Una funzione che ne chiama un'altra deve quindi prima preservare in memoria il proprio indirizzo di ritorno: decrementa sp di 16 per riservare spazio, lo stack frame, e memorizza ra in 12(sp); dopo la chiamata esegue le operazioni inverse. Lo schema mostra il frame, con lo stack che cresce verso gli indirizzi bassi; la dimensione di 16 byte discende dall'allineamento che la convenzione richiede a sp. Omettere questa coppia di operazioni è il classico primo errore: la funzione ritorna nel posto sbagliato. Perché si salva ra va compreso oggi; lo stack come struttura dati si tratta formalmente nella Lezione 18.
 DA COMPRENDERE OGGI: perché si salva ra. DA COMPRENDERE PIÙ AVANTI: la pila (si studia nella Lezione 18).
 Per il docente: La convenzione richiede che sp resti allineato a 16 byte tra una chiamata e l'altra: per questo il frame è di 16 byte anche se ne servono solo 4. Lo stack, con push e pop, è trattato formalmente nella Lezione 18.</a:t>
             </a:r>
@@ -1822,7 +1822,7 @@
           <a:p>
             <a:r>
               <a:rPr lang="en-US" dirty="0"/>
-              <a:t>Questa slide separa due idee che i principianti confondono: l'indirizzo e il valore. Dopo la, t0 contiene dove vive il contatore. Dopo lw, t1 contiene che cosa vi è memorizzato, 41 nel disegno. addi porta a 42 la copia nel registro, e la memoria dice ancora 41 finché sw non la riscrive. Seguite le due frecce. Un'abitudine pratica dal riquadro a destra: nei commenti scrivete per ogni registro se contiene un INDIRIZZO o un VALORE. Previene l'errore più comune del primo mese.
+              <a:t>Questa slide separa due nozioni che i principianti confondono di continuo: un indirizzo e un valore. Dopo la, t0 contiene dove è memorizzato il contatore; dopo lw, t1 contiene che cosa vi è memorizzato, 41 nel disegno. addi modifica la copia nel registro portandola a 42, mentre la memoria continua a contenere 41 finché sw non riscrive il nuovo valore. Le due frecce vanno seguite con attenzione. Il riquadro a destra raccomanda un'abitudine da prendere subito: annotare nei commenti ogni registro come contenente un INDIRIZZO o un VALORE. Questa semplice disciplina previene l'errore più frequente del primo mese. I modi in cui un'istruzione può designare i propri operandi, i modi di indirizzamento, si studiano nella Lezione 19.
 DA COMPRENDERE OGGI: indirizzo, valore, load, store. DA COMPRENDERE PIÙ AVANTI: i modi di indirizzamento (si studia nella Lezione 19).
 Per il docente: Un'etichetta dà un nome a una locazione. la dà la locazione, lw dà il contenuto. È così che funziona, in ultima analisi, ogni variabile di ogni programma; ci si torna formalmente con i modi di indirizzamento.</a:t>
             </a:r>
@@ -1912,7 +1912,7 @@
           <a:p>
             <a:r>
               <a:rPr lang="en-US" dirty="0"/>
-              <a:t>Cinque famiglie coprono tutto ciò che avete battuto: aritmetica (add, sub), logica (and, or, xor), le forme con immediato che prendono una piccola costante (addi, andi), memoria (lw, sw) e controllo (call, ret). In ogni istruzione il risultato va nel primo registro nominato: add t0, t1, t2 mette t1 + t2 in t0. L'insieme di base ha circa quaranta istruzioni, e ne avete già incontrato un quarto.
+              <a:t>Cinque famiglie comprendono ogni istruzione scritta oggi: aritmetiche (add, sub), logiche (and, or, xor), forme immediate che prendono una piccola costante (addi, andi), di memoria (lw, sw) e di controllo (call, ret). In ogni istruzione il risultato va nel primo registro nominato: add t0, t1, t2 mette t1 + t2 in t0. L'insieme di istruzioni intere di base, RV32I, conta circa quaranta istruzioni; un quarto di esse è già stato usato.
 DA COMPRENDERE OGGI: le istruzioni di base.
 Per il docente: Il risultato va nel primo registro. L'insieme di base delle istruzioni intere di RISC-V (RV32I) ha circa quaranta istruzioni; ne avete già incontrato un quarto.</a:t>
             </a:r>
@@ -2002,7 +2002,7 @@
           <a:p>
             <a:r>
               <a:rPr lang="en-US" dirty="0"/>
-              <a:t>Alcune delle istruzioni che avete scritto nel processore non esistono: sono pseudo-istruzioni, scorciatoie che l'assemblatore espande. li t0, 42 diventa addi t0, zero, 42; mv è una addi con 0; ret è un salto all'indirizzo in ra; beqz è un confronto con il registro zero. Notate quante volte zero compare nella colonna centrale: un registro che vale sempre 0 permette a un insieme di istruzioni piccolo di fare il lavoro di uno più grande.
+              <a:t>Diverse istruzioni scritte oggi non esistono nell'hardware: sono pseudo-istruzioni, comodità di notazione che l'assemblatore espande in istruzioni reali. li t0, 42 diventa addi t0, zero, 42; mv è un addi con costante 0; ret è un salto indiretto all'indirizzo in ra; beqz è un confronto con il registro zero. La frequenza con cui zero compare nella colonna centrale è istruttiva: un registro cablato a 0 permette a un piccolo insieme di istruzioni di fare il lavoro di uno molto più grande, un'economia caratteristica del progetto RISC.
 DA COMPRENDERE OGGI: le pseudo-istruzioni.
 Per il docente: Una pseudo-istruzione non è un'operazione hardware a sé. È il registro zero a renderne possibili molte: un insieme di istruzioni piccolo, riusato con cura.</a:t>
             </a:r>
@@ -3082,7 +3082,7 @@
                 <a:ea typeface="Calibri" pitchFamily="34" charset="-122"/>
                 <a:cs typeface="Calibri" pitchFamily="34" charset="-120"/>
               </a:rPr>
-              <a:t>02-Architettura_dei_Calcolatori-Primo_Contatto_con_Assembly_RISC-V-Codice.pptx</a:t>
+              <a:t>02-Architettura_dei_Calcolatori-Primo_Contatto_con_Assembly_RISC-V-Lab.pptx</a:t>
             </a:r>
             <a:endParaRPr lang="en-US" sz="1300" dirty="0"/>
           </a:p>

--- a/it/slides/02-Architettura_dei_Calcolatori-Primo_Contatto_con_Assembly_RISC-V.pptx
+++ b/it/slides/02-Architettura_dei_Calcolatori-Primo_Contatto_con_Assembly_RISC-V.pptx
@@ -126,39 +126,39 @@
   <p:extLst>
     <p:ext uri="{521415D9-36F7-43E2-AB2F-B90AF26B5E84}">
       <p14:sectionLst xmlns:p14="http://schemas.microsoft.com/office/powerpoint/2010/main">
-        <p14:section name="Apertura" id="{8c3f74e4-3c63-9c89-1bd0-5df5ea404c6c}">
+        <p14:section name="Apertura" id="{b312edbc-f053-1f72-01cc-951aa7dfa9ae}">
           <p14:sldIdLst>
             <p14:sldId id="256"/>
             <p14:sldId id="257"/>
           </p14:sldIdLst>
         </p14:section>
-        <p14:section name="La macchina" id="{86b5758f-b341-127c-5249-bba7af7de98f}">
+        <p14:section name="La macchina" id="{04b2b4ec-69ae-7662-150f-74fdc335f027}">
           <p14:sldIdLst>
             <p14:sldId id="258"/>
             <p14:sldId id="259"/>
             <p14:sldId id="260"/>
             <p14:sldId id="261"/>
             <p14:sldId id="262"/>
+            <p14:sldId id="263"/>
           </p14:sldIdLst>
         </p14:section>
-        <p14:section name="La prima cartuccia" id="{be21d0ee-6003-4310-b674-2b073e636880}">
+        <p14:section name="La prima cartuccia" id="{fc75ac91-7685-fabe-8423-ef3fec6b94bf}">
           <p14:sldIdLst>
-            <p14:sldId id="263"/>
             <p14:sldId id="264"/>
             <p14:sldId id="265"/>
           </p14:sldIdLst>
         </p14:section>
-        <p14:section name="Leggere ciò che avete scritto" id="{1fb334e4-1f91-b668-25a7-53400e5e42da}">
+        <p14:section name="Leggere ciò che avete scritto" id="{62f4c20e-efbc-5494-4f67-b5626eea14e3}">
           <p14:sldIdLst>
             <p14:sldId id="266"/>
             <p14:sldId id="267"/>
             <p14:sldId id="268"/>
             <p14:sldId id="269"/>
-            <p14:sldId id="270"/>
           </p14:sldIdLst>
         </p14:section>
-        <p14:section name="Che cosa viene dopo" id="{57303b7a-11de-15a2-cfd3-4ec6da303887}">
+        <p14:section name="Che cosa viene dopo" id="{caf86d52-9f01-f25e-42c9-f04683d1bbc5}">
           <p14:sldIdLst>
+            <p14:sldId id="270"/>
             <p14:sldId id="271"/>
             <p14:sldId id="272"/>
             <p14:sldId id="273"/>
@@ -573,6 +573,7 @@
               <a:t>È la prima lezione in cui si scrive un programma, e precede di proposito ogni teoria. Nell'arco di due ore lo studente costruisce quattro piccole cartucce, ciascuna un programma completo che gira. La piena comprensione di ogni dettaglio oggi non è né attesa né richiesta. Lo scopo è osservare al lavoro registri, memoria e una chiamata di procedura, così che le lezioni successive abbiano fenomeni concreti da spiegare. La citazione fissa il tono della sessione: meno parole, più codice.
 Stato di apprendimento: DA COMPRENDERE OGGI, alla fine di questa lezione lo spiegate, lo seguite passo passo e lo applicate da soli; DA UTILIZZARE OGGI, oggi seguite e usate la ricetta; come funziona dentro si spiega più avanti, o non fa parte del corso; DA COMPRENDERE PIÙ AVANTI, riconoscete il nome e lo scopo; lo spiega una lezione successiva. Una slide senza etichetta è contesto: una storia, un esempio, una domanda, un esercizio.
 Stato di apprendimento di questa lezione. DA COMPRENDERE OGGI: registri, calcolo, trasferimento, salto; i registri; funzioni, chiamata e ritorno; contratto init/update/draw; leggere una riga di assembly; gli argomenti in a0 ... a7; perché si salva ra; indirizzo, valore, load, store; le istruzioni di base; le pseudo-istruzioni; un'istruzione è un numero; seguire a mano l'esecuzione. DA UTILIZZARE OGGI: l'esadecimale (Lezione 04); bit, byte, parola (Lezione 04); la convenzione di chiamata (Lezione 18); le maschere di bit (Lezione 08) e, usati senza essere studiati nel corso, le direttive dell'assemblatore, gli strumenti di PRG32, le chiamate del runtime PRG32, il debugger di PRG32-QT, il programma completo. DA COMPRENDERE PIÙ AVANTI: la pila (Lezione 18); i modi di indirizzamento (Lezione 19); formati delle istruzioni (Lezione 19); il complemento a due (Lezione 05); la virgola fissa (Lezione 06); l'algebra di Boole (Lezione 08); il sommatore (Lezione 09); dai volt ai bit (Lezione 10); latch e flip-flop (Lezione 13); il ciclo del processore (Lezione 19); il progetto Verm1 (Lezione 07). Una slide senza etichetta è contesto: una storia, un esempio, una domanda, un esercizio.
+Percorso. I risultati di oggi: (1) compilare ed eseguire una cartuccia, e dire quando il runtime chiama init, update e draw; (2) leggere una riga di assembly: etichetta, istruzione, operandi, commento; (3) distinguere un indirizzo da un valore, e tracciare che cosa lasciano la, lw, addi e sw nei registri e in memoria. Si appoggia su: solo ciò che ha preparato la Lezione 01. Prossimo passo: Lezione 03, Storia della computazione.
 Per il docente: Lezione nuova del 2026/27. È il turno «gioca» della spirale per tutta la prima metà del corso: ogni lezione successiva rimanda a qualcosa scritto qui. I quattro passi sono quelli verificati del laboratorio 05-asm-first-contact del libro di PRG32; eseguirli dal vivo (labs/run.sh 05-asm-first-contact/stepN_....S first).</a:t>
             </a:r>
             <a:endParaRPr lang="en-US" dirty="0"/>
@@ -1021,9 +1022,9 @@
           <a:p>
             <a:r>
               <a:rPr lang="en-US" dirty="0"/>
-              <a:t>PRG32-QT esegue la stessa cartuccia sul portatile e può fermarsi tra due istruzioni qualsiasi, mostrando ogni registro. Va usato ora sul terzo passo: si va a update, si mette in pausa e si eseguono una alla volta le quattro istruzioni di first_update, osservando t0 e t1. Prima di ogni passo il cambiamento atteso va dichiarato ad alta voce; una previsione resa esplicita è una previsione che può essere sbagliata, e quindi informativa. L'ultima riga è un principio da conservare: la scheda è l'autorità sul tempo, PRG32-QT l'autorità sul contenuto di un registro.
-DA UTILIZZARE OGGI: il debugger di PRG32-QT (si usa, non si studia, in questo corso).
-Per il docente: Dimostrare dal vivo: caricare il passo 3, fermarsi su first_update, eseguire quattro passi. Chiedere agli studenti di prevedere ogni registro prima di premere il tasto.</a:t>
+              <a:t>Il secondo punto di controllo è una traccia a mano: la registrazione, frame per frame, di ciò che ogni istruzione lascia in t1 e in memoria. Le prime due righe sono svolte; gli studenti completano per tre minuti le righe segnate con ?, e le risposte si rivelano poi eseguendo passo passo in PRG32-QT. Frame 256: lw dà 255, addi 256, sw memorizza 256, e la larghezza è 0. Frame 257: 256, 257, 257 e una larghezza di 1. La sorpresa è la larghezza: andi con 255 conserva solo gli otto bit meno significativi, e 256 in binario è un uno seguito da otto zeri, quindi la maschera calcola il resto modulo 256, un fatto usato oggi e spiegato nella Lezione 08. Chi ha scritto 256 come larghezza ha tracciato bene il contatore e ha dimenticato la maschera: l'errore più istruttivo della giornata. Tracciare a mano è lento e poco brillante, ed è l'abilità di debug più preziosa che questo corso insegni.
+DA COMPRENDERE OGGI: seguire a mano l'esecuzione.
+Per il docente: La traccia a mano è l'abilità di debug più preziosa del corso. Dare tre minuti per completare le due righe, poi rivelarle in PRG32-QT: 255, 256, 256, 0 e 256, 257, 257, 1. 256 = 1 0000 0000 in binario: gli otto bit bassi sono tutti zero, quindi la barra ricomincia.</a:t>
             </a:r>
             <a:endParaRPr lang="en-US" dirty="0"/>
           </a:p>
@@ -1111,9 +1112,9 @@
           <a:p>
             <a:r>
               <a:rPr lang="en-US" dirty="0"/>
-              <a:t>Un tracciamento a mano registra, frame per frame, che cosa ogni istruzione lascia in t1 e in memoria. I primi frame non riservano sorprese. La riga evidenziata sì: al frame 256 il contatore raggiunge 256 eppure la larghezza della barra è 0, perché andi con 255 conserva solo gli otto bit meno significativi, e 256 in binario è un uno seguito da otto zeri. L'operazione di maschera calcola quindi il resto modulo 256, un fatto usato oggi e spiegato nella Lezione 08. Il tracciamento a mano è lento e poco brillante, ed è l'abilità di debug più preziosa che questo corso insegni.
-DA COMPRENDERE OGGI: seguire a mano l'esecuzione.
-Per il docente: La traccia a mano è l'abilità di debug più preziosa del corso. 256 = 1 0000 0000 in binario: gli otto bit bassi sono tutti zero, quindi la barra ricomincia.</a:t>
+              <a:t>Questa tabella dice che cosa lo studente non deve ancora capire. Ogni riga registra qualcosa osservato o usato oggi, la domanda che solleva e la lezione che risponde. Perché l'esadecimale? Lezioni 04 e 05. Come fa un registro a contenere un numero negativo? Lezione 05. Che cosa fa AND a trentadue bit in una volta? Lezioni 08 e 09. Come fa un circuito a ricordare un bit? Lezioni 13 e 15. Come viene decodificato ed eseguito 0x00130313? Lezioni 18 e 19, che spiegano anche lo stack frame usato nel passo 2. L'ultima riga è il progetto: da tre funzioni e un rettangolo a un gioco completo. Usare oggi queste cose senza capirle non è un fallimento; è il metodo del corso, e la tabella è la mappa che dice quando ogni domanda avrà risposta.
+DA COMPRENDERE PIÙ AVANTI: l'esadecimale (si studia nella Lezione 04); il complemento a due (si studia nella Lezione 05); la virgola fissa (si studia nella Lezione 06); l'algebra di Boole (si studia nella Lezione 08); il sommatore (si studia nella Lezione 09); dai volt ai bit (si studia nella Lezione 10); latch e flip-flop (si studia nella Lezione 13); il ciclo del processore (si studia nella Lezione 19); il progetto Verm1 (si studia nella Lezione 07).
+Per il docente: È la mappa in avanti del corso. Conservarne una copia: ogni presentazione successiva si apre indicando una di queste righe. L'ultima riga è il progetto: Verm1 parte nella Lezione 07 esattamente dallo scheletro di oggi.</a:t>
             </a:r>
             <a:endParaRPr lang="en-US" dirty="0"/>
           </a:p>
@@ -1201,9 +1202,7 @@
           <a:p>
             <a:r>
               <a:rPr lang="en-US" dirty="0"/>
-              <a:t>Ogni riga della tabella registra qualcosa osservato oggi, la domanda che solleva e la lezione che risponde. Perché l'esadecimale? Lezioni 04 e 05. Come fa un registro a contenere un numero negativo? Lezione 05. Che cosa fa AND a trentadue bit in una volta? Lezioni 08 e 09. Come fa un circuito a ricordare un bit? Lezioni 13 e 15. Come viene decodificato ed eseguito 0x00130313? Lezioni 18 e 19. L'ultima riga è il progetto: da tre funzioni e un rettangolo a un gioco completo. La tabella è la mappa del corso disegnata a partire dal programma dello studente, e conviene tenerla a portata di mano.
-DA COMPRENDERE PIÙ AVANTI: l'esadecimale (si studia nella Lezione 04); il complemento a due (si studia nella Lezione 05); la virgola fissa (si studia nella Lezione 06); l'algebra di Boole (si studia nella Lezione 08); il sommatore (si studia nella Lezione 09); dai volt ai bit (si studia nella Lezione 10); latch e flip-flop (si studia nella Lezione 13); il ciclo del processore (si studia nella Lezione 19); il progetto Verm1 (si studia nella Lezione 07).
-Per il docente: È la mappa in avanti del corso. Conservarne una copia: ogni presentazione successiva si apre indicando una di queste righe. L'ultima riga è il progetto: Verm1 parte nella Lezione 07 esattamente dallo scheletro di oggi.</a:t>
+              <a:t>La mappa di chiusura ricostruisce in cinque riquadri il filo della lezione. Una cartuccia è fatta di tre funzioni che il runtime chiama: init una volta, update e draw a ogni frame. Mentre il programma calcola, i valori stanno nei registri. Tra un frame e l'altro abitano in memoria, a degli indirizzi, come variabili. Lo schema la, lw, addi, sw porta un valore dalla memoria a un registro, lo modifica e lo rimemorizza. E una traccia permette di prevedere lo schermo prima di eseguire il programma. La didascalia dice dove va ciascuna idea. Una buona domanda di chiusura per la classe: quale riquadro servirebbe per spiegare a un amico perché la barra verde ricomincia al frame 256?</a:t>
             </a:r>
             <a:endParaRPr lang="en-US" dirty="0"/>
           </a:p>
@@ -1291,7 +1290,7 @@
           <a:p>
             <a:r>
               <a:rPr lang="en-US" dirty="0"/>
-              <a:t>La prima domanda mette alla prova la distinzione tra indirizzo e valore. la carica in t0 l'indirizzo dell'etichetta; lw usa poi t0 per trovare la parola e ne copia il contenuto in t1, lasciando t0 invariato. t0 contiene quindi ancora l'indirizzo. Chi ha scelto "il valore" torni alla slide con le due frecce.
+              <a:t>La prima domanda mette alla prova la distinzione tra indirizzo e valore. la carica in t0 l'indirizzo dell'etichetta; lw usa poi t0 per trovare la parola e ne copia il contenuto in t1, lasciando t0 invariato. t0 contiene quindi ancora l'indirizzo. Chi ha scelto "il valore" torni alla slide 10, quella con le due frecce.
 La seconda domanda ruota attorno all'effetto di call, che scrive l'indirizzo di ritorno in ra. Una funzione che dovrà poi tornare al proprio chiamante ha bisogno del suo ra originale, che la chiamata ha appena sovrascritto. a0 è fatto per essere sovrascritto, sp è ripristinato dalla funzione chiamata, e t0 è un temporaneo che nessuno si è impegnato a conservare.
 Per il docente: 1. Risposta: B. la carica l'indirizzo dell'etichetta; lw legge poi in t1 il valore memorizzato a quell'indirizzo.
 2. Risposta: C. call scrive in ra l'indirizzo di ritorno. Le chiamate della funzione chiamata lo sovrascriverebbero: una funzione non foglia salva ra sullo stack e lo ripristina prima di ret.</a:t>
@@ -1562,8 +1561,8 @@
           <a:p>
             <a:r>
               <a:rPr lang="en-US" dirty="0"/>
-              <a:t>Sei risultati di apprendimento. I primi quattro sono operativi: compilare ed eseguire una cartuccia, nominare i registri, chiamare una funzione con i suoi argomenti, conservare un valore in memoria tra un frame e l'altro. Il quinto è un cambio di prospettiva con conseguenze durature: un'istruzione è un numero a 32 bit. Il sesto è il più importante per il corso nel suo insieme: lo studente esce con un elenco di domande, ciascuna oggetto di una lezione successiva. La lezione di oggi è quindi un inventario di problemi quanto un insieme di risposte.
-Per il docente: Dire esplicitamente agli studenti che oggi non ci si aspetta che capiscano tutto. Oggi si guarda; le prossime lezioni servono a spiegare.</a:t>
+              <a:t>Questo è il contratto della lezione, ed è volutamente breve. Tre risultati, ciascuno con una verifica che lo studente può vedere (un'etichetta, nel secondo, è un nome che segna un punto del programma; la slide 9 ne mostra una): il punto di controllo 1 verifica il primo, il biglietto d'uscita il secondo, e il punto di controllo 2, la traccia, il terzo. Gli unici prerequisiti sono quelli della Lezione 01: sapere che cos'è un programma, usare il terminale e avere PRG32-QT funzionante. Il programma di oggi contiene anche cose che si usano senza capirle: lo stack frame che salva ra, la convenzione di chiamata, la codifica di un'istruzione come numero. Servono a far girare il programma, e le ultime slide della lezione dicono quale lezione spiega ciascuna di esse. Uno studente che alla fine sa fare le tre cose di questa slide ha raggiunto l'obiettivo del giorno, anche se molto altro resta poco chiaro.
+Per il docente: Leggere ad alta voce il contratto e tornarci alla fine. Tre risultati, tre verifiche: il punto di controllo 1 (dopo il contratto), il punto di controllo 2 (la traccia) e il biglietto d'uscita. Tutto il resto che compare oggi nelle slide va visto e usato, non padroneggiato.</a:t>
             </a:r>
             <a:endParaRPr lang="en-US" dirty="0"/>
           </a:p>
@@ -1652,7 +1651,7 @@
             <a:r>
               <a:rPr lang="en-US" dirty="0"/>
               <a:t>Quattro proposizioni riassumono la lezione. Un processore RISC-V consiste di trentadue registri e di un piccolo insieme di istruzioni che calcolano, trasferiscono dati e cambiano il flusso di controllo. Un gioco PRG32 consiste di tre funzioni; gli argomenti viaggiano da a0 ad a7, e una funzione che ne chiama un'altra deve salvare ra. Le variabili risiedono in memoria: la dà l'indirizzo, lw e sw il valore. Un'istruzione è un numero a 32 bit, e l'assembly è la sua notazione leggibile. La prossima lezione fa un passo indietro per ripercorrere la storia che ha prodotto questa macchina.
-Stato di apprendimento, riepilogo. DA COMPRENDERE OGGI: registri, calcolo, trasferimento, salto; i registri; funzioni, chiamata e ritorno; contratto init/update/draw; leggere una riga di assembly; gli argomenti in a0 ... a7; perché si salva ra; indirizzo, valore, load, store; le istruzioni di base; le pseudo-istruzioni; un'istruzione è un numero; seguire a mano l'esecuzione. DA UTILIZZARE OGGI: l'esadecimale (Lezione 04); bit, byte, parola (Lezione 04); la convenzione di chiamata (Lezione 18); le maschere di bit (Lezione 08) e, usati senza essere studiati nel corso, le direttive dell'assemblatore, gli strumenti di PRG32, le chiamate del runtime PRG32, il debugger di PRG32-QT, il programma completo. DA COMPRENDERE PIÙ AVANTI: la pila (Lezione 18); i modi di indirizzamento (Lezione 19); formati delle istruzioni (Lezione 19); il complemento a due (Lezione 05); la virgola fissa (Lezione 06); l'algebra di Boole (Lezione 08); il sommatore (Lezione 09); dai volt ai bit (Lezione 10); latch e flip-flop (Lezione 13); il ciclo del processore (Lezione 19); il progetto Verm1 (Lezione 07). Una slide senza etichetta è contesto: una storia, un esempio, una domanda, un esercizio.
+Stato di apprendimento, riepilogo. DA COMPRENDERE OGGI: registri, calcolo, trasferimento, salto; i registri; funzioni, chiamata e ritorno; contratto init/update/draw; leggere una riga di assembly; gli argomenti in a0 ... a7; perché si salva ra; indirizzo, valore, load, store; le istruzioni di base; le pseudo-istruzioni; un'istruzione è un numero; seguire a mano l'esecuzione. DA UTILIZZARE OGGI: l'esadecimale (Lezione 04); bit, byte, parola (Lezione 04); la convenzione di chiamata (Lezione 18); le maschere di bit (Lezione 08) e, usati senza essere studiati nel corso, le direttive dell'assemblatore, gli strumenti di PRG32, le chiamate del runtime PRG32, il debugger di PRG32-QT, il programma completo. DA COMPRENDERE PIÙ AVANTI: la pila (Lezione 18); i modi di indirizzamento (Lezione 19); formati delle istruzioni (Lezione 19); il complemento a due (Lezione 05); la virgola fissa (Lezione 06); l'algebra di Boole (Lezione 08); il sommatore (Lezione 09); dai volt ai bit (Lezione 10); latch e flip-flop (Lezione 13); il ciclo del processore (Lezione 19); il progetto Verm1 (Lezione 07). Una slide senza etichetta è contesto: una storia, un esempio, una domanda, un esercizio. Il filo della lezione: Un programma è fatto di poche funzioni che il runtime chiama; ogni riga è un'istruzione; i valori stanno nei registri mentre si calcola e in memoria tra un frame e l'altro. Tutto il resto che avete usato oggi ha una sua lezione. Prossimo passo: da dove vengono queste idee. Biglietto d'uscita (da due a quattro minuti, da soli, su carta): 1. Leggete ad alta voce la riga  loop:  li a0, 32   # x . Nominatene etichetta, istruzione, operandi e commento. li è un'istruzione del processore? Che cosa ne fa l'assemblatore? 2. Il debugger mostra l'istruzione addi t1, t1, 1 conservata in memoria come la parola 0x00130313. Che cos'è quella parola, e che cosa vi dice su dove abita un programma?
 Per il docente: Prossima lezione: la storia che ha portato a questa macchina.</a:t>
             </a:r>
             <a:endParaRPr lang="en-US" dirty="0"/>
@@ -1922,7 +1921,7 @@
           <a:p>
             <a:r>
               <a:rPr lang="en-US" dirty="0"/>
-              <a:t>I registri hanno nomi che ne riflettono l'uso. Da a0 ad a7 passano gli argomenti di una chiamata, e a0 restituisce anche il risultato. Da t0 a t6 sono temporanei, liberamente utilizzabili e non conservati attraverso le chiamate. Da s0 a s11 sono conservati attraverso le chiamate. ra contiene l'indirizzo di ritorno, sp la cima dello stack, una zona di memoria in cui le funzioni tengono valori per un po' (la slide 9 mostra come), e zero vale sempre 0. La didascalia contiene il punto essenziale: questi ruoli non sono imposti dall'hardware, che tratta in modo identico i registri da x1 a x31. Sono un accordo, la convenzione di chiamata, ed è questo accordo che permette all'assembly scritto dallo studente e al codice C del framework di chiamarsi a vicenda. Oggi la si usa; la si studia formalmente nella Lezione 18.
+              <a:t>I registri hanno nomi che ne riflettono l'uso. Da a0 ad a7 passano gli argomenti di una chiamata, e a0 restituisce anche il risultato. Da t0 a t6 sono temporanei, liberamente utilizzabili e non conservati attraverso le chiamate. Da s0 a s11 sono conservati attraverso le chiamate. ra contiene l'indirizzo di ritorno, sp la cima dello stack, una zona di memoria in cui le funzioni tengono valori per un po' (il passo 2, nella presentazione del codice, mostra come), e zero vale sempre 0. La didascalia contiene il punto essenziale: questi ruoli non sono imposti dall'hardware, che tratta in modo identico i registri da x1 a x31. Sono un accordo, la convenzione di chiamata, ed è questo accordo che permette all'assembly scritto dallo studente e al codice C del framework di chiamarsi a vicenda. Oggi la si usa; la si studia formalmente nella Lezione 18.
 DA COMPRENDERE OGGI: i registri. DA UTILIZZARE OGGI: la convenzione di chiamata (si studia nella Lezione 18).
 Per il docente: I ruoli non sono fissati dall'hardware ma da un accordo: la convenzione di chiamata, o ABI. Rispettarla è ciò che permette al vostro assembly e al codice C del framework di chiamarsi a vicenda.</a:t>
             </a:r>
@@ -2192,10 +2191,8 @@
           <a:p>
             <a:r>
               <a:rPr lang="en-US" dirty="0"/>
-              <a:t>Prima del primo listato, una guida per leggerlo. Una riga di assembly ha al più quattro parti, e la tabella le nomina. Un'etichetta è un nome seguito dai due punti; segna un punto del programma, spesso l'inizio di una funzione. L'istruzione è l'operazione da eseguire. Gli operandi sono ciò su cui l'istruzione lavora, e in RISC-V la destinazione viene sempre per prima. Un commento comincia con # e arriva a fine riga; è scritto per le persone, e l'assemblatore lo ignora.
-Una riga che comincia con un punto è una direttiva. È un'istruzione per l'assemblatore, non per il processore: .section .text, per esempio, dice che il codice che segue va messo tra le istruzioni eseguibili. La didascalia mostra una riga completa. Si legge "metti in t1 il valore di t1 più 1", che un matematico scriverebbe t1 = t1 + 1. Righe vuote e rientri non cambiano il programma; lo rendono solo più facile da leggere, e anche questo conta.
-DA COMPRENDERE OGGI: leggere una riga di assembly.
-Per il docente: La riga addi t1, t1, 1 si legge ad alta voce così: metti in t1 il valore di t1 più 1. La destinazione viene per prima, come nell'assegnamento t1 = t1 + 1. Una riga può contenere un'etichetta, un'istruzione, un commento, o più d'uno di questi; righe vuote e rientri contano per chi legge, non per l'assemblatore.</a:t>
+              <a:t>Il primo punto di controllo, dopo il contratto delle tre funzioni. Gli studenti rispondono da soli per un minuto, poi si accordano con il vicino, poi la classe verifica insieme. Le risposte: init è chiamata una volta, all'avvio della cartuccia; update e draw sono chiamate una volta per frame, quindi 2 secondi a 30 frame al secondo danno 60 chiamate ciascuna. Solo le istruzioni di trasferimento, lw e sw, leggono o scrivono la memoria; quelle di calcolo lavorano solo sui registri, e i salti cambiano quale istruzione viene eseguita dopo. La risposta sbagliata più comune è che init giri a ogni frame: conviene chiedere chi ha scelto 60 per init, e perché. Chi non sa rispondere alla seconda domanda riguardi la scheda Trasferimento della slide 4.
+Per il docente: Fermarsi qui due o tre minuti. Raccogliere un'alzata di mano per init: la risposta sbagliata più comune è 60. Le risposte sono nelle note della slide.</a:t>
             </a:r>
             <a:endParaRPr lang="en-US" dirty="0"/>
           </a:p>
@@ -2283,9 +2280,10 @@
           <a:p>
             <a:r>
               <a:rPr lang="en-US" dirty="0"/>
-              <a:t>Perché si deve salvare ra? L'istruzione call scrive in ra l'indirizzo a cui il controllo deve tornare. La funzione chiamata, però, può a sua volta fare chiamate, ciascuna delle quali sovrascrive ra. Una funzione che ne chiama un'altra deve quindi prima preservare in memoria il proprio indirizzo di ritorno: decrementa sp di 16 per riservare spazio, lo stack frame, e memorizza ra in 12(sp); dopo la chiamata esegue le operazioni inverse. Lo schema mostra il frame, con lo stack che cresce verso gli indirizzi bassi; la dimensione di 16 byte discende dall'allineamento che la convenzione richiede a sp. Omettere questa coppia di operazioni è il classico primo errore: la funzione ritorna nel posto sbagliato. Perché si salva ra va compreso oggi; lo stack come struttura dati si tratta formalmente nella Lezione 18.
-DA COMPRENDERE OGGI: perché si salva ra. DA COMPRENDERE PIÙ AVANTI: la pila (si studia nella Lezione 18).
-Per il docente: La convenzione richiede che sp resti allineato a 16 byte tra una chiamata e l'altra: per questo il frame è di 16 byte anche se ne servono solo 4. Lo stack, con push e pop, è trattato formalmente nella Lezione 18.</a:t>
+              <a:t>Prima del primo listato, una guida per leggerlo. Una riga di assembly ha al più quattro parti, e la tabella le nomina. Un'etichetta è un nome seguito dai due punti; segna un punto del programma, spesso l'inizio di una funzione. L'istruzione è l'operazione da eseguire. Gli operandi sono ciò su cui l'istruzione lavora, e in RISC-V la destinazione viene sempre per prima. Un commento comincia con # e arriva a fine riga; è scritto per le persone, e l'assemblatore lo ignora.
+Una riga che comincia con un punto è una direttiva. È un'istruzione per l'assemblatore, non per il processore: .section .text, per esempio, dice che il codice che segue va messo tra le istruzioni eseguibili. La didascalia mostra una riga completa. Si legge "metti in t1 il valore di t1 più 1", che un matematico scriverebbe t1 = t1 + 1. Righe vuote e rientri non cambiano il programma; lo rendono solo più facile da leggere, e anche questo conta.
+DA COMPRENDERE OGGI: leggere una riga di assembly.
+Per il docente: La riga addi t1, t1, 1 si legge ad alta voce così: metti in t1 il valore di t1 più 1. La destinazione viene per prima, come nell'assegnamento t1 = t1 + 1. Una riga può contenere un'etichetta, un'istruzione, un commento, o più d'uno di questi; righe vuote e rientri contano per chi legge, non per l'assemblatore.</a:t>
             </a:r>
             <a:endParaRPr lang="en-US" dirty="0"/>
           </a:p>
@@ -10222,612 +10220,15 @@
                 <a:ea typeface="Cambria" pitchFamily="34" charset="-122"/>
                 <a:cs typeface="Cambria" pitchFamily="34" charset="-120"/>
               </a:rPr>
-              <a:t>PRG32-QT: un microscopio per i registri</a:t>
+              <a:t>Punto di controllo 2: tracciate first_update a mano</a:t>
             </a:r>
             <a:endParaRPr lang="en-US" sz="3200" dirty="0"/>
           </a:p>
         </p:txBody>
       </p:sp>
-      <p:sp>
-        <p:nvSpPr>
-          <p:cNvPr id="3" name="Shape 1"/>
-          <p:cNvSpPr/>
-          <p:nvPr/>
-        </p:nvSpPr>
-        <p:spPr>
-          <a:xfrm>
-            <a:off x="548640" y="1539240"/>
-            <a:ext cx="146304" cy="146304"/>
-          </a:xfrm>
-          <a:prstGeom prst="rect">
-            <a:avLst/>
-          </a:prstGeom>
-          <a:solidFill>
-            <a:srgbClr val="0E7C86"/>
-          </a:solidFill>
-          <a:ln w="12700">
-            <a:solidFill>
-              <a:srgbClr val="0E7C86"/>
-            </a:solidFill>
-            <a:prstDash val="solid"/>
-          </a:ln>
-        </p:spPr>
-      </p:sp>
-      <p:sp>
-        <p:nvSpPr>
-          <p:cNvPr id="4" name="Text 2"/>
-          <p:cNvSpPr txBox="1"/>
-          <p:nvPr/>
-        </p:nvSpPr>
-        <p:spPr>
-          <a:xfrm>
-            <a:off x="932688" y="1417320"/>
-            <a:ext cx="5468112" cy="1115568"/>
-          </a:xfrm>
-          <a:prstGeom prst="rect">
-            <a:avLst/>
-          </a:prstGeom>
-          <a:noFill/>
-          <a:ln/>
-        </p:spPr>
-        <p:txBody>
-          <a:bodyPr wrap="square" lIns="0" tIns="0" rIns="0" bIns="0" rtlCol="0" anchor="t"/>
-          <a:lstStyle/>
-          <a:p>
-            <a:pPr indent="0" marL="0">
-              <a:spcAft>
-                <a:spcPts val="200"/>
-              </a:spcAft>
-              <a:buNone/>
-            </a:pPr>
-            <a:r>
-              <a:rPr lang="en-US" sz="2400" dirty="0">
-                <a:solidFill>
-                  <a:srgbClr val="1B2530"/>
-                </a:solidFill>
-                <a:latin typeface="Calibri" pitchFamily="34" charset="0"/>
-                <a:ea typeface="Calibri" pitchFamily="34" charset="-122"/>
-                <a:cs typeface="Calibri" pitchFamily="34" charset="-120"/>
-              </a:rPr>
-              <a:t>Esegue la stessa cartuccia sul vostro computer, un'istruzione alla volta</a:t>
-            </a:r>
-            <a:endParaRPr lang="en-US" sz="2400" dirty="0"/>
-          </a:p>
-        </p:txBody>
-      </p:sp>
-      <p:sp>
-        <p:nvSpPr>
-          <p:cNvPr id="5" name="Shape 3"/>
-          <p:cNvSpPr/>
-          <p:nvPr/>
-        </p:nvSpPr>
-        <p:spPr>
-          <a:xfrm>
-            <a:off x="548640" y="3000248"/>
-            <a:ext cx="146304" cy="146304"/>
-          </a:xfrm>
-          <a:prstGeom prst="rect">
-            <a:avLst/>
-          </a:prstGeom>
-          <a:solidFill>
-            <a:srgbClr val="C7791B"/>
-          </a:solidFill>
-          <a:ln w="12700">
-            <a:solidFill>
-              <a:srgbClr val="C7791B"/>
-            </a:solidFill>
-            <a:prstDash val="solid"/>
-          </a:ln>
-        </p:spPr>
-      </p:sp>
-      <p:sp>
-        <p:nvSpPr>
-          <p:cNvPr id="6" name="Text 4"/>
-          <p:cNvSpPr txBox="1"/>
-          <p:nvPr/>
-        </p:nvSpPr>
-        <p:spPr>
-          <a:xfrm>
-            <a:off x="932688" y="2878328"/>
-            <a:ext cx="5468112" cy="743712"/>
-          </a:xfrm>
-          <a:prstGeom prst="rect">
-            <a:avLst/>
-          </a:prstGeom>
-          <a:noFill/>
-          <a:ln/>
-        </p:spPr>
-        <p:txBody>
-          <a:bodyPr wrap="square" lIns="0" tIns="0" rIns="0" bIns="0" rtlCol="0" anchor="t"/>
-          <a:lstStyle/>
-          <a:p>
-            <a:pPr indent="0" marL="0">
-              <a:spcAft>
-                <a:spcPts val="200"/>
-              </a:spcAft>
-              <a:buNone/>
-            </a:pPr>
-            <a:r>
-              <a:rPr lang="en-US" sz="2400" dirty="0">
-                <a:solidFill>
-                  <a:srgbClr val="1B2530"/>
-                </a:solidFill>
-                <a:latin typeface="Calibri" pitchFamily="34" charset="0"/>
-                <a:ea typeface="Calibri" pitchFamily="34" charset="-122"/>
-                <a:cs typeface="Calibri" pitchFamily="34" charset="-120"/>
-              </a:rPr>
-              <a:t>Si ferma tra due istruzioni qualsiasi e mostra tutti i registri</a:t>
-            </a:r>
-            <a:endParaRPr lang="en-US" sz="2400" dirty="0"/>
-          </a:p>
-        </p:txBody>
-      </p:sp>
-      <p:sp>
-        <p:nvSpPr>
-          <p:cNvPr id="7" name="Shape 5"/>
-          <p:cNvSpPr/>
-          <p:nvPr/>
-        </p:nvSpPr>
-        <p:spPr>
-          <a:xfrm>
-            <a:off x="548640" y="4089400"/>
-            <a:ext cx="146304" cy="146304"/>
-          </a:xfrm>
-          <a:prstGeom prst="rect">
-            <a:avLst/>
-          </a:prstGeom>
-          <a:solidFill>
-            <a:srgbClr val="0E7C86"/>
-          </a:solidFill>
-          <a:ln w="12700">
-            <a:solidFill>
-              <a:srgbClr val="0E7C86"/>
-            </a:solidFill>
-            <a:prstDash val="solid"/>
-          </a:ln>
-        </p:spPr>
-      </p:sp>
-      <p:sp>
-        <p:nvSpPr>
-          <p:cNvPr id="8" name="Text 6"/>
-          <p:cNvSpPr txBox="1"/>
-          <p:nvPr/>
-        </p:nvSpPr>
-        <p:spPr>
-          <a:xfrm>
-            <a:off x="932688" y="3967480"/>
-            <a:ext cx="5468112" cy="743712"/>
-          </a:xfrm>
-          <a:prstGeom prst="rect">
-            <a:avLst/>
-          </a:prstGeom>
-          <a:noFill/>
-          <a:ln/>
-        </p:spPr>
-        <p:txBody>
-          <a:bodyPr wrap="square" lIns="0" tIns="0" rIns="0" bIns="0" rtlCol="0" anchor="t"/>
-          <a:lstStyle/>
-          <a:p>
-            <a:pPr indent="0" marL="0">
-              <a:spcAft>
-                <a:spcPts val="200"/>
-              </a:spcAft>
-              <a:buNone/>
-            </a:pPr>
-            <a:r>
-              <a:rPr lang="en-US" sz="2400" dirty="0">
-                <a:solidFill>
-                  <a:srgbClr val="1B2530"/>
-                </a:solidFill>
-                <a:latin typeface="Calibri" pitchFamily="34" charset="0"/>
-                <a:ea typeface="Calibri" pitchFamily="34" charset="-122"/>
-                <a:cs typeface="Calibri" pitchFamily="34" charset="-120"/>
-              </a:rPr>
-              <a:t>Eseguite first_update passo-passo e guardate cambiare t0 e t1</a:t>
-            </a:r>
-            <a:endParaRPr lang="en-US" sz="2400" dirty="0"/>
-          </a:p>
-        </p:txBody>
-      </p:sp>
-      <p:sp>
-        <p:nvSpPr>
-          <p:cNvPr id="9" name="Shape 7"/>
-          <p:cNvSpPr/>
-          <p:nvPr/>
-        </p:nvSpPr>
-        <p:spPr>
-          <a:xfrm>
-            <a:off x="548640" y="5178552"/>
-            <a:ext cx="146304" cy="146304"/>
-          </a:xfrm>
-          <a:prstGeom prst="rect">
-            <a:avLst/>
-          </a:prstGeom>
-          <a:solidFill>
-            <a:srgbClr val="C7791B"/>
-          </a:solidFill>
-          <a:ln w="12700">
-            <a:solidFill>
-              <a:srgbClr val="C7791B"/>
-            </a:solidFill>
-            <a:prstDash val="solid"/>
-          </a:ln>
-        </p:spPr>
-      </p:sp>
-      <p:sp>
-        <p:nvSpPr>
-          <p:cNvPr id="10" name="Text 8"/>
-          <p:cNvSpPr txBox="1"/>
-          <p:nvPr/>
-        </p:nvSpPr>
-        <p:spPr>
-          <a:xfrm>
-            <a:off x="932688" y="5056632"/>
-            <a:ext cx="5468112" cy="1115568"/>
-          </a:xfrm>
-          <a:prstGeom prst="rect">
-            <a:avLst/>
-          </a:prstGeom>
-          <a:noFill/>
-          <a:ln/>
-        </p:spPr>
-        <p:txBody>
-          <a:bodyPr wrap="square" lIns="0" tIns="0" rIns="0" bIns="0" rtlCol="0" anchor="t"/>
-          <a:lstStyle/>
-          <a:p>
-            <a:pPr indent="0" marL="0">
-              <a:spcAft>
-                <a:spcPts val="200"/>
-              </a:spcAft>
-              <a:buNone/>
-            </a:pPr>
-            <a:r>
-              <a:rPr lang="en-US" sz="2400" dirty="0">
-                <a:solidFill>
-                  <a:srgbClr val="1B2530"/>
-                </a:solidFill>
-                <a:latin typeface="Calibri" pitchFamily="34" charset="0"/>
-                <a:ea typeface="Calibri" pitchFamily="34" charset="-122"/>
-                <a:cs typeface="Calibri" pitchFamily="34" charset="-120"/>
-              </a:rPr>
-              <a:t>Usate la scheda quando volete la verità sul tempo, PRG32-QT quando volete la verità su un registro</a:t>
-            </a:r>
-            <a:endParaRPr lang="en-US" sz="2400" dirty="0"/>
-          </a:p>
-        </p:txBody>
-      </p:sp>
-      <p:pic>
-        <p:nvPicPr>
-          <p:cNvPr id="11" name="Image 0" descr="/Users/raffaelemontella/devel/riscv-prg32/computer-architecture-with-prg32/tools/assets/prg32qt_debugger.png">    </p:cNvPr>
-          <p:cNvPicPr>
-            <a:picLocks noChangeAspect="1"/>
-          </p:cNvPicPr>
-          <p:nvPr/>
-        </p:nvPicPr>
-        <p:blipFill>
-          <a:blip r:embed="rId1"/>
-          <a:stretch>
-            <a:fillRect/>
-          </a:stretch>
-        </p:blipFill>
-        <p:spPr>
-          <a:xfrm>
-            <a:off x="6766560" y="1882245"/>
-            <a:ext cx="4876495" cy="3367829"/>
-          </a:xfrm>
-          <a:prstGeom prst="rect">
-            <a:avLst/>
-          </a:prstGeom>
-        </p:spPr>
-      </p:pic>
-      <p:sp>
-        <p:nvSpPr>
-          <p:cNvPr id="12" name="Text 9"/>
-          <p:cNvSpPr txBox="1"/>
-          <p:nvPr/>
-        </p:nvSpPr>
-        <p:spPr>
-          <a:xfrm>
-            <a:off x="6766560" y="5788152"/>
-            <a:ext cx="4876495" cy="384048"/>
-          </a:xfrm>
-          <a:prstGeom prst="rect">
-            <a:avLst/>
-          </a:prstGeom>
-          <a:noFill/>
-          <a:ln/>
-        </p:spPr>
-        <p:txBody>
-          <a:bodyPr wrap="square" lIns="0" tIns="0" rIns="0" bIns="0" rtlCol="0" anchor="ctr"/>
-          <a:lstStyle/>
-          <a:p>
-            <a:pPr algn="ctr" indent="0" marL="0">
-              <a:buNone/>
-            </a:pPr>
-            <a:r>
-              <a:rPr lang="en-US" sz="1200" i="1" dirty="0">
-                <a:solidFill>
-                  <a:srgbClr val="5B6B78"/>
-                </a:solidFill>
-                <a:latin typeface="Calibri" pitchFamily="34" charset="0"/>
-                <a:ea typeface="Calibri" pitchFamily="34" charset="-122"/>
-                <a:cs typeface="Calibri" pitchFamily="34" charset="-120"/>
-              </a:rPr>
-              <a:t>Il debugger di PRG32-QT: codice, registri, memoria</a:t>
-            </a:r>
-            <a:endParaRPr lang="en-US" sz="1200" dirty="0"/>
-          </a:p>
-        </p:txBody>
-      </p:sp>
-      <p:sp>
-        <p:nvSpPr>
-          <p:cNvPr id="13" name="Shape 10"/>
-          <p:cNvSpPr/>
-          <p:nvPr/>
-        </p:nvSpPr>
-        <p:spPr>
-          <a:xfrm>
-            <a:off x="7809941" y="91440"/>
-            <a:ext cx="3833114" cy="274320"/>
-          </a:xfrm>
-          <a:prstGeom prst="rect">
-            <a:avLst/>
-          </a:prstGeom>
-          <a:solidFill>
-            <a:srgbClr val="FEF3C7"/>
-          </a:solidFill>
-          <a:ln w="12700">
-            <a:solidFill>
-              <a:srgbClr val="B45309"/>
-            </a:solidFill>
-            <a:prstDash val="solid"/>
-          </a:ln>
-        </p:spPr>
-      </p:sp>
-      <p:sp>
-        <p:nvSpPr>
-          <p:cNvPr id="14" name="Shape 11"/>
-          <p:cNvSpPr/>
-          <p:nvPr/>
-        </p:nvSpPr>
-        <p:spPr>
-          <a:xfrm>
-            <a:off x="7809941" y="91440"/>
-            <a:ext cx="27432" cy="274320"/>
-          </a:xfrm>
-          <a:prstGeom prst="rect">
-            <a:avLst/>
-          </a:prstGeom>
-          <a:solidFill>
-            <a:srgbClr val="B45309"/>
-          </a:solidFill>
-          <a:ln w="12700">
-            <a:solidFill>
-              <a:srgbClr val="B45309"/>
-            </a:solidFill>
-            <a:prstDash val="solid"/>
-          </a:ln>
-        </p:spPr>
-      </p:sp>
-      <p:sp>
-        <p:nvSpPr>
-          <p:cNvPr id="15" name="Shape 12"/>
-          <p:cNvSpPr/>
-          <p:nvPr/>
-        </p:nvSpPr>
-        <p:spPr>
-          <a:xfrm>
-            <a:off x="7864805" y="91440"/>
-            <a:ext cx="27432" cy="274320"/>
-          </a:xfrm>
-          <a:prstGeom prst="rect">
-            <a:avLst/>
-          </a:prstGeom>
-          <a:solidFill>
-            <a:srgbClr val="B45309"/>
-          </a:solidFill>
-          <a:ln w="12700">
-            <a:solidFill>
-              <a:srgbClr val="B45309"/>
-            </a:solidFill>
-            <a:prstDash val="solid"/>
-          </a:ln>
-        </p:spPr>
-      </p:sp>
-      <p:pic>
-        <p:nvPicPr>
-          <p:cNvPr id="16" name="Image 1" descr="preencoded.png">    </p:cNvPr>
-          <p:cNvPicPr>
-            <a:picLocks noChangeAspect="1"/>
-          </p:cNvPicPr>
-          <p:nvPr/>
-        </p:nvPicPr>
-        <p:blipFill>
-          <a:blip r:embed="rId2"/>
-          <a:stretch>
-            <a:fillRect/>
-          </a:stretch>
-        </p:blipFill>
-        <p:spPr>
-          <a:xfrm>
-            <a:off x="7937957" y="128016"/>
-            <a:ext cx="201168" cy="201168"/>
-          </a:xfrm>
-          <a:prstGeom prst="rect">
-            <a:avLst/>
-          </a:prstGeom>
-        </p:spPr>
-      </p:pic>
-      <p:sp>
-        <p:nvSpPr>
-          <p:cNvPr id="17" name="Text 13"/>
-          <p:cNvSpPr txBox="1"/>
-          <p:nvPr/>
-        </p:nvSpPr>
-        <p:spPr>
-          <a:xfrm>
-            <a:off x="8193989" y="91440"/>
-            <a:ext cx="3412490" cy="274320"/>
-          </a:xfrm>
-          <a:prstGeom prst="rect">
-            <a:avLst/>
-          </a:prstGeom>
-          <a:noFill/>
-          <a:ln/>
-        </p:spPr>
-        <p:txBody>
-          <a:bodyPr wrap="square" lIns="0" tIns="0" rIns="0" bIns="0" rtlCol="0" anchor="ctr"/>
-          <a:lstStyle/>
-          <a:p>
-            <a:pPr indent="0" marL="0">
-              <a:buNone/>
-            </a:pPr>
-            <a:r>
-              <a:rPr lang="en-US" sz="1100" b="1" dirty="0">
-                <a:solidFill>
-                  <a:srgbClr val="92400E"/>
-                </a:solidFill>
-                <a:latin typeface="Calibri" pitchFamily="34" charset="0"/>
-                <a:ea typeface="Calibri" pitchFamily="34" charset="-122"/>
-                <a:cs typeface="Calibri" pitchFamily="34" charset="-120"/>
-              </a:rPr>
-              <a:t>DA UTILIZZARE OGGI</a:t>
-            </a:r>
-            <a:pPr indent="0" marL="0">
-              <a:buNone/>
-            </a:pPr>
-            <a:r>
-              <a:rPr lang="en-US" sz="1100" dirty="0">
-                <a:solidFill>
-                  <a:srgbClr val="92400E"/>
-                </a:solidFill>
-                <a:latin typeface="Calibri" pitchFamily="34" charset="0"/>
-                <a:ea typeface="Calibri" pitchFamily="34" charset="-122"/>
-                <a:cs typeface="Calibri" pitchFamily="34" charset="-120"/>
-              </a:rPr>
-              <a:t> · il debugger di PRG32-QT</a:t>
-            </a:r>
-            <a:endParaRPr lang="en-US" sz="1100" dirty="0"/>
-          </a:p>
-        </p:txBody>
-      </p:sp>
-      <p:sp>
-        <p:nvSpPr>
-          <p:cNvPr id="25" name="Slide Number Placeholder 0"/>
-          <p:cNvSpPr>
-            <a:spLocks noGrp="1"/>
-          </p:cNvSpPr>
-          <p:nvPr>
-            <p:ph type="sldNum" sz="quarter" idx="4294967295"/>
-          </p:nvPr>
-        </p:nvSpPr>
-        <p:spPr>
-          <a:xfrm>
-            <a:off x="11002975" y="6419088"/>
-            <a:ext cx="640080" cy="274320"/>
-          </a:xfrm>
-          <a:prstGeom prst="rect">
-            <a:avLst/>
-          </a:prstGeom>
-          <a:extLst>
-            <a:ext uri="{C572A759-6A51-4108-AA02-DFA0A04FC94B}">
-              <ma14:wrappingTextBoxFlag xmlns:ma14="http://schemas.microsoft.com/office/mac/drawingml/2011/main" val="0"/>
-            </a:ext>
-          </a:extLst>
-        </p:spPr>
-        <p:txBody>
-          <a:bodyPr/>
-          <a:lstStyle>
-            <a:lvl1pPr>
-              <a:defRPr sz="1000">
-                <a:solidFill>
-                  <a:srgbClr val="5B6B78"/>
-                </a:solidFill>
-                <a:latin typeface="Calibri"/>
-                <a:ea typeface="Calibri"/>
-                <a:cs typeface="Calibri"/>
-              </a:defRPr>
-            </a:lvl1pPr>
-          </a:lstStyle>
-          <a:p>
-            <a:pPr algn="r"/>
-            <a:fld id="{F7021451-1387-4CA6-816F-3879F97B5CBC}" type="slidenum">
-              <a:rPr b="0" lang="en-US"/>
-              <a:t>14</a:t>
-            </a:fld>
-            <a:endParaRPr lang="en-US"/>
-          </a:p>
-        </p:txBody>
-      </p:sp>
-    </p:spTree>
-  </p:cSld>
-  <p:clrMapOvr>
-    <a:masterClrMapping/>
-  </p:clrMapOvr>
-</p:sld>
-</file>
-
-<file path=ppt/slides/slide15.xml><?xml version="1.0" encoding="utf-8"?>
-<p:sld xmlns:a="http://schemas.openxmlformats.org/drawingml/2006/main" xmlns:r="http://schemas.openxmlformats.org/officeDocument/2006/relationships" xmlns:p="http://schemas.openxmlformats.org/presentationml/2006/main">
-  <p:cSld name="Slide 15">
-    <p:spTree>
-      <p:nvGrpSpPr>
-        <p:cNvPr id="1" name=""/>
-        <p:cNvGrpSpPr/>
-        <p:nvPr/>
-      </p:nvGrpSpPr>
-      <p:grpSpPr>
-        <a:xfrm>
-          <a:off x="0" y="0"/>
-          <a:ext cx="0" cy="0"/>
-          <a:chOff x="0" y="0"/>
-          <a:chExt cx="0" cy="0"/>
-        </a:xfrm>
-      </p:grpSpPr>
-      <p:sp>
-        <p:nvSpPr>
-          <p:cNvPr id="2" name="Text 1"/>
-          <p:cNvSpPr/>
-          <p:nvPr>
-            <p:ph idx="101" type="title" hasCustomPrompt="1"/>
-          </p:nvPr>
-        </p:nvSpPr>
-        <p:spPr>
-          <a:xfrm>
-            <a:off x="548640" y="365760"/>
-            <a:ext cx="11094415" cy="868680"/>
-          </a:xfrm>
-          <a:prstGeom prst="rect">
-            <a:avLst/>
-          </a:prstGeom>
-          <a:noFill/>
-          <a:ln/>
-        </p:spPr>
-        <p:txBody>
-          <a:bodyPr wrap="square" lIns="0" tIns="0" rIns="0" bIns="0" rtlCol="0" anchor="ctr"/>
-          <a:lstStyle/>
-          <a:p>
-            <a:pPr algn="l" indent="0" marL="0">
-              <a:buNone/>
-            </a:pPr>
-            <a:r>
-              <a:rPr lang="en-US" sz="3200" b="1" dirty="0">
-                <a:solidFill>
-                  <a:srgbClr val="2E4A62"/>
-                </a:solidFill>
-                <a:latin typeface="Cambria" pitchFamily="34" charset="0"/>
-                <a:ea typeface="Cambria" pitchFamily="34" charset="-122"/>
-                <a:cs typeface="Cambria" pitchFamily="34" charset="-120"/>
-              </a:rPr>
-              <a:t>Tracciare a mano: tre frame di first_update</a:t>
-            </a:r>
-            <a:endParaRPr lang="en-US" sz="3200" dirty="0"/>
-          </a:p>
-        </p:txBody>
-      </p:sp>
       <p:graphicFrame>
         <p:nvGraphicFramePr>
-          <p:cNvPr id="16" name="Table 0"/>
+          <p:cNvPr id="15" name="Table 0"/>
           <p:cNvGraphicFramePr>
             <a:graphicFrameLocks noGrp="1"/>
           </p:cNvGraphicFramePr>
@@ -11966,7 +11367,7 @@
                           <a:ea typeface="Calibri" pitchFamily="34" charset="-122"/>
                           <a:cs typeface="Calibri" pitchFamily="34" charset="-120"/>
                         </a:rPr>
-                        <a:t>255</a:t>
+                        <a:t>?</a:t>
                       </a:r>
                       <a:endParaRPr lang="en-US" sz="2100" dirty="0">
                         <a:latin typeface="Calibri" charset="0"/>
@@ -12034,7 +11435,7 @@
                           <a:ea typeface="Calibri" pitchFamily="34" charset="-122"/>
                           <a:cs typeface="Calibri" pitchFamily="34" charset="-120"/>
                         </a:rPr>
-                        <a:t>256</a:t>
+                        <a:t>?</a:t>
                       </a:r>
                       <a:endParaRPr lang="en-US" sz="2100" dirty="0">
                         <a:latin typeface="Calibri" charset="0"/>
@@ -12102,7 +11503,7 @@
                           <a:ea typeface="Calibri" pitchFamily="34" charset="-122"/>
                           <a:cs typeface="Calibri" pitchFamily="34" charset="-120"/>
                         </a:rPr>
-                        <a:t>256</a:t>
+                        <a:t>?</a:t>
                       </a:r>
                       <a:endParaRPr lang="en-US" sz="2100" dirty="0">
                         <a:latin typeface="Calibri" charset="0"/>
@@ -12170,7 +11571,7 @@
                           <a:ea typeface="Calibri" pitchFamily="34" charset="-122"/>
                           <a:cs typeface="Calibri" pitchFamily="34" charset="-120"/>
                         </a:rPr>
-                        <a:t>0</a:t>
+                        <a:t>?</a:t>
                       </a:r>
                       <a:endParaRPr lang="en-US" sz="2100" dirty="0">
                         <a:latin typeface="Calibri" charset="0"/>
@@ -12308,7 +11709,7 @@
                           <a:ea typeface="Calibri" pitchFamily="34" charset="-122"/>
                           <a:cs typeface="Calibri" pitchFamily="34" charset="-120"/>
                         </a:rPr>
-                        <a:t>256</a:t>
+                        <a:t>?</a:t>
                       </a:r>
                       <a:endParaRPr lang="en-US" sz="2100" dirty="0">
                         <a:latin typeface="Calibri" charset="0"/>
@@ -12376,7 +11777,7 @@
                           <a:ea typeface="Calibri" pitchFamily="34" charset="-122"/>
                           <a:cs typeface="Calibri" pitchFamily="34" charset="-120"/>
                         </a:rPr>
-                        <a:t>257</a:t>
+                        <a:t>?</a:t>
                       </a:r>
                       <a:endParaRPr lang="en-US" sz="2100" dirty="0">
                         <a:latin typeface="Calibri" charset="0"/>
@@ -12444,7 +11845,7 @@
                           <a:ea typeface="Calibri" pitchFamily="34" charset="-122"/>
                           <a:cs typeface="Calibri" pitchFamily="34" charset="-120"/>
                         </a:rPr>
-                        <a:t>257</a:t>
+                        <a:t>?</a:t>
                       </a:r>
                       <a:endParaRPr lang="en-US" sz="2100" dirty="0">
                         <a:latin typeface="Calibri" charset="0"/>
@@ -12512,7 +11913,7 @@
                           <a:ea typeface="Calibri" pitchFamily="34" charset="-122"/>
                           <a:cs typeface="Calibri" pitchFamily="34" charset="-120"/>
                         </a:rPr>
-                        <a:t>1</a:t>
+                        <a:t>?</a:t>
                       </a:r>
                       <a:endParaRPr lang="en-US" sz="2100" dirty="0">
                         <a:latin typeface="Calibri" charset="0"/>
@@ -12601,7 +12002,7 @@
                 <a:ea typeface="Calibri" pitchFamily="34" charset="-122"/>
                 <a:cs typeface="Calibri" pitchFamily="34" charset="-120"/>
               </a:rPr>
-              <a:t>Al frame 256 il contatore continua a crescere, ma i suoi otto bit bassi tornano a zero: la barra ricomincia.</a:t>
+              <a:t>Completate le righe segnate con ?, poi verificatele in PRG32-QT. Che cosa succede alla barra al frame 256, e perché?</a:t>
             </a:r>
             <a:endParaRPr lang="en-US" sz="1500" dirty="0"/>
           </a:p>
@@ -12776,7 +12177,7 @@
             <a:pPr algn="r"/>
             <a:fld id="{F7021451-1387-4CA6-816F-3879F97B5CBC}" type="slidenum">
               <a:rPr b="0" lang="en-US"/>
-              <a:t>15</a:t>
+              <a:t>14</a:t>
             </a:fld>
             <a:endParaRPr lang="en-US"/>
           </a:p>
@@ -12790,9 +12191,9 @@
 </p:sld>
 </file>
 
-<file path=ppt/slides/slide16.xml><?xml version="1.0" encoding="utf-8"?>
+<file path=ppt/slides/slide15.xml><?xml version="1.0" encoding="utf-8"?>
 <p:sld xmlns:a="http://schemas.openxmlformats.org/drawingml/2006/main" xmlns:r="http://schemas.openxmlformats.org/officeDocument/2006/relationships" xmlns:p="http://schemas.openxmlformats.org/presentationml/2006/main">
-  <p:cSld name="Slide 16">
+  <p:cSld name="Slide 15">
     <p:spTree>
       <p:nvGrpSpPr>
         <p:cNvPr id="1" name=""/>
@@ -12842,7 +12243,7 @@
                 <a:ea typeface="Cambria" pitchFamily="34" charset="-122"/>
                 <a:cs typeface="Cambria" pitchFamily="34" charset="-120"/>
               </a:rPr>
-              <a:t>Domande che il vostro programma ha già sollevato</a:t>
+              <a:t>Non ancora: ciò che spiegheranno le prossime lezioni</a:t>
             </a:r>
             <a:endParaRPr lang="en-US" sz="3200" dirty="0"/>
           </a:p>
@@ -12850,7 +12251,7 @@
       </p:sp>
       <p:graphicFrame>
         <p:nvGraphicFramePr>
-          <p:cNvPr id="17" name="Table 0"/>
+          <p:cNvPr id="16" name="Table 0"/>
           <p:cNvGraphicFramePr>
             <a:graphicFrameLocks noGrp="1"/>
           </p:cNvGraphicFramePr>
@@ -13091,20 +12492,20 @@
                         <a:buNone/>
                       </a:pPr>
                       <a:r>
-                        <a:rPr lang="en-US" sz="1400" dirty="0">
+                        <a:rPr lang="en-US" sz="1400" b="1" dirty="0">
                           <a:solidFill>
                             <a:srgbClr val="1B2530"/>
                           </a:solidFill>
-                          <a:latin typeface="Courier New" pitchFamily="34" charset="0"/>
-                          <a:ea typeface="Courier New" pitchFamily="34" charset="-122"/>
-                          <a:cs typeface="Courier New" pitchFamily="34" charset="-120"/>
+                          <a:latin typeface="Calibri" pitchFamily="34" charset="0"/>
+                          <a:ea typeface="Calibri" pitchFamily="34" charset="-122"/>
+                          <a:cs typeface="Calibri" pitchFamily="34" charset="-120"/>
                         </a:rPr>
                         <a:t>0x07e0, 0xffff, 255</a:t>
                       </a:r>
                       <a:endParaRPr lang="en-US" sz="1400" dirty="0">
-                        <a:latin typeface="Courier New" charset="0"/>
-                        <a:ea typeface="Courier New" charset="0"/>
-                        <a:cs typeface="Courier New" charset="0"/>
+                        <a:latin typeface="Calibri" charset="0"/>
+                        <a:ea typeface="Calibri" charset="0"/>
+                        <a:cs typeface="Calibri" charset="0"/>
                       </a:endParaRPr>
                     </a:p>
                   </a:txBody>
@@ -13297,20 +12698,20 @@
                         <a:buNone/>
                       </a:pPr>
                       <a:r>
-                        <a:rPr lang="en-US" sz="1400" dirty="0">
+                        <a:rPr lang="en-US" sz="1400" b="1" dirty="0">
                           <a:solidFill>
                             <a:srgbClr val="1B2530"/>
                           </a:solidFill>
-                          <a:latin typeface="Courier New" pitchFamily="34" charset="0"/>
-                          <a:ea typeface="Courier New" pitchFamily="34" charset="-122"/>
-                          <a:cs typeface="Courier New" pitchFamily="34" charset="-120"/>
+                          <a:latin typeface="Calibri" pitchFamily="34" charset="0"/>
+                          <a:ea typeface="Calibri" pitchFamily="34" charset="-122"/>
+                          <a:cs typeface="Calibri" pitchFamily="34" charset="-120"/>
                         </a:rPr>
                         <a:t>una posizione sotto zero mostrata come 0xFFFFFFFF</a:t>
                       </a:r>
                       <a:endParaRPr lang="en-US" sz="1400" dirty="0">
-                        <a:latin typeface="Courier New" charset="0"/>
-                        <a:ea typeface="Courier New" charset="0"/>
-                        <a:cs typeface="Courier New" charset="0"/>
+                        <a:latin typeface="Calibri" charset="0"/>
+                        <a:ea typeface="Calibri" charset="0"/>
+                        <a:cs typeface="Calibri" charset="0"/>
                       </a:endParaRPr>
                     </a:p>
                   </a:txBody>
@@ -13503,20 +12904,20 @@
                         <a:buNone/>
                       </a:pPr>
                       <a:r>
-                        <a:rPr lang="en-US" sz="1400" dirty="0">
+                        <a:rPr lang="en-US" sz="1400" b="1" dirty="0">
                           <a:solidFill>
                             <a:srgbClr val="1B2530"/>
                           </a:solidFill>
-                          <a:latin typeface="Courier New" pitchFamily="34" charset="0"/>
-                          <a:ea typeface="Courier New" pitchFamily="34" charset="-122"/>
-                          <a:cs typeface="Courier New" pitchFamily="34" charset="-120"/>
+                          <a:latin typeface="Calibri" pitchFamily="34" charset="0"/>
+                          <a:ea typeface="Calibri" pitchFamily="34" charset="-122"/>
+                          <a:cs typeface="Calibri" pitchFamily="34" charset="-120"/>
                         </a:rPr>
                         <a:t>una palla che si muove meno di un pixel per frame</a:t>
                       </a:r>
                       <a:endParaRPr lang="en-US" sz="1400" dirty="0">
-                        <a:latin typeface="Courier New" charset="0"/>
-                        <a:ea typeface="Courier New" charset="0"/>
-                        <a:cs typeface="Courier New" charset="0"/>
+                        <a:latin typeface="Calibri" charset="0"/>
+                        <a:ea typeface="Calibri" charset="0"/>
+                        <a:cs typeface="Calibri" charset="0"/>
                       </a:endParaRPr>
                     </a:p>
                   </a:txBody>
@@ -13709,20 +13110,20 @@
                         <a:buNone/>
                       </a:pPr>
                       <a:r>
-                        <a:rPr lang="en-US" sz="1400" dirty="0">
+                        <a:rPr lang="en-US" sz="1400" b="1" dirty="0">
                           <a:solidFill>
                             <a:srgbClr val="1B2530"/>
                           </a:solidFill>
-                          <a:latin typeface="Courier New" pitchFamily="34" charset="0"/>
-                          <a:ea typeface="Courier New" pitchFamily="34" charset="-122"/>
-                          <a:cs typeface="Courier New" pitchFamily="34" charset="-120"/>
+                          <a:latin typeface="Calibri" pitchFamily="34" charset="0"/>
+                          <a:ea typeface="Calibri" pitchFamily="34" charset="-122"/>
+                          <a:cs typeface="Calibri" pitchFamily="34" charset="-120"/>
                         </a:rPr>
                         <a:t>andi a2, t1, 255</a:t>
                       </a:r>
                       <a:endParaRPr lang="en-US" sz="1400" dirty="0">
-                        <a:latin typeface="Courier New" charset="0"/>
-                        <a:ea typeface="Courier New" charset="0"/>
-                        <a:cs typeface="Courier New" charset="0"/>
+                        <a:latin typeface="Calibri" charset="0"/>
+                        <a:ea typeface="Calibri" charset="0"/>
+                        <a:cs typeface="Calibri" charset="0"/>
                       </a:endParaRPr>
                     </a:p>
                   </a:txBody>
@@ -13915,20 +13316,20 @@
                         <a:buNone/>
                       </a:pPr>
                       <a:r>
-                        <a:rPr lang="en-US" sz="1400" dirty="0">
+                        <a:rPr lang="en-US" sz="1400" b="1" dirty="0">
                           <a:solidFill>
                             <a:srgbClr val="1B2530"/>
                           </a:solidFill>
-                          <a:latin typeface="Courier New" pitchFamily="34" charset="0"/>
-                          <a:ea typeface="Courier New" pitchFamily="34" charset="-122"/>
-                          <a:cs typeface="Courier New" pitchFamily="34" charset="-120"/>
+                          <a:latin typeface="Calibri" pitchFamily="34" charset="0"/>
+                          <a:ea typeface="Calibri" pitchFamily="34" charset="-122"/>
+                          <a:cs typeface="Calibri" pitchFamily="34" charset="-120"/>
                         </a:rPr>
                         <a:t>addi t1, t1, 1</a:t>
                       </a:r>
                       <a:endParaRPr lang="en-US" sz="1400" dirty="0">
-                        <a:latin typeface="Courier New" charset="0"/>
-                        <a:ea typeface="Courier New" charset="0"/>
-                        <a:cs typeface="Courier New" charset="0"/>
+                        <a:latin typeface="Calibri" charset="0"/>
+                        <a:ea typeface="Calibri" charset="0"/>
+                        <a:cs typeface="Calibri" charset="0"/>
                       </a:endParaRPr>
                     </a:p>
                   </a:txBody>
@@ -14121,20 +13522,20 @@
                         <a:buNone/>
                       </a:pPr>
                       <a:r>
-                        <a:rPr lang="en-US" sz="1400" dirty="0">
+                        <a:rPr lang="en-US" sz="1400" b="1" dirty="0">
                           <a:solidFill>
                             <a:srgbClr val="1B2530"/>
                           </a:solidFill>
-                          <a:latin typeface="Courier New" pitchFamily="34" charset="0"/>
-                          <a:ea typeface="Courier New" pitchFamily="34" charset="-122"/>
-                          <a:cs typeface="Courier New" pitchFamily="34" charset="-120"/>
+                          <a:latin typeface="Calibri" pitchFamily="34" charset="0"/>
+                          <a:ea typeface="Calibri" pitchFamily="34" charset="-122"/>
+                          <a:cs typeface="Calibri" pitchFamily="34" charset="-120"/>
                         </a:rPr>
                         <a:t>un pulsante premuto è un 1</a:t>
                       </a:r>
                       <a:endParaRPr lang="en-US" sz="1400" dirty="0">
-                        <a:latin typeface="Courier New" charset="0"/>
-                        <a:ea typeface="Courier New" charset="0"/>
-                        <a:cs typeface="Courier New" charset="0"/>
+                        <a:latin typeface="Calibri" charset="0"/>
+                        <a:ea typeface="Calibri" charset="0"/>
+                        <a:cs typeface="Calibri" charset="0"/>
                       </a:endParaRPr>
                     </a:p>
                   </a:txBody>
@@ -14327,20 +13728,20 @@
                         <a:buNone/>
                       </a:pPr>
                       <a:r>
-                        <a:rPr lang="en-US" sz="1400" dirty="0">
+                        <a:rPr lang="en-US" sz="1400" b="1" dirty="0">
                           <a:solidFill>
                             <a:srgbClr val="1B2530"/>
                           </a:solidFill>
-                          <a:latin typeface="Courier New" pitchFamily="34" charset="0"/>
-                          <a:ea typeface="Courier New" pitchFamily="34" charset="-122"/>
-                          <a:cs typeface="Courier New" pitchFamily="34" charset="-120"/>
+                          <a:latin typeface="Calibri" pitchFamily="34" charset="0"/>
+                          <a:ea typeface="Calibri" pitchFamily="34" charset="-122"/>
+                          <a:cs typeface="Calibri" pitchFamily="34" charset="-120"/>
                         </a:rPr>
                         <a:t>counter sopravvive tra i frame</a:t>
                       </a:r>
                       <a:endParaRPr lang="en-US" sz="1400" dirty="0">
-                        <a:latin typeface="Courier New" charset="0"/>
-                        <a:ea typeface="Courier New" charset="0"/>
-                        <a:cs typeface="Courier New" charset="0"/>
+                        <a:latin typeface="Calibri" charset="0"/>
+                        <a:ea typeface="Calibri" charset="0"/>
+                        <a:cs typeface="Calibri" charset="0"/>
                       </a:endParaRPr>
                     </a:p>
                   </a:txBody>
@@ -14533,20 +13934,20 @@
                         <a:buNone/>
                       </a:pPr>
                       <a:r>
-                        <a:rPr lang="en-US" sz="1400" dirty="0">
+                        <a:rPr lang="en-US" sz="1400" b="1" dirty="0">
                           <a:solidFill>
                             <a:srgbClr val="1B2530"/>
                           </a:solidFill>
-                          <a:latin typeface="Courier New" pitchFamily="34" charset="0"/>
-                          <a:ea typeface="Courier New" pitchFamily="34" charset="-122"/>
-                          <a:cs typeface="Courier New" pitchFamily="34" charset="-120"/>
+                          <a:latin typeface="Calibri" pitchFamily="34" charset="0"/>
+                          <a:ea typeface="Calibri" pitchFamily="34" charset="-122"/>
+                          <a:cs typeface="Calibri" pitchFamily="34" charset="-120"/>
                         </a:rPr>
                         <a:t>0x00130313</a:t>
                       </a:r>
                       <a:endParaRPr lang="en-US" sz="1400" dirty="0">
-                        <a:latin typeface="Courier New" charset="0"/>
-                        <a:ea typeface="Courier New" charset="0"/>
-                        <a:cs typeface="Courier New" charset="0"/>
+                        <a:latin typeface="Calibri" charset="0"/>
+                        <a:ea typeface="Calibri" charset="0"/>
+                        <a:cs typeface="Calibri" charset="0"/>
                       </a:endParaRPr>
                     </a:p>
                   </a:txBody>
@@ -14739,20 +14140,20 @@
                         <a:buNone/>
                       </a:pPr>
                       <a:r>
-                        <a:rPr lang="en-US" sz="1400" dirty="0">
+                        <a:rPr lang="en-US" sz="1400" b="1" dirty="0">
                           <a:solidFill>
                             <a:srgbClr val="1B2530"/>
                           </a:solidFill>
-                          <a:latin typeface="Courier New" pitchFamily="34" charset="0"/>
-                          <a:ea typeface="Courier New" pitchFamily="34" charset="-122"/>
-                          <a:cs typeface="Courier New" pitchFamily="34" charset="-120"/>
+                          <a:latin typeface="Calibri" pitchFamily="34" charset="0"/>
+                          <a:ea typeface="Calibri" pitchFamily="34" charset="-122"/>
+                          <a:cs typeface="Calibri" pitchFamily="34" charset="-120"/>
                         </a:rPr>
                         <a:t>tre funzioni e un rettangolo</a:t>
                       </a:r>
                       <a:endParaRPr lang="en-US" sz="1400" dirty="0">
-                        <a:latin typeface="Courier New" charset="0"/>
-                        <a:ea typeface="Courier New" charset="0"/>
-                        <a:cs typeface="Courier New" charset="0"/>
+                        <a:latin typeface="Calibri" charset="0"/>
+                        <a:ea typeface="Calibri" charset="0"/>
+                        <a:cs typeface="Calibri" charset="0"/>
                       </a:endParaRPr>
                     </a:p>
                   </a:txBody>
@@ -15113,6 +14514,851 @@
               <a:t> → Lezioni 04–19</a:t>
             </a:r>
             <a:endParaRPr lang="en-US" sz="1100" dirty="0"/>
+          </a:p>
+        </p:txBody>
+      </p:sp>
+      <p:sp>
+        <p:nvSpPr>
+          <p:cNvPr id="25" name="Slide Number Placeholder 0"/>
+          <p:cNvSpPr>
+            <a:spLocks noGrp="1"/>
+          </p:cNvSpPr>
+          <p:nvPr>
+            <p:ph type="sldNum" sz="quarter" idx="4294967295"/>
+          </p:nvPr>
+        </p:nvSpPr>
+        <p:spPr>
+          <a:xfrm>
+            <a:off x="11002975" y="6419088"/>
+            <a:ext cx="640080" cy="274320"/>
+          </a:xfrm>
+          <a:prstGeom prst="rect">
+            <a:avLst/>
+          </a:prstGeom>
+          <a:extLst>
+            <a:ext uri="{C572A759-6A51-4108-AA02-DFA0A04FC94B}">
+              <ma14:wrappingTextBoxFlag xmlns:ma14="http://schemas.microsoft.com/office/mac/drawingml/2011/main" val="0"/>
+            </a:ext>
+          </a:extLst>
+        </p:spPr>
+        <p:txBody>
+          <a:bodyPr/>
+          <a:lstStyle>
+            <a:lvl1pPr>
+              <a:defRPr sz="1000">
+                <a:solidFill>
+                  <a:srgbClr val="5B6B78"/>
+                </a:solidFill>
+                <a:latin typeface="Calibri"/>
+                <a:ea typeface="Calibri"/>
+                <a:cs typeface="Calibri"/>
+              </a:defRPr>
+            </a:lvl1pPr>
+          </a:lstStyle>
+          <a:p>
+            <a:pPr algn="r"/>
+            <a:fld id="{F7021451-1387-4CA6-816F-3879F97B5CBC}" type="slidenum">
+              <a:rPr b="0" lang="en-US"/>
+              <a:t>15</a:t>
+            </a:fld>
+            <a:endParaRPr lang="en-US"/>
+          </a:p>
+        </p:txBody>
+      </p:sp>
+    </p:spTree>
+  </p:cSld>
+  <p:clrMapOvr>
+    <a:masterClrMapping/>
+  </p:clrMapOvr>
+</p:sld>
+</file>
+
+<file path=ppt/slides/slide16.xml><?xml version="1.0" encoding="utf-8"?>
+<p:sld xmlns:a="http://schemas.openxmlformats.org/drawingml/2006/main" xmlns:r="http://schemas.openxmlformats.org/officeDocument/2006/relationships" xmlns:p="http://schemas.openxmlformats.org/presentationml/2006/main">
+  <p:cSld name="Slide 16">
+    <p:spTree>
+      <p:nvGrpSpPr>
+        <p:cNvPr id="1" name=""/>
+        <p:cNvGrpSpPr/>
+        <p:nvPr/>
+      </p:nvGrpSpPr>
+      <p:grpSpPr>
+        <a:xfrm>
+          <a:off x="0" y="0"/>
+          <a:ext cx="0" cy="0"/>
+          <a:chOff x="0" y="0"/>
+          <a:chExt cx="0" cy="0"/>
+        </a:xfrm>
+      </p:grpSpPr>
+      <p:sp>
+        <p:nvSpPr>
+          <p:cNvPr id="2" name="Text 1"/>
+          <p:cNvSpPr/>
+          <p:nvPr>
+            <p:ph idx="101" type="title" hasCustomPrompt="1"/>
+          </p:nvPr>
+        </p:nvSpPr>
+        <p:spPr>
+          <a:xfrm>
+            <a:off x="548640" y="365760"/>
+            <a:ext cx="11094415" cy="868680"/>
+          </a:xfrm>
+          <a:prstGeom prst="rect">
+            <a:avLst/>
+          </a:prstGeom>
+          <a:noFill/>
+          <a:ln/>
+        </p:spPr>
+        <p:txBody>
+          <a:bodyPr wrap="square" lIns="0" tIns="0" rIns="0" bIns="0" rtlCol="0" anchor="ctr"/>
+          <a:lstStyle/>
+          <a:p>
+            <a:pPr algn="l" indent="0" marL="0">
+              <a:buNone/>
+            </a:pPr>
+            <a:r>
+              <a:rPr lang="en-US" sz="3200" b="1" dirty="0">
+                <a:solidFill>
+                  <a:srgbClr val="2E4A62"/>
+                </a:solidFill>
+                <a:latin typeface="Cambria" pitchFamily="34" charset="0"/>
+                <a:ea typeface="Cambria" pitchFamily="34" charset="-122"/>
+                <a:cs typeface="Cambria" pitchFamily="34" charset="-120"/>
+              </a:rPr>
+              <a:t>Il filo di oggi, e dove porta</a:t>
+            </a:r>
+            <a:endParaRPr lang="en-US" sz="3200" dirty="0"/>
+          </a:p>
+        </p:txBody>
+      </p:sp>
+      <p:sp>
+        <p:nvSpPr>
+          <p:cNvPr id="3" name="Shape 1"/>
+          <p:cNvSpPr/>
+          <p:nvPr/>
+        </p:nvSpPr>
+        <p:spPr>
+          <a:xfrm>
+            <a:off x="548640" y="1874520"/>
+            <a:ext cx="1926275" cy="2468880"/>
+          </a:xfrm>
+          <a:prstGeom prst="roundRect">
+            <a:avLst>
+              <a:gd name="adj" fmla="val 3798"/>
+            </a:avLst>
+          </a:prstGeom>
+          <a:solidFill>
+            <a:srgbClr val="EEF2F4"/>
+          </a:solidFill>
+          <a:ln w="12700">
+            <a:solidFill>
+              <a:srgbClr val="EEF2F4"/>
+            </a:solidFill>
+            <a:prstDash val="solid"/>
+          </a:ln>
+        </p:spPr>
+      </p:sp>
+      <p:sp>
+        <p:nvSpPr>
+          <p:cNvPr id="4" name="Text 2"/>
+          <p:cNvSpPr txBox="1"/>
+          <p:nvPr/>
+        </p:nvSpPr>
+        <p:spPr>
+          <a:xfrm>
+            <a:off x="685800" y="2057400"/>
+            <a:ext cx="1651955" cy="685800"/>
+          </a:xfrm>
+          <a:prstGeom prst="roundRect">
+            <a:avLst>
+              <a:gd name="adj" fmla="val 10667"/>
+            </a:avLst>
+          </a:prstGeom>
+          <a:solidFill>
+            <a:srgbClr val="0E7C86"/>
+          </a:solidFill>
+          <a:ln>
+            <a:solidFill>
+              <a:srgbClr val="0E7C86"/>
+            </a:solidFill>
+          </a:ln>
+        </p:spPr>
+        <p:txBody>
+          <a:bodyPr wrap="square" lIns="0" tIns="0" rIns="0" bIns="0" rtlCol="0" anchor="ctr"/>
+          <a:lstStyle/>
+          <a:p>
+            <a:pPr algn="ctr" indent="0" marL="0">
+              <a:buNone/>
+            </a:pPr>
+            <a:r>
+              <a:rPr lang="en-US" sz="1900" b="1" dirty="0">
+                <a:solidFill>
+                  <a:srgbClr val="FFFFFF"/>
+                </a:solidFill>
+                <a:latin typeface="Calibri" pitchFamily="34" charset="0"/>
+                <a:ea typeface="Calibri" pitchFamily="34" charset="-122"/>
+                <a:cs typeface="Calibri" pitchFamily="34" charset="-120"/>
+              </a:rPr>
+              <a:t>cartuccia</a:t>
+            </a:r>
+            <a:endParaRPr lang="en-US" sz="1900" dirty="0"/>
+          </a:p>
+        </p:txBody>
+      </p:sp>
+      <p:sp>
+        <p:nvSpPr>
+          <p:cNvPr id="5" name="Text 3"/>
+          <p:cNvSpPr txBox="1"/>
+          <p:nvPr/>
+        </p:nvSpPr>
+        <p:spPr>
+          <a:xfrm>
+            <a:off x="685800" y="2880360"/>
+            <a:ext cx="1651955" cy="1325880"/>
+          </a:xfrm>
+          <a:prstGeom prst="rect">
+            <a:avLst/>
+          </a:prstGeom>
+          <a:noFill/>
+          <a:ln/>
+        </p:spPr>
+        <p:txBody>
+          <a:bodyPr wrap="square" lIns="0" tIns="0" rIns="0" bIns="0" rtlCol="0" anchor="ctr"/>
+          <a:lstStyle/>
+          <a:p>
+            <a:pPr algn="ctr" indent="0" marL="0">
+              <a:buNone/>
+            </a:pPr>
+            <a:r>
+              <a:rPr lang="en-US" sz="1700" dirty="0">
+                <a:solidFill>
+                  <a:srgbClr val="1B2530"/>
+                </a:solidFill>
+                <a:latin typeface="Calibri" pitchFamily="34" charset="0"/>
+                <a:ea typeface="Calibri" pitchFamily="34" charset="-122"/>
+                <a:cs typeface="Calibri" pitchFamily="34" charset="-120"/>
+              </a:rPr>
+              <a:t>init una volta; update e draw a ogni frame</a:t>
+            </a:r>
+            <a:endParaRPr lang="en-US" sz="1700" dirty="0"/>
+          </a:p>
+        </p:txBody>
+      </p:sp>
+      <p:sp>
+        <p:nvSpPr>
+          <p:cNvPr id="6" name="Shape 4"/>
+          <p:cNvSpPr/>
+          <p:nvPr/>
+        </p:nvSpPr>
+        <p:spPr>
+          <a:xfrm>
+            <a:off x="2520635" y="2962656"/>
+            <a:ext cx="274320" cy="292608"/>
+          </a:xfrm>
+          <a:prstGeom prst="rightArrow">
+            <a:avLst/>
+          </a:prstGeom>
+          <a:solidFill>
+            <a:srgbClr val="5B6B78"/>
+          </a:solidFill>
+          <a:ln w="12700">
+            <a:solidFill>
+              <a:srgbClr val="5B6B78"/>
+            </a:solidFill>
+            <a:prstDash val="solid"/>
+          </a:ln>
+        </p:spPr>
+      </p:sp>
+      <p:sp>
+        <p:nvSpPr>
+          <p:cNvPr id="7" name="Shape 5"/>
+          <p:cNvSpPr/>
+          <p:nvPr/>
+        </p:nvSpPr>
+        <p:spPr>
+          <a:xfrm>
+            <a:off x="2840675" y="1874520"/>
+            <a:ext cx="1926275" cy="2468880"/>
+          </a:xfrm>
+          <a:prstGeom prst="roundRect">
+            <a:avLst>
+              <a:gd name="adj" fmla="val 3798"/>
+            </a:avLst>
+          </a:prstGeom>
+          <a:solidFill>
+            <a:srgbClr val="EEF2F4"/>
+          </a:solidFill>
+          <a:ln w="12700">
+            <a:solidFill>
+              <a:srgbClr val="EEF2F4"/>
+            </a:solidFill>
+            <a:prstDash val="solid"/>
+          </a:ln>
+        </p:spPr>
+      </p:sp>
+      <p:sp>
+        <p:nvSpPr>
+          <p:cNvPr id="8" name="Text 6"/>
+          <p:cNvSpPr txBox="1"/>
+          <p:nvPr/>
+        </p:nvSpPr>
+        <p:spPr>
+          <a:xfrm>
+            <a:off x="2977835" y="2057400"/>
+            <a:ext cx="1651955" cy="685800"/>
+          </a:xfrm>
+          <a:prstGeom prst="roundRect">
+            <a:avLst>
+              <a:gd name="adj" fmla="val 10667"/>
+            </a:avLst>
+          </a:prstGeom>
+          <a:solidFill>
+            <a:srgbClr val="C7791B"/>
+          </a:solidFill>
+          <a:ln>
+            <a:solidFill>
+              <a:srgbClr val="C7791B"/>
+            </a:solidFill>
+          </a:ln>
+        </p:spPr>
+        <p:txBody>
+          <a:bodyPr wrap="square" lIns="0" tIns="0" rIns="0" bIns="0" rtlCol="0" anchor="ctr"/>
+          <a:lstStyle/>
+          <a:p>
+            <a:pPr algn="ctr" indent="0" marL="0">
+              <a:buNone/>
+            </a:pPr>
+            <a:r>
+              <a:rPr lang="en-US" sz="1900" b="1" dirty="0">
+                <a:solidFill>
+                  <a:srgbClr val="FFFFFF"/>
+                </a:solidFill>
+                <a:latin typeface="Calibri" pitchFamily="34" charset="0"/>
+                <a:ea typeface="Calibri" pitchFamily="34" charset="-122"/>
+                <a:cs typeface="Calibri" pitchFamily="34" charset="-120"/>
+              </a:rPr>
+              <a:t>registri</a:t>
+            </a:r>
+            <a:endParaRPr lang="en-US" sz="1900" dirty="0"/>
+          </a:p>
+        </p:txBody>
+      </p:sp>
+      <p:sp>
+        <p:nvSpPr>
+          <p:cNvPr id="9" name="Text 7"/>
+          <p:cNvSpPr txBox="1"/>
+          <p:nvPr/>
+        </p:nvSpPr>
+        <p:spPr>
+          <a:xfrm>
+            <a:off x="2977835" y="2880360"/>
+            <a:ext cx="1651955" cy="1325880"/>
+          </a:xfrm>
+          <a:prstGeom prst="rect">
+            <a:avLst/>
+          </a:prstGeom>
+          <a:noFill/>
+          <a:ln/>
+        </p:spPr>
+        <p:txBody>
+          <a:bodyPr wrap="square" lIns="0" tIns="0" rIns="0" bIns="0" rtlCol="0" anchor="ctr"/>
+          <a:lstStyle/>
+          <a:p>
+            <a:pPr algn="ctr" indent="0" marL="0">
+              <a:buNone/>
+            </a:pPr>
+            <a:r>
+              <a:rPr lang="en-US" sz="1700" dirty="0">
+                <a:solidFill>
+                  <a:srgbClr val="1B2530"/>
+                </a:solidFill>
+                <a:latin typeface="Calibri" pitchFamily="34" charset="0"/>
+                <a:ea typeface="Calibri" pitchFamily="34" charset="-122"/>
+                <a:cs typeface="Calibri" pitchFamily="34" charset="-120"/>
+              </a:rPr>
+              <a:t>i valori mentre si calcola</a:t>
+            </a:r>
+            <a:endParaRPr lang="en-US" sz="1700" dirty="0"/>
+          </a:p>
+        </p:txBody>
+      </p:sp>
+      <p:sp>
+        <p:nvSpPr>
+          <p:cNvPr id="10" name="Shape 8"/>
+          <p:cNvSpPr/>
+          <p:nvPr/>
+        </p:nvSpPr>
+        <p:spPr>
+          <a:xfrm>
+            <a:off x="4812670" y="2962656"/>
+            <a:ext cx="274320" cy="292608"/>
+          </a:xfrm>
+          <a:prstGeom prst="rightArrow">
+            <a:avLst/>
+          </a:prstGeom>
+          <a:solidFill>
+            <a:srgbClr val="5B6B78"/>
+          </a:solidFill>
+          <a:ln w="12700">
+            <a:solidFill>
+              <a:srgbClr val="5B6B78"/>
+            </a:solidFill>
+            <a:prstDash val="solid"/>
+          </a:ln>
+        </p:spPr>
+      </p:sp>
+      <p:sp>
+        <p:nvSpPr>
+          <p:cNvPr id="11" name="Shape 9"/>
+          <p:cNvSpPr/>
+          <p:nvPr/>
+        </p:nvSpPr>
+        <p:spPr>
+          <a:xfrm>
+            <a:off x="5132710" y="1874520"/>
+            <a:ext cx="1926275" cy="2468880"/>
+          </a:xfrm>
+          <a:prstGeom prst="roundRect">
+            <a:avLst>
+              <a:gd name="adj" fmla="val 3798"/>
+            </a:avLst>
+          </a:prstGeom>
+          <a:solidFill>
+            <a:srgbClr val="EEF2F4"/>
+          </a:solidFill>
+          <a:ln w="12700">
+            <a:solidFill>
+              <a:srgbClr val="EEF2F4"/>
+            </a:solidFill>
+            <a:prstDash val="solid"/>
+          </a:ln>
+        </p:spPr>
+      </p:sp>
+      <p:sp>
+        <p:nvSpPr>
+          <p:cNvPr id="12" name="Text 10"/>
+          <p:cNvSpPr txBox="1"/>
+          <p:nvPr/>
+        </p:nvSpPr>
+        <p:spPr>
+          <a:xfrm>
+            <a:off x="5269870" y="2057400"/>
+            <a:ext cx="1651955" cy="685800"/>
+          </a:xfrm>
+          <a:prstGeom prst="roundRect">
+            <a:avLst>
+              <a:gd name="adj" fmla="val 10667"/>
+            </a:avLst>
+          </a:prstGeom>
+          <a:solidFill>
+            <a:srgbClr val="6B4FA0"/>
+          </a:solidFill>
+          <a:ln>
+            <a:solidFill>
+              <a:srgbClr val="6B4FA0"/>
+            </a:solidFill>
+          </a:ln>
+        </p:spPr>
+        <p:txBody>
+          <a:bodyPr wrap="square" lIns="0" tIns="0" rIns="0" bIns="0" rtlCol="0" anchor="ctr"/>
+          <a:lstStyle/>
+          <a:p>
+            <a:pPr algn="ctr" indent="0" marL="0">
+              <a:buNone/>
+            </a:pPr>
+            <a:r>
+              <a:rPr lang="en-US" sz="1900" b="1" dirty="0">
+                <a:solidFill>
+                  <a:srgbClr val="FFFFFF"/>
+                </a:solidFill>
+                <a:latin typeface="Calibri" pitchFamily="34" charset="0"/>
+                <a:ea typeface="Calibri" pitchFamily="34" charset="-122"/>
+                <a:cs typeface="Calibri" pitchFamily="34" charset="-120"/>
+              </a:rPr>
+              <a:t>memoria</a:t>
+            </a:r>
+            <a:endParaRPr lang="en-US" sz="1900" dirty="0"/>
+          </a:p>
+        </p:txBody>
+      </p:sp>
+      <p:sp>
+        <p:nvSpPr>
+          <p:cNvPr id="13" name="Text 11"/>
+          <p:cNvSpPr txBox="1"/>
+          <p:nvPr/>
+        </p:nvSpPr>
+        <p:spPr>
+          <a:xfrm>
+            <a:off x="5269870" y="2880360"/>
+            <a:ext cx="1651955" cy="1325880"/>
+          </a:xfrm>
+          <a:prstGeom prst="rect">
+            <a:avLst/>
+          </a:prstGeom>
+          <a:noFill/>
+          <a:ln/>
+        </p:spPr>
+        <p:txBody>
+          <a:bodyPr wrap="square" lIns="0" tIns="0" rIns="0" bIns="0" rtlCol="0" anchor="ctr"/>
+          <a:lstStyle/>
+          <a:p>
+            <a:pPr algn="ctr" indent="0" marL="0">
+              <a:buNone/>
+            </a:pPr>
+            <a:r>
+              <a:rPr lang="en-US" sz="1700" dirty="0">
+                <a:solidFill>
+                  <a:srgbClr val="1B2530"/>
+                </a:solidFill>
+                <a:latin typeface="Calibri" pitchFamily="34" charset="0"/>
+                <a:ea typeface="Calibri" pitchFamily="34" charset="-122"/>
+                <a:cs typeface="Calibri" pitchFamily="34" charset="-120"/>
+              </a:rPr>
+              <a:t>variabili a indirizzi, conservate tra i frame</a:t>
+            </a:r>
+            <a:endParaRPr lang="en-US" sz="1700" dirty="0"/>
+          </a:p>
+        </p:txBody>
+      </p:sp>
+      <p:sp>
+        <p:nvSpPr>
+          <p:cNvPr id="14" name="Shape 12"/>
+          <p:cNvSpPr/>
+          <p:nvPr/>
+        </p:nvSpPr>
+        <p:spPr>
+          <a:xfrm>
+            <a:off x="7104705" y="2962656"/>
+            <a:ext cx="274320" cy="292608"/>
+          </a:xfrm>
+          <a:prstGeom prst="rightArrow">
+            <a:avLst/>
+          </a:prstGeom>
+          <a:solidFill>
+            <a:srgbClr val="5B6B78"/>
+          </a:solidFill>
+          <a:ln w="12700">
+            <a:solidFill>
+              <a:srgbClr val="5B6B78"/>
+            </a:solidFill>
+            <a:prstDash val="solid"/>
+          </a:ln>
+        </p:spPr>
+      </p:sp>
+      <p:sp>
+        <p:nvSpPr>
+          <p:cNvPr id="15" name="Shape 13"/>
+          <p:cNvSpPr/>
+          <p:nvPr/>
+        </p:nvSpPr>
+        <p:spPr>
+          <a:xfrm>
+            <a:off x="7424745" y="1874520"/>
+            <a:ext cx="1926275" cy="2468880"/>
+          </a:xfrm>
+          <a:prstGeom prst="roundRect">
+            <a:avLst>
+              <a:gd name="adj" fmla="val 3798"/>
+            </a:avLst>
+          </a:prstGeom>
+          <a:solidFill>
+            <a:srgbClr val="EEF2F4"/>
+          </a:solidFill>
+          <a:ln w="12700">
+            <a:solidFill>
+              <a:srgbClr val="EEF2F4"/>
+            </a:solidFill>
+            <a:prstDash val="solid"/>
+          </a:ln>
+        </p:spPr>
+      </p:sp>
+      <p:sp>
+        <p:nvSpPr>
+          <p:cNvPr id="16" name="Text 14"/>
+          <p:cNvSpPr txBox="1"/>
+          <p:nvPr/>
+        </p:nvSpPr>
+        <p:spPr>
+          <a:xfrm>
+            <a:off x="7561905" y="2057400"/>
+            <a:ext cx="1651955" cy="685800"/>
+          </a:xfrm>
+          <a:prstGeom prst="roundRect">
+            <a:avLst>
+              <a:gd name="adj" fmla="val 10667"/>
+            </a:avLst>
+          </a:prstGeom>
+          <a:solidFill>
+            <a:srgbClr val="2F7D4F"/>
+          </a:solidFill>
+          <a:ln>
+            <a:solidFill>
+              <a:srgbClr val="2F7D4F"/>
+            </a:solidFill>
+          </a:ln>
+        </p:spPr>
+        <p:txBody>
+          <a:bodyPr wrap="square" lIns="0" tIns="0" rIns="0" bIns="0" rtlCol="0" anchor="ctr"/>
+          <a:lstStyle/>
+          <a:p>
+            <a:pPr algn="ctr" indent="0" marL="0">
+              <a:buNone/>
+            </a:pPr>
+            <a:r>
+              <a:rPr lang="en-US" sz="1900" b="1" dirty="0">
+                <a:solidFill>
+                  <a:srgbClr val="FFFFFF"/>
+                </a:solidFill>
+                <a:latin typeface="Calibri" pitchFamily="34" charset="0"/>
+                <a:ea typeface="Calibri" pitchFamily="34" charset="-122"/>
+                <a:cs typeface="Calibri" pitchFamily="34" charset="-120"/>
+              </a:rPr>
+              <a:t>la, lw, addi, sw</a:t>
+            </a:r>
+            <a:endParaRPr lang="en-US" sz="1900" dirty="0"/>
+          </a:p>
+        </p:txBody>
+      </p:sp>
+      <p:sp>
+        <p:nvSpPr>
+          <p:cNvPr id="17" name="Text 15"/>
+          <p:cNvSpPr txBox="1"/>
+          <p:nvPr/>
+        </p:nvSpPr>
+        <p:spPr>
+          <a:xfrm>
+            <a:off x="7561905" y="2880360"/>
+            <a:ext cx="1651955" cy="1325880"/>
+          </a:xfrm>
+          <a:prstGeom prst="rect">
+            <a:avLst/>
+          </a:prstGeom>
+          <a:noFill/>
+          <a:ln/>
+        </p:spPr>
+        <p:txBody>
+          <a:bodyPr wrap="square" lIns="0" tIns="0" rIns="0" bIns="0" rtlCol="0" anchor="ctr"/>
+          <a:lstStyle/>
+          <a:p>
+            <a:pPr algn="ctr" indent="0" marL="0">
+              <a:buNone/>
+            </a:pPr>
+            <a:r>
+              <a:rPr lang="en-US" sz="1700" dirty="0">
+                <a:solidFill>
+                  <a:srgbClr val="1B2530"/>
+                </a:solidFill>
+                <a:latin typeface="Calibri" pitchFamily="34" charset="0"/>
+                <a:ea typeface="Calibri" pitchFamily="34" charset="-122"/>
+                <a:cs typeface="Calibri" pitchFamily="34" charset="-120"/>
+              </a:rPr>
+              <a:t>carica, modifica, memorizza</a:t>
+            </a:r>
+            <a:endParaRPr lang="en-US" sz="1700" dirty="0"/>
+          </a:p>
+        </p:txBody>
+      </p:sp>
+      <p:sp>
+        <p:nvSpPr>
+          <p:cNvPr id="18" name="Shape 16"/>
+          <p:cNvSpPr/>
+          <p:nvPr/>
+        </p:nvSpPr>
+        <p:spPr>
+          <a:xfrm>
+            <a:off x="9396740" y="2962656"/>
+            <a:ext cx="274320" cy="292608"/>
+          </a:xfrm>
+          <a:prstGeom prst="rightArrow">
+            <a:avLst/>
+          </a:prstGeom>
+          <a:solidFill>
+            <a:srgbClr val="5B6B78"/>
+          </a:solidFill>
+          <a:ln w="12700">
+            <a:solidFill>
+              <a:srgbClr val="5B6B78"/>
+            </a:solidFill>
+            <a:prstDash val="solid"/>
+          </a:ln>
+        </p:spPr>
+      </p:sp>
+      <p:sp>
+        <p:nvSpPr>
+          <p:cNvPr id="19" name="Shape 17"/>
+          <p:cNvSpPr/>
+          <p:nvPr/>
+        </p:nvSpPr>
+        <p:spPr>
+          <a:xfrm>
+            <a:off x="9716780" y="1874520"/>
+            <a:ext cx="1926275" cy="2468880"/>
+          </a:xfrm>
+          <a:prstGeom prst="roundRect">
+            <a:avLst>
+              <a:gd name="adj" fmla="val 3798"/>
+            </a:avLst>
+          </a:prstGeom>
+          <a:solidFill>
+            <a:srgbClr val="EEF2F4"/>
+          </a:solidFill>
+          <a:ln w="12700">
+            <a:solidFill>
+              <a:srgbClr val="EEF2F4"/>
+            </a:solidFill>
+            <a:prstDash val="solid"/>
+          </a:ln>
+        </p:spPr>
+      </p:sp>
+      <p:sp>
+        <p:nvSpPr>
+          <p:cNvPr id="20" name="Text 18"/>
+          <p:cNvSpPr txBox="1"/>
+          <p:nvPr/>
+        </p:nvSpPr>
+        <p:spPr>
+          <a:xfrm>
+            <a:off x="9853940" y="2057400"/>
+            <a:ext cx="1651955" cy="685800"/>
+          </a:xfrm>
+          <a:prstGeom prst="roundRect">
+            <a:avLst>
+              <a:gd name="adj" fmla="val 10667"/>
+            </a:avLst>
+          </a:prstGeom>
+          <a:solidFill>
+            <a:srgbClr val="B23A48"/>
+          </a:solidFill>
+          <a:ln>
+            <a:solidFill>
+              <a:srgbClr val="B23A48"/>
+            </a:solidFill>
+          </a:ln>
+        </p:spPr>
+        <p:txBody>
+          <a:bodyPr wrap="square" lIns="0" tIns="0" rIns="0" bIns="0" rtlCol="0" anchor="ctr"/>
+          <a:lstStyle/>
+          <a:p>
+            <a:pPr algn="ctr" indent="0" marL="0">
+              <a:buNone/>
+            </a:pPr>
+            <a:r>
+              <a:rPr lang="en-US" sz="1900" b="1" dirty="0">
+                <a:solidFill>
+                  <a:srgbClr val="FFFFFF"/>
+                </a:solidFill>
+                <a:latin typeface="Calibri" pitchFamily="34" charset="0"/>
+                <a:ea typeface="Calibri" pitchFamily="34" charset="-122"/>
+                <a:cs typeface="Calibri" pitchFamily="34" charset="-120"/>
+              </a:rPr>
+              <a:t>traccia</a:t>
+            </a:r>
+            <a:endParaRPr lang="en-US" sz="1900" dirty="0"/>
+          </a:p>
+        </p:txBody>
+      </p:sp>
+      <p:sp>
+        <p:nvSpPr>
+          <p:cNvPr id="21" name="Text 19"/>
+          <p:cNvSpPr txBox="1"/>
+          <p:nvPr/>
+        </p:nvSpPr>
+        <p:spPr>
+          <a:xfrm>
+            <a:off x="9853940" y="2880360"/>
+            <a:ext cx="1651955" cy="1325880"/>
+          </a:xfrm>
+          <a:prstGeom prst="rect">
+            <a:avLst/>
+          </a:prstGeom>
+          <a:noFill/>
+          <a:ln/>
+        </p:spPr>
+        <p:txBody>
+          <a:bodyPr wrap="square" lIns="0" tIns="0" rIns="0" bIns="0" rtlCol="0" anchor="ctr"/>
+          <a:lstStyle/>
+          <a:p>
+            <a:pPr algn="ctr" indent="0" marL="0">
+              <a:buNone/>
+            </a:pPr>
+            <a:r>
+              <a:rPr lang="en-US" sz="1700" dirty="0">
+                <a:solidFill>
+                  <a:srgbClr val="1B2530"/>
+                </a:solidFill>
+                <a:latin typeface="Calibri" pitchFamily="34" charset="0"/>
+                <a:ea typeface="Calibri" pitchFamily="34" charset="-122"/>
+                <a:cs typeface="Calibri" pitchFamily="34" charset="-120"/>
+              </a:rPr>
+              <a:t>prevedere lo schermo prima di eseguire</a:t>
+            </a:r>
+            <a:endParaRPr lang="en-US" sz="1700" dirty="0"/>
+          </a:p>
+        </p:txBody>
+      </p:sp>
+      <p:sp>
+        <p:nvSpPr>
+          <p:cNvPr id="22" name="Shape 20"/>
+          <p:cNvSpPr/>
+          <p:nvPr/>
+        </p:nvSpPr>
+        <p:spPr>
+          <a:xfrm>
+            <a:off x="548640" y="4709160"/>
+            <a:ext cx="11094415" cy="1463040"/>
+          </a:xfrm>
+          <a:prstGeom prst="roundRect">
+            <a:avLst>
+              <a:gd name="adj" fmla="val 5000"/>
+            </a:avLst>
+          </a:prstGeom>
+          <a:solidFill>
+            <a:srgbClr val="D8ECEE"/>
+          </a:solidFill>
+          <a:ln w="12700">
+            <a:solidFill>
+              <a:srgbClr val="D8ECEE"/>
+            </a:solidFill>
+            <a:prstDash val="solid"/>
+          </a:ln>
+        </p:spPr>
+      </p:sp>
+      <p:sp>
+        <p:nvSpPr>
+          <p:cNvPr id="23" name="Text 21"/>
+          <p:cNvSpPr txBox="1"/>
+          <p:nvPr/>
+        </p:nvSpPr>
+        <p:spPr>
+          <a:xfrm>
+            <a:off x="822960" y="4800600"/>
+            <a:ext cx="10545775" cy="1280160"/>
+          </a:xfrm>
+          <a:prstGeom prst="rect">
+            <a:avLst/>
+          </a:prstGeom>
+          <a:noFill/>
+          <a:ln/>
+        </p:spPr>
+        <p:txBody>
+          <a:bodyPr wrap="square" lIns="0" tIns="0" rIns="0" bIns="0" rtlCol="0" anchor="ctr"/>
+          <a:lstStyle/>
+          <a:p>
+            <a:pPr indent="0" marL="0">
+              <a:buNone/>
+            </a:pPr>
+            <a:r>
+              <a:rPr lang="en-US" sz="2000" dirty="0">
+                <a:solidFill>
+                  <a:srgbClr val="1B2530"/>
+                </a:solidFill>
+                <a:latin typeface="Calibri" pitchFamily="34" charset="0"/>
+                <a:ea typeface="Calibri" pitchFamily="34" charset="-122"/>
+                <a:cs typeface="Calibri" pitchFamily="34" charset="-120"/>
+              </a:rPr>
+              <a:t>Prossimo passo: la Lezione 03, da dove vengono queste idee. I numeri: Lezioni da 04 a 06. Lo stack e la convenzione di chiamata: Lezione 18. La codifica di un'istruzione: Lezione 19.</a:t>
+            </a:r>
+            <a:endParaRPr lang="en-US" sz="2000" dirty="0"/>
           </a:p>
         </p:txBody>
       </p:sp>
@@ -19668,7 +19914,7 @@
                 <a:ea typeface="Cambria" pitchFamily="34" charset="-122"/>
                 <a:cs typeface="Cambria" pitchFamily="34" charset="-120"/>
               </a:rPr>
-              <a:t>Che cosa saprete fare alla fine</a:t>
+              <a:t>Il vostro contratto di apprendimento per oggi</a:t>
             </a:r>
             <a:endParaRPr lang="en-US" sz="3200" dirty="0"/>
           </a:p>
@@ -19676,50 +19922,28 @@
       </p:sp>
       <p:sp>
         <p:nvSpPr>
-          <p:cNvPr id="3" name="Text 1"/>
-          <p:cNvSpPr txBox="1"/>
+          <p:cNvPr id="3" name="Shape 1"/>
+          <p:cNvSpPr/>
           <p:nvPr/>
         </p:nvSpPr>
         <p:spPr>
           <a:xfrm>
-            <a:off x="548640" y="1435608"/>
-            <a:ext cx="402336" cy="402336"/>
-          </a:xfrm>
-          <a:prstGeom prst="roundRect">
-            <a:avLst>
-              <a:gd name="adj" fmla="val 18182"/>
-            </a:avLst>
+            <a:off x="548640" y="1531493"/>
+            <a:ext cx="146304" cy="146304"/>
+          </a:xfrm>
+          <a:prstGeom prst="rect">
+            <a:avLst/>
           </a:prstGeom>
           <a:solidFill>
             <a:srgbClr val="0E7C86"/>
           </a:solidFill>
-          <a:ln>
+          <a:ln w="12700">
             <a:solidFill>
               <a:srgbClr val="0E7C86"/>
             </a:solidFill>
+            <a:prstDash val="solid"/>
           </a:ln>
         </p:spPr>
-        <p:txBody>
-          <a:bodyPr wrap="square" lIns="0" tIns="0" rIns="0" bIns="0" rtlCol="0" anchor="ctr"/>
-          <a:lstStyle/>
-          <a:p>
-            <a:pPr algn="ctr" indent="0" marL="0">
-              <a:buNone/>
-            </a:pPr>
-            <a:r>
-              <a:rPr lang="en-US" sz="1500" b="1" dirty="0">
-                <a:solidFill>
-                  <a:srgbClr val="FFFFFF"/>
-                </a:solidFill>
-                <a:latin typeface="Calibri" pitchFamily="34" charset="0"/>
-                <a:ea typeface="Calibri" pitchFamily="34" charset="-122"/>
-                <a:cs typeface="Calibri" pitchFamily="34" charset="-120"/>
-              </a:rPr>
-              <a:t>1</a:t>
-            </a:r>
-            <a:endParaRPr lang="en-US" sz="1500" dirty="0"/>
-          </a:p>
-        </p:txBody>
       </p:sp>
       <p:sp>
         <p:nvSpPr>
@@ -19729,275 +19953,8 @@
         </p:nvSpPr>
         <p:spPr>
           <a:xfrm>
-            <a:off x="1207008" y="1417320"/>
-            <a:ext cx="10436047" cy="438912"/>
-          </a:xfrm>
-          <a:prstGeom prst="rect">
-            <a:avLst/>
-          </a:prstGeom>
-          <a:noFill/>
-          <a:ln/>
-        </p:spPr>
-        <p:txBody>
-          <a:bodyPr wrap="square" lIns="0" tIns="0" rIns="0" bIns="0" rtlCol="0" anchor="ctr"/>
-          <a:lstStyle/>
-          <a:p>
-            <a:pPr indent="0" marL="0">
-              <a:spcAft>
-                <a:spcPts val="200"/>
-              </a:spcAft>
-              <a:buNone/>
-            </a:pPr>
-            <a:r>
-              <a:rPr lang="en-US" sz="2200" dirty="0">
-                <a:solidFill>
-                  <a:srgbClr val="1B2530"/>
-                </a:solidFill>
-                <a:latin typeface="Calibri" pitchFamily="34" charset="0"/>
-                <a:ea typeface="Calibri" pitchFamily="34" charset="-122"/>
-                <a:cs typeface="Calibri" pitchFamily="34" charset="-120"/>
-              </a:rPr>
-              <a:t>Compilare una cartuccia da un file assembly ed eseguirla su PRG32</a:t>
-            </a:r>
-            <a:endParaRPr lang="en-US" sz="2200" dirty="0"/>
-          </a:p>
-        </p:txBody>
-      </p:sp>
-      <p:sp>
-        <p:nvSpPr>
-          <p:cNvPr id="5" name="Text 3"/>
-          <p:cNvSpPr txBox="1"/>
-          <p:nvPr/>
-        </p:nvSpPr>
-        <p:spPr>
-          <a:xfrm>
-            <a:off x="548640" y="2201672"/>
-            <a:ext cx="402336" cy="402336"/>
-          </a:xfrm>
-          <a:prstGeom prst="roundRect">
-            <a:avLst>
-              <a:gd name="adj" fmla="val 18182"/>
-            </a:avLst>
-          </a:prstGeom>
-          <a:solidFill>
-            <a:srgbClr val="0E7C86"/>
-          </a:solidFill>
-          <a:ln>
-            <a:solidFill>
-              <a:srgbClr val="0E7C86"/>
-            </a:solidFill>
-          </a:ln>
-        </p:spPr>
-        <p:txBody>
-          <a:bodyPr wrap="square" lIns="0" tIns="0" rIns="0" bIns="0" rtlCol="0" anchor="ctr"/>
-          <a:lstStyle/>
-          <a:p>
-            <a:pPr algn="ctr" indent="0" marL="0">
-              <a:buNone/>
-            </a:pPr>
-            <a:r>
-              <a:rPr lang="en-US" sz="1500" b="1" dirty="0">
-                <a:solidFill>
-                  <a:srgbClr val="FFFFFF"/>
-                </a:solidFill>
-                <a:latin typeface="Calibri" pitchFamily="34" charset="0"/>
-                <a:ea typeface="Calibri" pitchFamily="34" charset="-122"/>
-                <a:cs typeface="Calibri" pitchFamily="34" charset="-120"/>
-              </a:rPr>
-              <a:t>2</a:t>
-            </a:r>
-            <a:endParaRPr lang="en-US" sz="1500" dirty="0"/>
-          </a:p>
-        </p:txBody>
-      </p:sp>
-      <p:sp>
-        <p:nvSpPr>
-          <p:cNvPr id="6" name="Text 4"/>
-          <p:cNvSpPr txBox="1"/>
-          <p:nvPr/>
-        </p:nvSpPr>
-        <p:spPr>
-          <a:xfrm>
-            <a:off x="1207008" y="2183384"/>
-            <a:ext cx="10436047" cy="438912"/>
-          </a:xfrm>
-          <a:prstGeom prst="rect">
-            <a:avLst/>
-          </a:prstGeom>
-          <a:noFill/>
-          <a:ln/>
-        </p:spPr>
-        <p:txBody>
-          <a:bodyPr wrap="square" lIns="0" tIns="0" rIns="0" bIns="0" rtlCol="0" anchor="ctr"/>
-          <a:lstStyle/>
-          <a:p>
-            <a:pPr indent="0" marL="0">
-              <a:spcAft>
-                <a:spcPts val="200"/>
-              </a:spcAft>
-              <a:buNone/>
-            </a:pPr>
-            <a:r>
-              <a:rPr lang="en-US" sz="2200" dirty="0">
-                <a:solidFill>
-                  <a:srgbClr val="1B2530"/>
-                </a:solidFill>
-                <a:latin typeface="Calibri" pitchFamily="34" charset="0"/>
-                <a:ea typeface="Calibri" pitchFamily="34" charset="-122"/>
-                <a:cs typeface="Calibri" pitchFamily="34" charset="-120"/>
-              </a:rPr>
-              <a:t>Dire che cos'è un registro, e nominare quelli che userete ogni giorno</a:t>
-            </a:r>
-            <a:endParaRPr lang="en-US" sz="2200" dirty="0"/>
-          </a:p>
-        </p:txBody>
-      </p:sp>
-      <p:sp>
-        <p:nvSpPr>
-          <p:cNvPr id="7" name="Text 5"/>
-          <p:cNvSpPr txBox="1"/>
-          <p:nvPr/>
-        </p:nvSpPr>
-        <p:spPr>
-          <a:xfrm>
-            <a:off x="548640" y="2967736"/>
-            <a:ext cx="402336" cy="402336"/>
-          </a:xfrm>
-          <a:prstGeom prst="roundRect">
-            <a:avLst>
-              <a:gd name="adj" fmla="val 18182"/>
-            </a:avLst>
-          </a:prstGeom>
-          <a:solidFill>
-            <a:srgbClr val="0E7C86"/>
-          </a:solidFill>
-          <a:ln>
-            <a:solidFill>
-              <a:srgbClr val="0E7C86"/>
-            </a:solidFill>
-          </a:ln>
-        </p:spPr>
-        <p:txBody>
-          <a:bodyPr wrap="square" lIns="0" tIns="0" rIns="0" bIns="0" rtlCol="0" anchor="ctr"/>
-          <a:lstStyle/>
-          <a:p>
-            <a:pPr algn="ctr" indent="0" marL="0">
-              <a:buNone/>
-            </a:pPr>
-            <a:r>
-              <a:rPr lang="en-US" sz="1500" b="1" dirty="0">
-                <a:solidFill>
-                  <a:srgbClr val="FFFFFF"/>
-                </a:solidFill>
-                <a:latin typeface="Calibri" pitchFamily="34" charset="0"/>
-                <a:ea typeface="Calibri" pitchFamily="34" charset="-122"/>
-                <a:cs typeface="Calibri" pitchFamily="34" charset="-120"/>
-              </a:rPr>
-              <a:t>3</a:t>
-            </a:r>
-            <a:endParaRPr lang="en-US" sz="1500" dirty="0"/>
-          </a:p>
-        </p:txBody>
-      </p:sp>
-      <p:sp>
-        <p:nvSpPr>
-          <p:cNvPr id="8" name="Text 6"/>
-          <p:cNvSpPr txBox="1"/>
-          <p:nvPr/>
-        </p:nvSpPr>
-        <p:spPr>
-          <a:xfrm>
-            <a:off x="1207008" y="2949448"/>
-            <a:ext cx="10436047" cy="438912"/>
-          </a:xfrm>
-          <a:prstGeom prst="rect">
-            <a:avLst/>
-          </a:prstGeom>
-          <a:noFill/>
-          <a:ln/>
-        </p:spPr>
-        <p:txBody>
-          <a:bodyPr wrap="square" lIns="0" tIns="0" rIns="0" bIns="0" rtlCol="0" anchor="ctr"/>
-          <a:lstStyle/>
-          <a:p>
-            <a:pPr indent="0" marL="0">
-              <a:spcAft>
-                <a:spcPts val="200"/>
-              </a:spcAft>
-              <a:buNone/>
-            </a:pPr>
-            <a:r>
-              <a:rPr lang="en-US" sz="2200" dirty="0">
-                <a:solidFill>
-                  <a:srgbClr val="1B2530"/>
-                </a:solidFill>
-                <a:latin typeface="Calibri" pitchFamily="34" charset="0"/>
-                <a:ea typeface="Calibri" pitchFamily="34" charset="-122"/>
-                <a:cs typeface="Calibri" pitchFamily="34" charset="-120"/>
-              </a:rPr>
-              <a:t>Chiamare una funzione del framework, passando gli argomenti nei registri</a:t>
-            </a:r>
-            <a:endParaRPr lang="en-US" sz="2200" dirty="0"/>
-          </a:p>
-        </p:txBody>
-      </p:sp>
-      <p:sp>
-        <p:nvSpPr>
-          <p:cNvPr id="9" name="Text 7"/>
-          <p:cNvSpPr txBox="1"/>
-          <p:nvPr/>
-        </p:nvSpPr>
-        <p:spPr>
-          <a:xfrm>
-            <a:off x="548640" y="3733800"/>
-            <a:ext cx="402336" cy="402336"/>
-          </a:xfrm>
-          <a:prstGeom prst="roundRect">
-            <a:avLst>
-              <a:gd name="adj" fmla="val 18182"/>
-            </a:avLst>
-          </a:prstGeom>
-          <a:solidFill>
-            <a:srgbClr val="0E7C86"/>
-          </a:solidFill>
-          <a:ln>
-            <a:solidFill>
-              <a:srgbClr val="0E7C86"/>
-            </a:solidFill>
-          </a:ln>
-        </p:spPr>
-        <p:txBody>
-          <a:bodyPr wrap="square" lIns="0" tIns="0" rIns="0" bIns="0" rtlCol="0" anchor="ctr"/>
-          <a:lstStyle/>
-          <a:p>
-            <a:pPr algn="ctr" indent="0" marL="0">
-              <a:buNone/>
-            </a:pPr>
-            <a:r>
-              <a:rPr lang="en-US" sz="1500" b="1" dirty="0">
-                <a:solidFill>
-                  <a:srgbClr val="FFFFFF"/>
-                </a:solidFill>
-                <a:latin typeface="Calibri" pitchFamily="34" charset="0"/>
-                <a:ea typeface="Calibri" pitchFamily="34" charset="-122"/>
-                <a:cs typeface="Calibri" pitchFamily="34" charset="-120"/>
-              </a:rPr>
-              <a:t>4</a:t>
-            </a:r>
-            <a:endParaRPr lang="en-US" sz="1500" dirty="0"/>
-          </a:p>
-        </p:txBody>
-      </p:sp>
-      <p:sp>
-        <p:nvSpPr>
-          <p:cNvPr id="10" name="Text 8"/>
-          <p:cNvSpPr txBox="1"/>
-          <p:nvPr/>
-        </p:nvSpPr>
-        <p:spPr>
-          <a:xfrm>
-            <a:off x="1207008" y="3715512"/>
-            <a:ext cx="10436047" cy="681736"/>
+            <a:off x="932688" y="1417320"/>
+            <a:ext cx="6565392" cy="2325370"/>
           </a:xfrm>
           <a:prstGeom prst="rect">
             <a:avLst/>
@@ -20016,7 +19973,7 @@
               <a:buNone/>
             </a:pPr>
             <a:r>
-              <a:rPr lang="en-US" sz="2200" dirty="0">
+              <a:rPr lang="en-US" sz="2300" dirty="0">
                 <a:solidFill>
                   <a:srgbClr val="1B2530"/>
                 </a:solidFill>
@@ -20024,79 +19981,10 @@
                 <a:ea typeface="Calibri" pitchFamily="34" charset="-122"/>
                 <a:cs typeface="Calibri" pitchFamily="34" charset="-120"/>
               </a:rPr>
-              <a:t>Conservare un valore in memoria da un frame al successivo: load, modify, store</a:t>
+              <a:t>Alla fine saprete</a:t>
             </a:r>
-            <a:endParaRPr lang="en-US" sz="2200" dirty="0"/>
+            <a:endParaRPr lang="en-US" sz="2300" dirty="0"/>
           </a:p>
-        </p:txBody>
-      </p:sp>
-      <p:sp>
-        <p:nvSpPr>
-          <p:cNvPr id="11" name="Text 9"/>
-          <p:cNvSpPr txBox="1"/>
-          <p:nvPr/>
-        </p:nvSpPr>
-        <p:spPr>
-          <a:xfrm>
-            <a:off x="548640" y="4742688"/>
-            <a:ext cx="402336" cy="402336"/>
-          </a:xfrm>
-          <a:prstGeom prst="roundRect">
-            <a:avLst>
-              <a:gd name="adj" fmla="val 18182"/>
-            </a:avLst>
-          </a:prstGeom>
-          <a:solidFill>
-            <a:srgbClr val="0E7C86"/>
-          </a:solidFill>
-          <a:ln>
-            <a:solidFill>
-              <a:srgbClr val="0E7C86"/>
-            </a:solidFill>
-          </a:ln>
-        </p:spPr>
-        <p:txBody>
-          <a:bodyPr wrap="square" lIns="0" tIns="0" rIns="0" bIns="0" rtlCol="0" anchor="ctr"/>
-          <a:lstStyle/>
-          <a:p>
-            <a:pPr algn="ctr" indent="0" marL="0">
-              <a:buNone/>
-            </a:pPr>
-            <a:r>
-              <a:rPr lang="en-US" sz="1500" b="1" dirty="0">
-                <a:solidFill>
-                  <a:srgbClr val="FFFFFF"/>
-                </a:solidFill>
-                <a:latin typeface="Calibri" pitchFamily="34" charset="0"/>
-                <a:ea typeface="Calibri" pitchFamily="34" charset="-122"/>
-                <a:cs typeface="Calibri" pitchFamily="34" charset="-120"/>
-              </a:rPr>
-              <a:t>5</a:t>
-            </a:r>
-            <a:endParaRPr lang="en-US" sz="1500" dirty="0"/>
-          </a:p>
-        </p:txBody>
-      </p:sp>
-      <p:sp>
-        <p:nvSpPr>
-          <p:cNvPr id="12" name="Text 10"/>
-          <p:cNvSpPr txBox="1"/>
-          <p:nvPr/>
-        </p:nvSpPr>
-        <p:spPr>
-          <a:xfrm>
-            <a:off x="1207008" y="4724400"/>
-            <a:ext cx="10436047" cy="438912"/>
-          </a:xfrm>
-          <a:prstGeom prst="rect">
-            <a:avLst/>
-          </a:prstGeom>
-          <a:noFill/>
-          <a:ln/>
-        </p:spPr>
-        <p:txBody>
-          <a:bodyPr wrap="square" lIns="0" tIns="0" rIns="0" bIns="0" rtlCol="0" anchor="ctr"/>
-          <a:lstStyle/>
           <a:p>
             <a:pPr indent="0" marL="0">
               <a:spcAft>
@@ -20105,77 +19993,95 @@
               <a:buNone/>
             </a:pPr>
             <a:r>
-              <a:rPr lang="en-US" sz="2200" dirty="0">
+              <a:rPr lang="en-US" sz="2000" dirty="0">
                 <a:solidFill>
-                  <a:srgbClr val="1B2530"/>
+                  <a:srgbClr val="5B6B78"/>
                 </a:solidFill>
                 <a:latin typeface="Calibri" pitchFamily="34" charset="0"/>
                 <a:ea typeface="Calibri" pitchFamily="34" charset="-122"/>
                 <a:cs typeface="Calibri" pitchFamily="34" charset="-120"/>
               </a:rPr>
-              <a:t>Leggere un'istruzione come il numero a 32 bit che è davvero</a:t>
+              <a:t>– compilare ed eseguire una cartuccia, e dire quando il runtime chiama init, update e draw</a:t>
             </a:r>
-            <a:endParaRPr lang="en-US" sz="2200" dirty="0"/>
+            <a:endParaRPr lang="en-US" sz="2300" dirty="0"/>
           </a:p>
-        </p:txBody>
-      </p:sp>
-      <p:sp>
-        <p:nvSpPr>
-          <p:cNvPr id="13" name="Text 11"/>
-          <p:cNvSpPr txBox="1"/>
-          <p:nvPr/>
-        </p:nvSpPr>
-        <p:spPr>
-          <a:xfrm>
-            <a:off x="548640" y="5508752"/>
-            <a:ext cx="402336" cy="402336"/>
-          </a:xfrm>
-          <a:prstGeom prst="roundRect">
-            <a:avLst>
-              <a:gd name="adj" fmla="val 18182"/>
-            </a:avLst>
-          </a:prstGeom>
-          <a:solidFill>
-            <a:srgbClr val="0E7C86"/>
-          </a:solidFill>
-          <a:ln>
-            <a:solidFill>
-              <a:srgbClr val="0E7C86"/>
-            </a:solidFill>
-          </a:ln>
-        </p:spPr>
-        <p:txBody>
-          <a:bodyPr wrap="square" lIns="0" tIns="0" rIns="0" bIns="0" rtlCol="0" anchor="ctr"/>
-          <a:lstStyle/>
           <a:p>
-            <a:pPr algn="ctr" indent="0" marL="0">
+            <a:pPr indent="0" marL="0">
+              <a:spcAft>
+                <a:spcPts val="200"/>
+              </a:spcAft>
               <a:buNone/>
             </a:pPr>
             <a:r>
-              <a:rPr lang="en-US" sz="1500" b="1" dirty="0">
+              <a:rPr lang="en-US" sz="2000" dirty="0">
                 <a:solidFill>
-                  <a:srgbClr val="FFFFFF"/>
+                  <a:srgbClr val="5B6B78"/>
                 </a:solidFill>
                 <a:latin typeface="Calibri" pitchFamily="34" charset="0"/>
                 <a:ea typeface="Calibri" pitchFamily="34" charset="-122"/>
                 <a:cs typeface="Calibri" pitchFamily="34" charset="-120"/>
               </a:rPr>
-              <a:t>6</a:t>
+              <a:t>– leggere una riga di assembly: etichetta, istruzione, operandi, commento</a:t>
             </a:r>
-            <a:endParaRPr lang="en-US" sz="1500" dirty="0"/>
+            <a:endParaRPr lang="en-US" sz="2300" dirty="0"/>
+          </a:p>
+          <a:p>
+            <a:pPr indent="0" marL="0">
+              <a:spcAft>
+                <a:spcPts val="200"/>
+              </a:spcAft>
+              <a:buNone/>
+            </a:pPr>
+            <a:r>
+              <a:rPr lang="en-US" sz="2000" dirty="0">
+                <a:solidFill>
+                  <a:srgbClr val="5B6B78"/>
+                </a:solidFill>
+                <a:latin typeface="Calibri" pitchFamily="34" charset="0"/>
+                <a:ea typeface="Calibri" pitchFamily="34" charset="-122"/>
+                <a:cs typeface="Calibri" pitchFamily="34" charset="-120"/>
+              </a:rPr>
+              <a:t>– distinguere un indirizzo da un valore, e tracciare che cosa lasciano la, lw, addi e sw</a:t>
+            </a:r>
+            <a:endParaRPr lang="en-US" sz="2300" dirty="0"/>
           </a:p>
         </p:txBody>
       </p:sp>
       <p:sp>
         <p:nvSpPr>
-          <p:cNvPr id="14" name="Text 12"/>
+          <p:cNvPr id="5" name="Shape 3"/>
+          <p:cNvSpPr/>
+          <p:nvPr/>
+        </p:nvSpPr>
+        <p:spPr>
+          <a:xfrm>
+            <a:off x="548640" y="4002532"/>
+            <a:ext cx="146304" cy="146304"/>
+          </a:xfrm>
+          <a:prstGeom prst="rect">
+            <a:avLst/>
+          </a:prstGeom>
+          <a:solidFill>
+            <a:srgbClr val="C7791B"/>
+          </a:solidFill>
+          <a:ln w="12700">
+            <a:solidFill>
+              <a:srgbClr val="C7791B"/>
+            </a:solidFill>
+            <a:prstDash val="solid"/>
+          </a:ln>
+        </p:spPr>
+      </p:sp>
+      <p:sp>
+        <p:nvSpPr>
+          <p:cNvPr id="6" name="Text 4"/>
           <p:cNvSpPr txBox="1"/>
           <p:nvPr/>
         </p:nvSpPr>
         <p:spPr>
           <a:xfrm>
-            <a:off x="1207008" y="5490464"/>
-            <a:ext cx="10436047" cy="681736"/>
+            <a:off x="932688" y="3888359"/>
+            <a:ext cx="6565392" cy="1069086"/>
           </a:xfrm>
           <a:prstGeom prst="rect">
             <a:avLst/>
@@ -20194,7 +20100,7 @@
               <a:buNone/>
             </a:pPr>
             <a:r>
-              <a:rPr lang="en-US" sz="2200" dirty="0">
+              <a:rPr lang="en-US" sz="2300" dirty="0">
                 <a:solidFill>
                   <a:srgbClr val="1B2530"/>
                 </a:solidFill>
@@ -20202,9 +20108,215 @@
                 <a:ea typeface="Calibri" pitchFamily="34" charset="-122"/>
                 <a:cs typeface="Calibri" pitchFamily="34" charset="-120"/>
               </a:rPr>
-              <a:t>Elencare le domande che questo programma solleva: il resto del corso risponde</a:t>
+              <a:t>Vi serve solo la Lezione 01: che cos'è un programma, il terminale, PRG32-QT funzionante</a:t>
             </a:r>
-            <a:endParaRPr lang="en-US" sz="2200" dirty="0"/>
+            <a:endParaRPr lang="en-US" sz="2300" dirty="0"/>
+          </a:p>
+        </p:txBody>
+      </p:sp>
+      <p:sp>
+        <p:nvSpPr>
+          <p:cNvPr id="7" name="Shape 5"/>
+          <p:cNvSpPr/>
+          <p:nvPr/>
+        </p:nvSpPr>
+        <p:spPr>
+          <a:xfrm>
+            <a:off x="548640" y="5217287"/>
+            <a:ext cx="146304" cy="146304"/>
+          </a:xfrm>
+          <a:prstGeom prst="rect">
+            <a:avLst/>
+          </a:prstGeom>
+          <a:solidFill>
+            <a:srgbClr val="0E7C86"/>
+          </a:solidFill>
+          <a:ln w="12700">
+            <a:solidFill>
+              <a:srgbClr val="0E7C86"/>
+            </a:solidFill>
+            <a:prstDash val="solid"/>
+          </a:ln>
+        </p:spPr>
+      </p:sp>
+      <p:sp>
+        <p:nvSpPr>
+          <p:cNvPr id="8" name="Text 6"/>
+          <p:cNvSpPr txBox="1"/>
+          <p:nvPr/>
+        </p:nvSpPr>
+        <p:spPr>
+          <a:xfrm>
+            <a:off x="932688" y="5103114"/>
+            <a:ext cx="6565392" cy="1069086"/>
+          </a:xfrm>
+          <a:prstGeom prst="rect">
+            <a:avLst/>
+          </a:prstGeom>
+          <a:noFill/>
+          <a:ln/>
+        </p:spPr>
+        <p:txBody>
+          <a:bodyPr wrap="square" lIns="0" tIns="0" rIns="0" bIns="0" rtlCol="0" anchor="t"/>
+          <a:lstStyle/>
+          <a:p>
+            <a:pPr indent="0" marL="0">
+              <a:spcAft>
+                <a:spcPts val="200"/>
+              </a:spcAft>
+              <a:buNone/>
+            </a:pPr>
+            <a:r>
+              <a:rPr lang="en-US" sz="2300" dirty="0">
+                <a:solidFill>
+                  <a:srgbClr val="1B2530"/>
+                </a:solidFill>
+                <a:latin typeface="Calibri" pitchFamily="34" charset="0"/>
+                <a:ea typeface="Calibri" pitchFamily="34" charset="-122"/>
+                <a:cs typeface="Calibri" pitchFamily="34" charset="-120"/>
+              </a:rPr>
+              <a:t>Userete anche cose che non dovete ancora capire: le ultime slide dicono quali, e quando vengono spiegate</a:t>
+            </a:r>
+            <a:endParaRPr lang="en-US" sz="2300" dirty="0"/>
+          </a:p>
+        </p:txBody>
+      </p:sp>
+      <p:sp>
+        <p:nvSpPr>
+          <p:cNvPr id="9" name="Shape 7"/>
+          <p:cNvSpPr/>
+          <p:nvPr/>
+        </p:nvSpPr>
+        <p:spPr>
+          <a:xfrm>
+            <a:off x="7863840" y="1417320"/>
+            <a:ext cx="3779215" cy="4754880"/>
+          </a:xfrm>
+          <a:prstGeom prst="roundRect">
+            <a:avLst>
+              <a:gd name="adj" fmla="val 1936"/>
+            </a:avLst>
+          </a:prstGeom>
+          <a:solidFill>
+            <a:srgbClr val="D8ECEE"/>
+          </a:solidFill>
+          <a:ln w="12700">
+            <a:solidFill>
+              <a:srgbClr val="D8ECEE"/>
+            </a:solidFill>
+            <a:prstDash val="solid"/>
+          </a:ln>
+        </p:spPr>
+      </p:sp>
+      <p:sp>
+        <p:nvSpPr>
+          <p:cNvPr id="10" name="Text 8"/>
+          <p:cNvSpPr txBox="1"/>
+          <p:nvPr/>
+        </p:nvSpPr>
+        <p:spPr>
+          <a:xfrm>
+            <a:off x="8138160" y="1645920"/>
+            <a:ext cx="3230575" cy="548640"/>
+          </a:xfrm>
+          <a:prstGeom prst="rect">
+            <a:avLst/>
+          </a:prstGeom>
+          <a:noFill/>
+          <a:ln/>
+        </p:spPr>
+        <p:txBody>
+          <a:bodyPr wrap="square" lIns="0" tIns="0" rIns="0" bIns="0" rtlCol="0" anchor="ctr"/>
+          <a:lstStyle/>
+          <a:p>
+            <a:pPr indent="0" marL="0">
+              <a:buNone/>
+            </a:pPr>
+            <a:r>
+              <a:rPr lang="en-US" sz="1800" b="1" dirty="0">
+                <a:solidFill>
+                  <a:srgbClr val="2E4A62"/>
+                </a:solidFill>
+                <a:latin typeface="Calibri" pitchFamily="34" charset="0"/>
+                <a:ea typeface="Calibri" pitchFamily="34" charset="-122"/>
+                <a:cs typeface="Calibri" pitchFamily="34" charset="-120"/>
+              </a:rPr>
+              <a:t>Come lo saprete</a:t>
+            </a:r>
+            <a:endParaRPr lang="en-US" sz="1800" dirty="0"/>
+          </a:p>
+        </p:txBody>
+      </p:sp>
+      <p:sp>
+        <p:nvSpPr>
+          <p:cNvPr id="11" name="Text 9"/>
+          <p:cNvSpPr txBox="1"/>
+          <p:nvPr/>
+        </p:nvSpPr>
+        <p:spPr>
+          <a:xfrm>
+            <a:off x="8138160" y="2286000"/>
+            <a:ext cx="3230575" cy="3657600"/>
+          </a:xfrm>
+          <a:prstGeom prst="rect">
+            <a:avLst/>
+          </a:prstGeom>
+          <a:noFill/>
+          <a:ln/>
+        </p:spPr>
+        <p:txBody>
+          <a:bodyPr wrap="square" lIns="0" tIns="0" rIns="0" bIns="0" rtlCol="0" anchor="t"/>
+          <a:lstStyle/>
+          <a:p>
+            <a:pPr indent="0" marL="0">
+              <a:buNone/>
+            </a:pPr>
+            <a:r>
+              <a:rPr lang="en-US" sz="1900" dirty="0">
+                <a:solidFill>
+                  <a:srgbClr val="1B2530"/>
+                </a:solidFill>
+                <a:latin typeface="Calibri" pitchFamily="34" charset="0"/>
+                <a:ea typeface="Calibri" pitchFamily="34" charset="-122"/>
+                <a:cs typeface="Calibri" pitchFamily="34" charset="-120"/>
+              </a:rPr>
+              <a:t>Risultato 1: punto di controllo 1</a:t>
+            </a:r>
+            <a:endParaRPr lang="en-US" sz="1900" dirty="0"/>
+          </a:p>
+          <a:p>
+            <a:pPr indent="0" marL="0">
+              <a:buNone/>
+            </a:pPr>
+            <a:r>
+              <a:rPr lang="en-US" sz="1900" dirty="0">
+                <a:solidFill>
+                  <a:srgbClr val="1B2530"/>
+                </a:solidFill>
+                <a:latin typeface="Calibri" pitchFamily="34" charset="0"/>
+                <a:ea typeface="Calibri" pitchFamily="34" charset="-122"/>
+                <a:cs typeface="Calibri" pitchFamily="34" charset="-120"/>
+              </a:rPr>
+              <a:t>Risultato 2: il biglietto d'uscita</a:t>
+            </a:r>
+            <a:endParaRPr lang="en-US" sz="1900" dirty="0"/>
+          </a:p>
+          <a:p>
+            <a:pPr indent="0" marL="0">
+              <a:buNone/>
+            </a:pPr>
+            <a:r>
+              <a:rPr lang="en-US" sz="1900" dirty="0">
+                <a:solidFill>
+                  <a:srgbClr val="1B2530"/>
+                </a:solidFill>
+                <a:latin typeface="Calibri" pitchFamily="34" charset="0"/>
+                <a:ea typeface="Calibri" pitchFamily="34" charset="-122"/>
+                <a:cs typeface="Calibri" pitchFamily="34" charset="-120"/>
+              </a:rPr>
+              <a:t>Risultato 3: punto di controllo 2, la traccia</a:t>
+            </a:r>
+            <a:endParaRPr lang="en-US" sz="1900" dirty="0"/>
           </a:p>
         </p:txBody>
       </p:sp>
@@ -27340,6 +27452,532 @@
                 <a:ea typeface="Cambria" pitchFamily="34" charset="-122"/>
                 <a:cs typeface="Cambria" pitchFamily="34" charset="-120"/>
               </a:rPr>
+              <a:t>Punto di controllo 1: prevedete prima di eseguire</a:t>
+            </a:r>
+            <a:endParaRPr lang="en-US" sz="3200" dirty="0"/>
+          </a:p>
+        </p:txBody>
+      </p:sp>
+      <p:sp>
+        <p:nvSpPr>
+          <p:cNvPr id="3" name="Shape 1"/>
+          <p:cNvSpPr/>
+          <p:nvPr/>
+        </p:nvSpPr>
+        <p:spPr>
+          <a:xfrm>
+            <a:off x="548640" y="1722120"/>
+            <a:ext cx="146304" cy="146304"/>
+          </a:xfrm>
+          <a:prstGeom prst="rect">
+            <a:avLst/>
+          </a:prstGeom>
+          <a:solidFill>
+            <a:srgbClr val="0E7C86"/>
+          </a:solidFill>
+          <a:ln w="12700">
+            <a:solidFill>
+              <a:srgbClr val="0E7C86"/>
+            </a:solidFill>
+            <a:prstDash val="solid"/>
+          </a:ln>
+        </p:spPr>
+      </p:sp>
+      <p:sp>
+        <p:nvSpPr>
+          <p:cNvPr id="4" name="Text 2"/>
+          <p:cNvSpPr txBox="1"/>
+          <p:nvPr/>
+        </p:nvSpPr>
+        <p:spPr>
+          <a:xfrm>
+            <a:off x="932688" y="1600200"/>
+            <a:ext cx="6565392" cy="743712"/>
+          </a:xfrm>
+          <a:prstGeom prst="rect">
+            <a:avLst/>
+          </a:prstGeom>
+          <a:noFill/>
+          <a:ln/>
+        </p:spPr>
+        <p:txBody>
+          <a:bodyPr wrap="square" lIns="0" tIns="0" rIns="0" bIns="0" rtlCol="0" anchor="t"/>
+          <a:lstStyle/>
+          <a:p>
+            <a:pPr indent="0" marL="0">
+              <a:spcAft>
+                <a:spcPts val="200"/>
+              </a:spcAft>
+              <a:buNone/>
+            </a:pPr>
+            <a:r>
+              <a:rPr lang="en-US" sz="2400" dirty="0">
+                <a:solidFill>
+                  <a:srgbClr val="1B2530"/>
+                </a:solidFill>
+                <a:latin typeface="Calibri" pitchFamily="34" charset="0"/>
+                <a:ea typeface="Calibri" pitchFamily="34" charset="-122"/>
+                <a:cs typeface="Calibri" pitchFamily="34" charset="-120"/>
+              </a:rPr>
+              <a:t>Un gioco gira a 30 frame al secondo per 2 secondi</a:t>
+            </a:r>
+            <a:endParaRPr lang="en-US" sz="2400" dirty="0"/>
+          </a:p>
+        </p:txBody>
+      </p:sp>
+      <p:sp>
+        <p:nvSpPr>
+          <p:cNvPr id="5" name="Shape 3"/>
+          <p:cNvSpPr/>
+          <p:nvPr/>
+        </p:nvSpPr>
+        <p:spPr>
+          <a:xfrm>
+            <a:off x="548640" y="2923032"/>
+            <a:ext cx="146304" cy="146304"/>
+          </a:xfrm>
+          <a:prstGeom prst="rect">
+            <a:avLst/>
+          </a:prstGeom>
+          <a:solidFill>
+            <a:srgbClr val="C7791B"/>
+          </a:solidFill>
+          <a:ln w="12700">
+            <a:solidFill>
+              <a:srgbClr val="C7791B"/>
+            </a:solidFill>
+            <a:prstDash val="solid"/>
+          </a:ln>
+        </p:spPr>
+      </p:sp>
+      <p:sp>
+        <p:nvSpPr>
+          <p:cNvPr id="6" name="Text 4"/>
+          <p:cNvSpPr txBox="1"/>
+          <p:nvPr/>
+        </p:nvSpPr>
+        <p:spPr>
+          <a:xfrm>
+            <a:off x="932688" y="2801112"/>
+            <a:ext cx="6565392" cy="1457706"/>
+          </a:xfrm>
+          <a:prstGeom prst="rect">
+            <a:avLst/>
+          </a:prstGeom>
+          <a:noFill/>
+          <a:ln/>
+        </p:spPr>
+        <p:txBody>
+          <a:bodyPr wrap="square" lIns="0" tIns="0" rIns="0" bIns="0" rtlCol="0" anchor="t"/>
+          <a:lstStyle/>
+          <a:p>
+            <a:pPr indent="0" marL="0">
+              <a:spcAft>
+                <a:spcPts val="200"/>
+              </a:spcAft>
+              <a:buNone/>
+            </a:pPr>
+            <a:r>
+              <a:rPr lang="en-US" sz="2400" dirty="0">
+                <a:solidFill>
+                  <a:srgbClr val="1B2530"/>
+                </a:solidFill>
+                <a:latin typeface="Calibri" pitchFamily="34" charset="0"/>
+                <a:ea typeface="Calibri" pitchFamily="34" charset="-122"/>
+                <a:cs typeface="Calibri" pitchFamily="34" charset="-120"/>
+              </a:rPr>
+              <a:t>Quante volte il runtime ha chiamato</a:t>
+            </a:r>
+            <a:endParaRPr lang="en-US" sz="2400" dirty="0"/>
+          </a:p>
+          <a:p>
+            <a:pPr indent="0" marL="0">
+              <a:spcAft>
+                <a:spcPts val="200"/>
+              </a:spcAft>
+              <a:buNone/>
+            </a:pPr>
+            <a:r>
+              <a:rPr lang="en-US" sz="2100" dirty="0">
+                <a:solidFill>
+                  <a:srgbClr val="5B6B78"/>
+                </a:solidFill>
+                <a:latin typeface="Calibri" pitchFamily="34" charset="0"/>
+                <a:ea typeface="Calibri" pitchFamily="34" charset="-122"/>
+                <a:cs typeface="Calibri" pitchFamily="34" charset="-120"/>
+              </a:rPr>
+              <a:t>– init?</a:t>
+            </a:r>
+            <a:endParaRPr lang="en-US" sz="2400" dirty="0"/>
+          </a:p>
+          <a:p>
+            <a:pPr indent="0" marL="0">
+              <a:spcAft>
+                <a:spcPts val="200"/>
+              </a:spcAft>
+              <a:buNone/>
+            </a:pPr>
+            <a:r>
+              <a:rPr lang="en-US" sz="2100" dirty="0">
+                <a:solidFill>
+                  <a:srgbClr val="5B6B78"/>
+                </a:solidFill>
+                <a:latin typeface="Calibri" pitchFamily="34" charset="0"/>
+                <a:ea typeface="Calibri" pitchFamily="34" charset="-122"/>
+                <a:cs typeface="Calibri" pitchFamily="34" charset="-120"/>
+              </a:rPr>
+              <a:t>– update?</a:t>
+            </a:r>
+            <a:endParaRPr lang="en-US" sz="2400" dirty="0"/>
+          </a:p>
+          <a:p>
+            <a:pPr indent="0" marL="0">
+              <a:spcAft>
+                <a:spcPts val="200"/>
+              </a:spcAft>
+              <a:buNone/>
+            </a:pPr>
+            <a:r>
+              <a:rPr lang="en-US" sz="2100" dirty="0">
+                <a:solidFill>
+                  <a:srgbClr val="5B6B78"/>
+                </a:solidFill>
+                <a:latin typeface="Calibri" pitchFamily="34" charset="0"/>
+                <a:ea typeface="Calibri" pitchFamily="34" charset="-122"/>
+                <a:cs typeface="Calibri" pitchFamily="34" charset="-120"/>
+              </a:rPr>
+              <a:t>– draw?</a:t>
+            </a:r>
+            <a:endParaRPr lang="en-US" sz="2400" dirty="0"/>
+          </a:p>
+        </p:txBody>
+      </p:sp>
+      <p:sp>
+        <p:nvSpPr>
+          <p:cNvPr id="7" name="Shape 5"/>
+          <p:cNvSpPr/>
+          <p:nvPr/>
+        </p:nvSpPr>
+        <p:spPr>
+          <a:xfrm>
+            <a:off x="548640" y="4837938"/>
+            <a:ext cx="146304" cy="146304"/>
+          </a:xfrm>
+          <a:prstGeom prst="rect">
+            <a:avLst/>
+          </a:prstGeom>
+          <a:solidFill>
+            <a:srgbClr val="0E7C86"/>
+          </a:solidFill>
+          <a:ln w="12700">
+            <a:solidFill>
+              <a:srgbClr val="0E7C86"/>
+            </a:solidFill>
+            <a:prstDash val="solid"/>
+          </a:ln>
+        </p:spPr>
+      </p:sp>
+      <p:sp>
+        <p:nvSpPr>
+          <p:cNvPr id="8" name="Text 6"/>
+          <p:cNvSpPr txBox="1"/>
+          <p:nvPr/>
+        </p:nvSpPr>
+        <p:spPr>
+          <a:xfrm>
+            <a:off x="932688" y="4716018"/>
+            <a:ext cx="6565392" cy="1115568"/>
+          </a:xfrm>
+          <a:prstGeom prst="rect">
+            <a:avLst/>
+          </a:prstGeom>
+          <a:noFill/>
+          <a:ln/>
+        </p:spPr>
+        <p:txBody>
+          <a:bodyPr wrap="square" lIns="0" tIns="0" rIns="0" bIns="0" rtlCol="0" anchor="t"/>
+          <a:lstStyle/>
+          <a:p>
+            <a:pPr indent="0" marL="0">
+              <a:spcAft>
+                <a:spcPts val="200"/>
+              </a:spcAft>
+              <a:buNone/>
+            </a:pPr>
+            <a:r>
+              <a:rPr lang="en-US" sz="2400" dirty="0">
+                <a:solidFill>
+                  <a:srgbClr val="1B2530"/>
+                </a:solidFill>
+                <a:latin typeface="Calibri" pitchFamily="34" charset="0"/>
+                <a:ea typeface="Calibri" pitchFamily="34" charset="-122"/>
+                <a:cs typeface="Calibri" pitchFamily="34" charset="-120"/>
+              </a:rPr>
+              <a:t>Quale tipo di istruzione, calcolo, trasferimento o salto, può leggere un valore dalla memoria?</a:t>
+            </a:r>
+            <a:endParaRPr lang="en-US" sz="2400" dirty="0"/>
+          </a:p>
+        </p:txBody>
+      </p:sp>
+      <p:sp>
+        <p:nvSpPr>
+          <p:cNvPr id="9" name="Shape 7"/>
+          <p:cNvSpPr/>
+          <p:nvPr/>
+        </p:nvSpPr>
+        <p:spPr>
+          <a:xfrm>
+            <a:off x="7863840" y="1417320"/>
+            <a:ext cx="3779215" cy="4754880"/>
+          </a:xfrm>
+          <a:prstGeom prst="roundRect">
+            <a:avLst>
+              <a:gd name="adj" fmla="val 1936"/>
+            </a:avLst>
+          </a:prstGeom>
+          <a:solidFill>
+            <a:srgbClr val="D8ECEE"/>
+          </a:solidFill>
+          <a:ln w="12700">
+            <a:solidFill>
+              <a:srgbClr val="D8ECEE"/>
+            </a:solidFill>
+            <a:prstDash val="solid"/>
+          </a:ln>
+        </p:spPr>
+      </p:sp>
+      <p:sp>
+        <p:nvSpPr>
+          <p:cNvPr id="10" name="Text 8"/>
+          <p:cNvSpPr txBox="1"/>
+          <p:nvPr/>
+        </p:nvSpPr>
+        <p:spPr>
+          <a:xfrm>
+            <a:off x="8138160" y="1645920"/>
+            <a:ext cx="3230575" cy="548640"/>
+          </a:xfrm>
+          <a:prstGeom prst="rect">
+            <a:avLst/>
+          </a:prstGeom>
+          <a:noFill/>
+          <a:ln/>
+        </p:spPr>
+        <p:txBody>
+          <a:bodyPr wrap="square" lIns="0" tIns="0" rIns="0" bIns="0" rtlCol="0" anchor="ctr"/>
+          <a:lstStyle/>
+          <a:p>
+            <a:pPr indent="0" marL="0">
+              <a:buNone/>
+            </a:pPr>
+            <a:r>
+              <a:rPr lang="en-US" sz="1800" b="1" dirty="0">
+                <a:solidFill>
+                  <a:srgbClr val="2E4A62"/>
+                </a:solidFill>
+                <a:latin typeface="Calibri" pitchFamily="34" charset="0"/>
+                <a:ea typeface="Calibri" pitchFamily="34" charset="-122"/>
+                <a:cs typeface="Calibri" pitchFamily="34" charset="-120"/>
+              </a:rPr>
+              <a:t>Come</a:t>
+            </a:r>
+            <a:endParaRPr lang="en-US" sz="1800" dirty="0"/>
+          </a:p>
+        </p:txBody>
+      </p:sp>
+      <p:sp>
+        <p:nvSpPr>
+          <p:cNvPr id="11" name="Text 9"/>
+          <p:cNvSpPr txBox="1"/>
+          <p:nvPr/>
+        </p:nvSpPr>
+        <p:spPr>
+          <a:xfrm>
+            <a:off x="8138160" y="2286000"/>
+            <a:ext cx="3230575" cy="3657600"/>
+          </a:xfrm>
+          <a:prstGeom prst="rect">
+            <a:avLst/>
+          </a:prstGeom>
+          <a:noFill/>
+          <a:ln/>
+        </p:spPr>
+        <p:txBody>
+          <a:bodyPr wrap="square" lIns="0" tIns="0" rIns="0" bIns="0" rtlCol="0" anchor="t"/>
+          <a:lstStyle/>
+          <a:p>
+            <a:pPr indent="0" marL="0">
+              <a:buNone/>
+            </a:pPr>
+            <a:r>
+              <a:rPr lang="en-US" sz="1900" dirty="0">
+                <a:solidFill>
+                  <a:srgbClr val="1B2530"/>
+                </a:solidFill>
+                <a:latin typeface="Calibri" pitchFamily="34" charset="0"/>
+                <a:ea typeface="Calibri" pitchFamily="34" charset="-122"/>
+                <a:cs typeface="Calibri" pitchFamily="34" charset="-120"/>
+              </a:rPr>
+              <a:t>Un minuto da soli: scrivete le risposte</a:t>
+            </a:r>
+            <a:endParaRPr lang="en-US" sz="1900" dirty="0"/>
+          </a:p>
+          <a:p>
+            <a:pPr indent="0" marL="0">
+              <a:buNone/>
+            </a:pPr>
+            <a:endParaRPr lang="en-US" sz="1900" dirty="0"/>
+          </a:p>
+          <a:p>
+            <a:pPr indent="0" marL="0">
+              <a:buNone/>
+            </a:pPr>
+            <a:r>
+              <a:rPr lang="en-US" sz="1900" dirty="0">
+                <a:solidFill>
+                  <a:srgbClr val="1B2530"/>
+                </a:solidFill>
+                <a:latin typeface="Calibri" pitchFamily="34" charset="0"/>
+                <a:ea typeface="Calibri" pitchFamily="34" charset="-122"/>
+                <a:cs typeface="Calibri" pitchFamily="34" charset="-120"/>
+              </a:rPr>
+              <a:t>Un minuto con il vicino: mettetevi d'accordo</a:t>
+            </a:r>
+            <a:endParaRPr lang="en-US" sz="1900" dirty="0"/>
+          </a:p>
+          <a:p>
+            <a:pPr indent="0" marL="0">
+              <a:buNone/>
+            </a:pPr>
+            <a:endParaRPr lang="en-US" sz="1900" dirty="0"/>
+          </a:p>
+          <a:p>
+            <a:pPr indent="0" marL="0">
+              <a:buNone/>
+            </a:pPr>
+            <a:r>
+              <a:rPr lang="en-US" sz="1900" dirty="0">
+                <a:solidFill>
+                  <a:srgbClr val="1B2530"/>
+                </a:solidFill>
+                <a:latin typeface="Calibri" pitchFamily="34" charset="0"/>
+                <a:ea typeface="Calibri" pitchFamily="34" charset="-122"/>
+                <a:cs typeface="Calibri" pitchFamily="34" charset="-120"/>
+              </a:rPr>
+              <a:t>Poi verifichiamo insieme</a:t>
+            </a:r>
+            <a:endParaRPr lang="en-US" sz="1900" dirty="0"/>
+          </a:p>
+        </p:txBody>
+      </p:sp>
+      <p:sp>
+        <p:nvSpPr>
+          <p:cNvPr id="25" name="Slide Number Placeholder 0"/>
+          <p:cNvSpPr>
+            <a:spLocks noGrp="1"/>
+          </p:cNvSpPr>
+          <p:nvPr>
+            <p:ph type="sldNum" sz="quarter" idx="4294967295"/>
+          </p:nvPr>
+        </p:nvSpPr>
+        <p:spPr>
+          <a:xfrm>
+            <a:off x="11002975" y="6419088"/>
+            <a:ext cx="640080" cy="274320"/>
+          </a:xfrm>
+          <a:prstGeom prst="rect">
+            <a:avLst/>
+          </a:prstGeom>
+          <a:extLst>
+            <a:ext uri="{C572A759-6A51-4108-AA02-DFA0A04FC94B}">
+              <ma14:wrappingTextBoxFlag xmlns:ma14="http://schemas.microsoft.com/office/mac/drawingml/2011/main" val="0"/>
+            </a:ext>
+          </a:extLst>
+        </p:spPr>
+        <p:txBody>
+          <a:bodyPr/>
+          <a:lstStyle>
+            <a:lvl1pPr>
+              <a:defRPr sz="1000">
+                <a:solidFill>
+                  <a:srgbClr val="5B6B78"/>
+                </a:solidFill>
+                <a:latin typeface="Calibri"/>
+                <a:ea typeface="Calibri"/>
+                <a:cs typeface="Calibri"/>
+              </a:defRPr>
+            </a:lvl1pPr>
+          </a:lstStyle>
+          <a:p>
+            <a:pPr algn="r"/>
+            <a:fld id="{F7021451-1387-4CA6-816F-3879F97B5CBC}" type="slidenum">
+              <a:rPr b="0" lang="en-US"/>
+              <a:t>8</a:t>
+            </a:fld>
+            <a:endParaRPr lang="en-US"/>
+          </a:p>
+        </p:txBody>
+      </p:sp>
+    </p:spTree>
+  </p:cSld>
+  <p:clrMapOvr>
+    <a:masterClrMapping/>
+  </p:clrMapOvr>
+</p:sld>
+</file>
+
+<file path=ppt/slides/slide9.xml><?xml version="1.0" encoding="utf-8"?>
+<p:sld xmlns:a="http://schemas.openxmlformats.org/drawingml/2006/main" xmlns:r="http://schemas.openxmlformats.org/officeDocument/2006/relationships" xmlns:p="http://schemas.openxmlformats.org/presentationml/2006/main">
+  <p:cSld name="Slide 9">
+    <p:spTree>
+      <p:nvGrpSpPr>
+        <p:cNvPr id="1" name=""/>
+        <p:cNvGrpSpPr/>
+        <p:nvPr/>
+      </p:nvGrpSpPr>
+      <p:grpSpPr>
+        <a:xfrm>
+          <a:off x="0" y="0"/>
+          <a:ext cx="0" cy="0"/>
+          <a:chOff x="0" y="0"/>
+          <a:chExt cx="0" cy="0"/>
+        </a:xfrm>
+      </p:grpSpPr>
+      <p:sp>
+        <p:nvSpPr>
+          <p:cNvPr id="2" name="Text 1"/>
+          <p:cNvSpPr/>
+          <p:nvPr>
+            <p:ph idx="101" type="title" hasCustomPrompt="1"/>
+          </p:nvPr>
+        </p:nvSpPr>
+        <p:spPr>
+          <a:xfrm>
+            <a:off x="548640" y="365760"/>
+            <a:ext cx="11094415" cy="868680"/>
+          </a:xfrm>
+          <a:prstGeom prst="rect">
+            <a:avLst/>
+          </a:prstGeom>
+          <a:noFill/>
+          <a:ln/>
+        </p:spPr>
+        <p:txBody>
+          <a:bodyPr wrap="square" lIns="0" tIns="0" rIns="0" bIns="0" rtlCol="0" anchor="ctr"/>
+          <a:lstStyle/>
+          <a:p>
+            <a:pPr algn="l" indent="0" marL="0">
+              <a:buNone/>
+            </a:pPr>
+            <a:r>
+              <a:rPr lang="en-US" sz="3200" b="1" dirty="0">
+                <a:solidFill>
+                  <a:srgbClr val="2E4A62"/>
+                </a:solidFill>
+                <a:latin typeface="Cambria" pitchFamily="34" charset="0"/>
+                <a:ea typeface="Cambria" pitchFamily="34" charset="-122"/>
+                <a:cs typeface="Cambria" pitchFamily="34" charset="-120"/>
+              </a:rPr>
               <a:t>Come leggere una riga di assembly</a:t>
             </a:r>
             <a:endParaRPr lang="en-US" sz="3200" dirty="0"/>
@@ -27348,7 +27986,7 @@
       </p:sp>
       <p:graphicFrame>
         <p:nvGraphicFramePr>
-          <p:cNvPr id="9" name="Table 0"/>
+          <p:cNvPr id="10" name="Table 0"/>
           <p:cNvGraphicFramePr>
             <a:graphicFrameLocks noGrp="1"/>
           </p:cNvGraphicFramePr>
@@ -28774,1433 +29412,6 @@
                 <a:cs typeface="Calibri" pitchFamily="34" charset="-120"/>
               </a:rPr>
               <a:t> · leggere una riga di assembly</a:t>
-            </a:r>
-            <a:endParaRPr lang="en-US" sz="1100" dirty="0"/>
-          </a:p>
-        </p:txBody>
-      </p:sp>
-      <p:sp>
-        <p:nvSpPr>
-          <p:cNvPr id="25" name="Slide Number Placeholder 0"/>
-          <p:cNvSpPr>
-            <a:spLocks noGrp="1"/>
-          </p:cNvSpPr>
-          <p:nvPr>
-            <p:ph type="sldNum" sz="quarter" idx="4294967295"/>
-          </p:nvPr>
-        </p:nvSpPr>
-        <p:spPr>
-          <a:xfrm>
-            <a:off x="11002975" y="6419088"/>
-            <a:ext cx="640080" cy="274320"/>
-          </a:xfrm>
-          <a:prstGeom prst="rect">
-            <a:avLst/>
-          </a:prstGeom>
-          <a:extLst>
-            <a:ext uri="{C572A759-6A51-4108-AA02-DFA0A04FC94B}">
-              <ma14:wrappingTextBoxFlag xmlns:ma14="http://schemas.microsoft.com/office/mac/drawingml/2011/main" val="0"/>
-            </a:ext>
-          </a:extLst>
-        </p:spPr>
-        <p:txBody>
-          <a:bodyPr/>
-          <a:lstStyle>
-            <a:lvl1pPr>
-              <a:defRPr sz="1000">
-                <a:solidFill>
-                  <a:srgbClr val="5B6B78"/>
-                </a:solidFill>
-                <a:latin typeface="Calibri"/>
-                <a:ea typeface="Calibri"/>
-                <a:cs typeface="Calibri"/>
-              </a:defRPr>
-            </a:lvl1pPr>
-          </a:lstStyle>
-          <a:p>
-            <a:pPr algn="r"/>
-            <a:fld id="{F7021451-1387-4CA6-816F-3879F97B5CBC}" type="slidenum">
-              <a:rPr b="0" lang="en-US"/>
-              <a:t>8</a:t>
-            </a:fld>
-            <a:endParaRPr lang="en-US"/>
-          </a:p>
-        </p:txBody>
-      </p:sp>
-    </p:spTree>
-  </p:cSld>
-  <p:clrMapOvr>
-    <a:masterClrMapping/>
-  </p:clrMapOvr>
-</p:sld>
-</file>
-
-<file path=ppt/slides/slide9.xml><?xml version="1.0" encoding="utf-8"?>
-<p:sld xmlns:a="http://schemas.openxmlformats.org/drawingml/2006/main" xmlns:r="http://schemas.openxmlformats.org/officeDocument/2006/relationships" xmlns:p="http://schemas.openxmlformats.org/presentationml/2006/main">
-  <p:cSld name="Slide 9">
-    <p:spTree>
-      <p:nvGrpSpPr>
-        <p:cNvPr id="1" name=""/>
-        <p:cNvGrpSpPr/>
-        <p:nvPr/>
-      </p:nvGrpSpPr>
-      <p:grpSpPr>
-        <a:xfrm>
-          <a:off x="0" y="0"/>
-          <a:ext cx="0" cy="0"/>
-          <a:chOff x="0" y="0"/>
-          <a:chExt cx="0" cy="0"/>
-        </a:xfrm>
-      </p:grpSpPr>
-      <p:sp>
-        <p:nvSpPr>
-          <p:cNvPr id="2" name="Text 1"/>
-          <p:cNvSpPr/>
-          <p:nvPr>
-            <p:ph idx="101" type="title" hasCustomPrompt="1"/>
-          </p:nvPr>
-        </p:nvSpPr>
-        <p:spPr>
-          <a:xfrm>
-            <a:off x="548640" y="365760"/>
-            <a:ext cx="11094415" cy="868680"/>
-          </a:xfrm>
-          <a:prstGeom prst="rect">
-            <a:avLst/>
-          </a:prstGeom>
-          <a:noFill/>
-          <a:ln/>
-        </p:spPr>
-        <p:txBody>
-          <a:bodyPr wrap="square" lIns="0" tIns="0" rIns="0" bIns="0" rtlCol="0" anchor="ctr"/>
-          <a:lstStyle/>
-          <a:p>
-            <a:pPr algn="l" indent="0" marL="0">
-              <a:buNone/>
-            </a:pPr>
-            <a:r>
-              <a:rPr lang="en-US" sz="3200" b="1" dirty="0">
-                <a:solidFill>
-                  <a:srgbClr val="2E4A62"/>
-                </a:solidFill>
-                <a:latin typeface="Cambria" pitchFamily="34" charset="0"/>
-                <a:ea typeface="Cambria" pitchFamily="34" charset="-122"/>
-                <a:cs typeface="Cambria" pitchFamily="34" charset="-120"/>
-              </a:rPr>
-              <a:t>Perché salvare ra? Il frame di stack</a:t>
-            </a:r>
-            <a:endParaRPr lang="en-US" sz="3200" dirty="0"/>
-          </a:p>
-        </p:txBody>
-      </p:sp>
-      <p:sp>
-        <p:nvSpPr>
-          <p:cNvPr id="3" name="Shape 1"/>
-          <p:cNvSpPr/>
-          <p:nvPr/>
-        </p:nvSpPr>
-        <p:spPr>
-          <a:xfrm>
-            <a:off x="548640" y="1515999"/>
-            <a:ext cx="146304" cy="146304"/>
-          </a:xfrm>
-          <a:prstGeom prst="rect">
-            <a:avLst/>
-          </a:prstGeom>
-          <a:solidFill>
-            <a:srgbClr val="0E7C86"/>
-          </a:solidFill>
-          <a:ln w="12700">
-            <a:solidFill>
-              <a:srgbClr val="0E7C86"/>
-            </a:solidFill>
-            <a:prstDash val="solid"/>
-          </a:ln>
-        </p:spPr>
-      </p:sp>
-      <p:sp>
-        <p:nvSpPr>
-          <p:cNvPr id="4" name="Text 2"/>
-          <p:cNvSpPr txBox="1"/>
-          <p:nvPr/>
-        </p:nvSpPr>
-        <p:spPr>
-          <a:xfrm>
-            <a:off x="932688" y="1417320"/>
-            <a:ext cx="6108192" cy="650748"/>
-          </a:xfrm>
-          <a:prstGeom prst="rect">
-            <a:avLst/>
-          </a:prstGeom>
-          <a:noFill/>
-          <a:ln/>
-        </p:spPr>
-        <p:txBody>
-          <a:bodyPr wrap="square" lIns="0" tIns="0" rIns="0" bIns="0" rtlCol="0" anchor="t"/>
-          <a:lstStyle/>
-          <a:p>
-            <a:pPr indent="0" marL="0">
-              <a:spcAft>
-                <a:spcPts val="200"/>
-              </a:spcAft>
-              <a:buNone/>
-            </a:pPr>
-            <a:r>
-              <a:rPr lang="en-US" sz="2100" dirty="0">
-                <a:solidFill>
-                  <a:srgbClr val="1B2530"/>
-                </a:solidFill>
-                <a:latin typeface="Calibri" pitchFamily="34" charset="0"/>
-                <a:ea typeface="Calibri" pitchFamily="34" charset="-122"/>
-                <a:cs typeface="Calibri" pitchFamily="34" charset="-120"/>
-              </a:rPr>
-              <a:t>call memorizza in ra l'indirizzo a cui tornare</a:t>
-            </a:r>
-            <a:endParaRPr lang="en-US" sz="2100" dirty="0"/>
-          </a:p>
-        </p:txBody>
-      </p:sp>
-      <p:sp>
-        <p:nvSpPr>
-          <p:cNvPr id="5" name="Shape 3"/>
-          <p:cNvSpPr/>
-          <p:nvPr/>
-        </p:nvSpPr>
-        <p:spPr>
-          <a:xfrm>
-            <a:off x="548640" y="2305431"/>
-            <a:ext cx="146304" cy="146304"/>
-          </a:xfrm>
-          <a:prstGeom prst="rect">
-            <a:avLst/>
-          </a:prstGeom>
-          <a:solidFill>
-            <a:srgbClr val="C7791B"/>
-          </a:solidFill>
-          <a:ln w="12700">
-            <a:solidFill>
-              <a:srgbClr val="C7791B"/>
-            </a:solidFill>
-            <a:prstDash val="solid"/>
-          </a:ln>
-        </p:spPr>
-      </p:sp>
-      <p:sp>
-        <p:nvSpPr>
-          <p:cNvPr id="6" name="Text 4"/>
-          <p:cNvSpPr txBox="1"/>
-          <p:nvPr/>
-        </p:nvSpPr>
-        <p:spPr>
-          <a:xfrm>
-            <a:off x="932688" y="2206752"/>
-            <a:ext cx="6108192" cy="650748"/>
-          </a:xfrm>
-          <a:prstGeom prst="rect">
-            <a:avLst/>
-          </a:prstGeom>
-          <a:noFill/>
-          <a:ln/>
-        </p:spPr>
-        <p:txBody>
-          <a:bodyPr wrap="square" lIns="0" tIns="0" rIns="0" bIns="0" rtlCol="0" anchor="t"/>
-          <a:lstStyle/>
-          <a:p>
-            <a:pPr indent="0" marL="0">
-              <a:spcAft>
-                <a:spcPts val="200"/>
-              </a:spcAft>
-              <a:buNone/>
-            </a:pPr>
-            <a:r>
-              <a:rPr lang="en-US" sz="2100" dirty="0">
-                <a:solidFill>
-                  <a:srgbClr val="1B2530"/>
-                </a:solidFill>
-                <a:latin typeface="Calibri" pitchFamily="34" charset="0"/>
-                <a:ea typeface="Calibri" pitchFamily="34" charset="-122"/>
-                <a:cs typeface="Calibri" pitchFamily="34" charset="-120"/>
-              </a:rPr>
-              <a:t>La funzione chiamata userà ra per le proprie chiamate, sovrascrivendo il vostro</a:t>
-            </a:r>
-            <a:endParaRPr lang="en-US" sz="2100" dirty="0"/>
-          </a:p>
-        </p:txBody>
-      </p:sp>
-      <p:sp>
-        <p:nvSpPr>
-          <p:cNvPr id="7" name="Shape 5"/>
-          <p:cNvSpPr/>
-          <p:nvPr/>
-        </p:nvSpPr>
-        <p:spPr>
-          <a:xfrm>
-            <a:off x="548640" y="3094863"/>
-            <a:ext cx="146304" cy="146304"/>
-          </a:xfrm>
-          <a:prstGeom prst="rect">
-            <a:avLst/>
-          </a:prstGeom>
-          <a:solidFill>
-            <a:srgbClr val="0E7C86"/>
-          </a:solidFill>
-          <a:ln w="12700">
-            <a:solidFill>
-              <a:srgbClr val="0E7C86"/>
-            </a:solidFill>
-            <a:prstDash val="solid"/>
-          </a:ln>
-        </p:spPr>
-      </p:sp>
-      <p:sp>
-        <p:nvSpPr>
-          <p:cNvPr id="8" name="Text 6"/>
-          <p:cNvSpPr txBox="1"/>
-          <p:nvPr/>
-        </p:nvSpPr>
-        <p:spPr>
-          <a:xfrm>
-            <a:off x="932688" y="2996184"/>
-            <a:ext cx="6108192" cy="1281684"/>
-          </a:xfrm>
-          <a:prstGeom prst="rect">
-            <a:avLst/>
-          </a:prstGeom>
-          <a:noFill/>
-          <a:ln/>
-        </p:spPr>
-        <p:txBody>
-          <a:bodyPr wrap="square" lIns="0" tIns="0" rIns="0" bIns="0" rtlCol="0" anchor="t"/>
-          <a:lstStyle/>
-          <a:p>
-            <a:pPr indent="0" marL="0">
-              <a:spcAft>
-                <a:spcPts val="200"/>
-              </a:spcAft>
-              <a:buNone/>
-            </a:pPr>
-            <a:r>
-              <a:rPr lang="en-US" sz="2100" dirty="0">
-                <a:solidFill>
-                  <a:srgbClr val="1B2530"/>
-                </a:solidFill>
-                <a:latin typeface="Calibri" pitchFamily="34" charset="0"/>
-                <a:ea typeface="Calibri" pitchFamily="34" charset="-122"/>
-                <a:cs typeface="Calibri" pitchFamily="34" charset="-120"/>
-              </a:rPr>
-              <a:t>Perciò una funzione che ne chiama un'altra salva prima ra</a:t>
-            </a:r>
-            <a:endParaRPr lang="en-US" sz="2100" dirty="0"/>
-          </a:p>
-          <a:p>
-            <a:pPr indent="0" marL="0">
-              <a:spcAft>
-                <a:spcPts val="200"/>
-              </a:spcAft>
-              <a:buNone/>
-            </a:pPr>
-            <a:r>
-              <a:rPr lang="en-US" sz="1800" dirty="0">
-                <a:solidFill>
-                  <a:srgbClr val="5B6B78"/>
-                </a:solidFill>
-                <a:latin typeface="Calibri" pitchFamily="34" charset="0"/>
-                <a:ea typeface="Calibri" pitchFamily="34" charset="-122"/>
-                <a:cs typeface="Calibri" pitchFamily="34" charset="-120"/>
-              </a:rPr>
-              <a:t>– abbassa sp di 16 per fare spazio</a:t>
-            </a:r>
-            <a:endParaRPr lang="en-US" sz="2100" dirty="0"/>
-          </a:p>
-          <a:p>
-            <a:pPr indent="0" marL="0">
-              <a:spcAft>
-                <a:spcPts val="200"/>
-              </a:spcAft>
-              <a:buNone/>
-            </a:pPr>
-            <a:r>
-              <a:rPr lang="en-US" sz="1800" dirty="0">
-                <a:solidFill>
-                  <a:srgbClr val="5B6B78"/>
-                </a:solidFill>
-                <a:latin typeface="Calibri" pitchFamily="34" charset="0"/>
-                <a:ea typeface="Calibri" pitchFamily="34" charset="-122"/>
-                <a:cs typeface="Calibri" pitchFamily="34" charset="-120"/>
-              </a:rPr>
-              <a:t>– memorizza ra in 12(sp)</a:t>
-            </a:r>
-            <a:endParaRPr lang="en-US" sz="2100" dirty="0"/>
-          </a:p>
-        </p:txBody>
-      </p:sp>
-      <p:sp>
-        <p:nvSpPr>
-          <p:cNvPr id="9" name="Shape 7"/>
-          <p:cNvSpPr/>
-          <p:nvPr/>
-        </p:nvSpPr>
-        <p:spPr>
-          <a:xfrm>
-            <a:off x="548640" y="4515231"/>
-            <a:ext cx="146304" cy="146304"/>
-          </a:xfrm>
-          <a:prstGeom prst="rect">
-            <a:avLst/>
-          </a:prstGeom>
-          <a:solidFill>
-            <a:srgbClr val="C7791B"/>
-          </a:solidFill>
-          <a:ln w="12700">
-            <a:solidFill>
-              <a:srgbClr val="C7791B"/>
-            </a:solidFill>
-            <a:prstDash val="solid"/>
-          </a:ln>
-        </p:spPr>
-      </p:sp>
-      <p:sp>
-        <p:nvSpPr>
-          <p:cNvPr id="10" name="Text 8"/>
-          <p:cNvSpPr txBox="1"/>
-          <p:nvPr/>
-        </p:nvSpPr>
-        <p:spPr>
-          <a:xfrm>
-            <a:off x="932688" y="4416552"/>
-            <a:ext cx="6108192" cy="966216"/>
-          </a:xfrm>
-          <a:prstGeom prst="rect">
-            <a:avLst/>
-          </a:prstGeom>
-          <a:noFill/>
-          <a:ln/>
-        </p:spPr>
-        <p:txBody>
-          <a:bodyPr wrap="square" lIns="0" tIns="0" rIns="0" bIns="0" rtlCol="0" anchor="t"/>
-          <a:lstStyle/>
-          <a:p>
-            <a:pPr indent="0" marL="0">
-              <a:spcAft>
-                <a:spcPts val="200"/>
-              </a:spcAft>
-              <a:buNone/>
-            </a:pPr>
-            <a:r>
-              <a:rPr lang="en-US" sz="2100" dirty="0">
-                <a:solidFill>
-                  <a:srgbClr val="1B2530"/>
-                </a:solidFill>
-                <a:latin typeface="Calibri" pitchFamily="34" charset="0"/>
-                <a:ea typeface="Calibri" pitchFamily="34" charset="-122"/>
-                <a:cs typeface="Calibri" pitchFamily="34" charset="-120"/>
-              </a:rPr>
-              <a:t>Dopo la chiamata, si disfa tutto in ordine inverso</a:t>
-            </a:r>
-            <a:endParaRPr lang="en-US" sz="2100" dirty="0"/>
-          </a:p>
-          <a:p>
-            <a:pPr indent="0" marL="0">
-              <a:spcAft>
-                <a:spcPts val="200"/>
-              </a:spcAft>
-              <a:buNone/>
-            </a:pPr>
-            <a:r>
-              <a:rPr lang="en-US" sz="1800" dirty="0">
-                <a:solidFill>
-                  <a:srgbClr val="5B6B78"/>
-                </a:solidFill>
-                <a:latin typeface="Calibri" pitchFamily="34" charset="0"/>
-                <a:ea typeface="Calibri" pitchFamily="34" charset="-122"/>
-                <a:cs typeface="Calibri" pitchFamily="34" charset="-120"/>
-              </a:rPr>
-              <a:t>– ricarica ra, alza sp di 16, poi ret</a:t>
-            </a:r>
-            <a:endParaRPr lang="en-US" sz="2100" dirty="0"/>
-          </a:p>
-        </p:txBody>
-      </p:sp>
-      <p:sp>
-        <p:nvSpPr>
-          <p:cNvPr id="11" name="Shape 9"/>
-          <p:cNvSpPr/>
-          <p:nvPr/>
-        </p:nvSpPr>
-        <p:spPr>
-          <a:xfrm>
-            <a:off x="548640" y="5620131"/>
-            <a:ext cx="146304" cy="146304"/>
-          </a:xfrm>
-          <a:prstGeom prst="rect">
-            <a:avLst/>
-          </a:prstGeom>
-          <a:solidFill>
-            <a:srgbClr val="0E7C86"/>
-          </a:solidFill>
-          <a:ln w="12700">
-            <a:solidFill>
-              <a:srgbClr val="0E7C86"/>
-            </a:solidFill>
-            <a:prstDash val="solid"/>
-          </a:ln>
-        </p:spPr>
-      </p:sp>
-      <p:sp>
-        <p:nvSpPr>
-          <p:cNvPr id="12" name="Text 10"/>
-          <p:cNvSpPr txBox="1"/>
-          <p:nvPr/>
-        </p:nvSpPr>
-        <p:spPr>
-          <a:xfrm>
-            <a:off x="932688" y="5521452"/>
-            <a:ext cx="6108192" cy="650748"/>
-          </a:xfrm>
-          <a:prstGeom prst="rect">
-            <a:avLst/>
-          </a:prstGeom>
-          <a:noFill/>
-          <a:ln/>
-        </p:spPr>
-        <p:txBody>
-          <a:bodyPr wrap="square" lIns="0" tIns="0" rIns="0" bIns="0" rtlCol="0" anchor="t"/>
-          <a:lstStyle/>
-          <a:p>
-            <a:pPr indent="0" marL="0">
-              <a:spcAft>
-                <a:spcPts val="200"/>
-              </a:spcAft>
-              <a:buNone/>
-            </a:pPr>
-            <a:r>
-              <a:rPr lang="en-US" sz="2100" dirty="0">
-                <a:solidFill>
-                  <a:srgbClr val="1B2530"/>
-                </a:solidFill>
-                <a:latin typeface="Calibri" pitchFamily="34" charset="0"/>
-                <a:ea typeface="Calibri" pitchFamily="34" charset="-122"/>
-                <a:cs typeface="Calibri" pitchFamily="34" charset="-120"/>
-              </a:rPr>
-              <a:t>Dimenticare la coppia è il classico primo bug: la funzione ritorna nel posto sbagliato</a:t>
-            </a:r>
-            <a:endParaRPr lang="en-US" sz="2100" dirty="0"/>
-          </a:p>
-        </p:txBody>
-      </p:sp>
-      <p:sp>
-        <p:nvSpPr>
-          <p:cNvPr id="13" name="Text 11"/>
-          <p:cNvSpPr txBox="1"/>
-          <p:nvPr/>
-        </p:nvSpPr>
-        <p:spPr>
-          <a:xfrm>
-            <a:off x="7589520" y="1417320"/>
-            <a:ext cx="4206240" cy="365760"/>
-          </a:xfrm>
-          <a:prstGeom prst="rect">
-            <a:avLst/>
-          </a:prstGeom>
-          <a:noFill/>
-          <a:ln/>
-        </p:spPr>
-        <p:txBody>
-          <a:bodyPr wrap="square" lIns="0" tIns="0" rIns="0" bIns="0" rtlCol="0" anchor="t"/>
-          <a:lstStyle/>
-          <a:p>
-            <a:pPr indent="0" marL="0">
-              <a:buNone/>
-            </a:pPr>
-            <a:r>
-              <a:rPr lang="en-US" sz="1500" b="1" dirty="0">
-                <a:solidFill>
-                  <a:srgbClr val="2E4A62"/>
-                </a:solidFill>
-                <a:latin typeface="Calibri" pitchFamily="34" charset="0"/>
-                <a:ea typeface="Calibri" pitchFamily="34" charset="-122"/>
-                <a:cs typeface="Calibri" pitchFamily="34" charset="-120"/>
-              </a:rPr>
-              <a:t>Lo stack dopo il prologo</a:t>
-            </a:r>
-            <a:endParaRPr lang="en-US" sz="1500" dirty="0"/>
-          </a:p>
-        </p:txBody>
-      </p:sp>
-      <p:sp>
-        <p:nvSpPr>
-          <p:cNvPr id="14" name="Text 12"/>
-          <p:cNvSpPr txBox="1"/>
-          <p:nvPr/>
-        </p:nvSpPr>
-        <p:spPr>
-          <a:xfrm>
-            <a:off x="7589520" y="2103120"/>
-            <a:ext cx="2926080" cy="566928"/>
-          </a:xfrm>
-          <a:prstGeom prst="rect">
-            <a:avLst/>
-          </a:prstGeom>
-          <a:solidFill>
-            <a:srgbClr val="C9D2D8"/>
-          </a:solidFill>
-          <a:ln w="12700">
-            <a:solidFill>
-              <a:srgbClr val="2E4A62"/>
-            </a:solidFill>
-          </a:ln>
-        </p:spPr>
-        <p:txBody>
-          <a:bodyPr wrap="square" lIns="0" tIns="0" rIns="0" bIns="0" rtlCol="0" anchor="ctr"/>
-          <a:lstStyle/>
-          <a:p>
-            <a:pPr algn="ctr" indent="0" marL="0">
-              <a:buNone/>
-            </a:pPr>
-            <a:r>
-              <a:rPr lang="en-US" sz="1600" b="1" dirty="0">
-                <a:solidFill>
-                  <a:srgbClr val="1B2530"/>
-                </a:solidFill>
-                <a:latin typeface="Courier New" pitchFamily="34" charset="0"/>
-                <a:ea typeface="Courier New" pitchFamily="34" charset="-122"/>
-                <a:cs typeface="Courier New" pitchFamily="34" charset="-120"/>
-              </a:rPr>
-              <a:t>dati del chiamante</a:t>
-            </a:r>
-            <a:endParaRPr lang="en-US" sz="1600" dirty="0"/>
-          </a:p>
-        </p:txBody>
-      </p:sp>
-      <p:sp>
-        <p:nvSpPr>
-          <p:cNvPr id="15" name="Text 13"/>
-          <p:cNvSpPr txBox="1"/>
-          <p:nvPr/>
-        </p:nvSpPr>
-        <p:spPr>
-          <a:xfrm>
-            <a:off x="10652760" y="2103120"/>
-            <a:ext cx="1097280" cy="566928"/>
-          </a:xfrm>
-          <a:prstGeom prst="rect">
-            <a:avLst/>
-          </a:prstGeom>
-          <a:noFill/>
-          <a:ln/>
-        </p:spPr>
-        <p:txBody>
-          <a:bodyPr wrap="square" lIns="0" tIns="0" rIns="0" bIns="0" rtlCol="0" anchor="ctr"/>
-          <a:lstStyle/>
-          <a:p>
-            <a:pPr indent="0" marL="0">
-              <a:buNone/>
-            </a:pPr>
-            <a:r>
-              <a:rPr lang="en-US" sz="1400" dirty="0">
-                <a:solidFill>
-                  <a:srgbClr val="5B6B78"/>
-                </a:solidFill>
-                <a:latin typeface="Courier New" pitchFamily="34" charset="0"/>
-                <a:ea typeface="Courier New" pitchFamily="34" charset="-122"/>
-                <a:cs typeface="Courier New" pitchFamily="34" charset="-120"/>
-              </a:rPr>
-              <a:t>16(sp)</a:t>
-            </a:r>
-            <a:endParaRPr lang="en-US" sz="1400" dirty="0"/>
-          </a:p>
-        </p:txBody>
-      </p:sp>
-      <p:sp>
-        <p:nvSpPr>
-          <p:cNvPr id="16" name="Text 14"/>
-          <p:cNvSpPr txBox="1"/>
-          <p:nvPr/>
-        </p:nvSpPr>
-        <p:spPr>
-          <a:xfrm>
-            <a:off x="7589520" y="2670048"/>
-            <a:ext cx="2926080" cy="566928"/>
-          </a:xfrm>
-          <a:prstGeom prst="rect">
-            <a:avLst/>
-          </a:prstGeom>
-          <a:solidFill>
-            <a:srgbClr val="C7791B"/>
-          </a:solidFill>
-          <a:ln w="12700">
-            <a:solidFill>
-              <a:srgbClr val="2E4A62"/>
-            </a:solidFill>
-          </a:ln>
-        </p:spPr>
-        <p:txBody>
-          <a:bodyPr wrap="square" lIns="0" tIns="0" rIns="0" bIns="0" rtlCol="0" anchor="ctr"/>
-          <a:lstStyle/>
-          <a:p>
-            <a:pPr algn="ctr" indent="0" marL="0">
-              <a:buNone/>
-            </a:pPr>
-            <a:r>
-              <a:rPr lang="en-US" sz="1600" b="1" dirty="0">
-                <a:solidFill>
-                  <a:srgbClr val="FFFFFF"/>
-                </a:solidFill>
-                <a:latin typeface="Courier New" pitchFamily="34" charset="0"/>
-                <a:ea typeface="Courier New" pitchFamily="34" charset="-122"/>
-                <a:cs typeface="Courier New" pitchFamily="34" charset="-120"/>
-              </a:rPr>
-              <a:t>ra</a:t>
-            </a:r>
-            <a:endParaRPr lang="en-US" sz="1600" dirty="0"/>
-          </a:p>
-        </p:txBody>
-      </p:sp>
-      <p:sp>
-        <p:nvSpPr>
-          <p:cNvPr id="17" name="Text 15"/>
-          <p:cNvSpPr txBox="1"/>
-          <p:nvPr/>
-        </p:nvSpPr>
-        <p:spPr>
-          <a:xfrm>
-            <a:off x="10652760" y="2670048"/>
-            <a:ext cx="1097280" cy="566928"/>
-          </a:xfrm>
-          <a:prstGeom prst="rect">
-            <a:avLst/>
-          </a:prstGeom>
-          <a:noFill/>
-          <a:ln/>
-        </p:spPr>
-        <p:txBody>
-          <a:bodyPr wrap="square" lIns="0" tIns="0" rIns="0" bIns="0" rtlCol="0" anchor="ctr"/>
-          <a:lstStyle/>
-          <a:p>
-            <a:pPr indent="0" marL="0">
-              <a:buNone/>
-            </a:pPr>
-            <a:r>
-              <a:rPr lang="en-US" sz="1400" dirty="0">
-                <a:solidFill>
-                  <a:srgbClr val="5B6B78"/>
-                </a:solidFill>
-                <a:latin typeface="Courier New" pitchFamily="34" charset="0"/>
-                <a:ea typeface="Courier New" pitchFamily="34" charset="-122"/>
-                <a:cs typeface="Courier New" pitchFamily="34" charset="-120"/>
-              </a:rPr>
-              <a:t>12(sp)</a:t>
-            </a:r>
-            <a:endParaRPr lang="en-US" sz="1400" dirty="0"/>
-          </a:p>
-        </p:txBody>
-      </p:sp>
-      <p:sp>
-        <p:nvSpPr>
-          <p:cNvPr id="18" name="Text 16"/>
-          <p:cNvSpPr txBox="1"/>
-          <p:nvPr/>
-        </p:nvSpPr>
-        <p:spPr>
-          <a:xfrm>
-            <a:off x="7589520" y="3236976"/>
-            <a:ext cx="2926080" cy="566928"/>
-          </a:xfrm>
-          <a:prstGeom prst="rect">
-            <a:avLst/>
-          </a:prstGeom>
-          <a:solidFill>
-            <a:srgbClr val="EEF2F4"/>
-          </a:solidFill>
-          <a:ln w="12700">
-            <a:solidFill>
-              <a:srgbClr val="2E4A62"/>
-            </a:solidFill>
-          </a:ln>
-        </p:spPr>
-        <p:txBody>
-          <a:bodyPr wrap="square" lIns="0" tIns="0" rIns="0" bIns="0" rtlCol="0" anchor="ctr"/>
-          <a:lstStyle/>
-          <a:p>
-            <a:pPr algn="ctr" indent="0" marL="0">
-              <a:buNone/>
-            </a:pPr>
-            <a:r>
-              <a:rPr lang="en-US" sz="1600" b="1" dirty="0">
-                <a:solidFill>
-                  <a:srgbClr val="5B6B78"/>
-                </a:solidFill>
-                <a:latin typeface="Courier New" pitchFamily="34" charset="0"/>
-                <a:ea typeface="Courier New" pitchFamily="34" charset="-122"/>
-                <a:cs typeface="Courier New" pitchFamily="34" charset="-120"/>
-              </a:rPr>
-              <a:t>libero</a:t>
-            </a:r>
-            <a:endParaRPr lang="en-US" sz="1600" dirty="0"/>
-          </a:p>
-        </p:txBody>
-      </p:sp>
-      <p:sp>
-        <p:nvSpPr>
-          <p:cNvPr id="19" name="Text 17"/>
-          <p:cNvSpPr txBox="1"/>
-          <p:nvPr/>
-        </p:nvSpPr>
-        <p:spPr>
-          <a:xfrm>
-            <a:off x="10652760" y="3236976"/>
-            <a:ext cx="1097280" cy="566928"/>
-          </a:xfrm>
-          <a:prstGeom prst="rect">
-            <a:avLst/>
-          </a:prstGeom>
-          <a:noFill/>
-          <a:ln/>
-        </p:spPr>
-        <p:txBody>
-          <a:bodyPr wrap="square" lIns="0" tIns="0" rIns="0" bIns="0" rtlCol="0" anchor="ctr"/>
-          <a:lstStyle/>
-          <a:p>
-            <a:pPr indent="0" marL="0">
-              <a:buNone/>
-            </a:pPr>
-            <a:r>
-              <a:rPr lang="en-US" sz="1400" dirty="0">
-                <a:solidFill>
-                  <a:srgbClr val="5B6B78"/>
-                </a:solidFill>
-                <a:latin typeface="Courier New" pitchFamily="34" charset="0"/>
-                <a:ea typeface="Courier New" pitchFamily="34" charset="-122"/>
-                <a:cs typeface="Courier New" pitchFamily="34" charset="-120"/>
-              </a:rPr>
-              <a:t> 8(sp)</a:t>
-            </a:r>
-            <a:endParaRPr lang="en-US" sz="1400" dirty="0"/>
-          </a:p>
-        </p:txBody>
-      </p:sp>
-      <p:sp>
-        <p:nvSpPr>
-          <p:cNvPr id="20" name="Text 18"/>
-          <p:cNvSpPr txBox="1"/>
-          <p:nvPr/>
-        </p:nvSpPr>
-        <p:spPr>
-          <a:xfrm>
-            <a:off x="7589520" y="3803904"/>
-            <a:ext cx="2926080" cy="566928"/>
-          </a:xfrm>
-          <a:prstGeom prst="rect">
-            <a:avLst/>
-          </a:prstGeom>
-          <a:solidFill>
-            <a:srgbClr val="EEF2F4"/>
-          </a:solidFill>
-          <a:ln w="12700">
-            <a:solidFill>
-              <a:srgbClr val="2E4A62"/>
-            </a:solidFill>
-          </a:ln>
-        </p:spPr>
-        <p:txBody>
-          <a:bodyPr wrap="square" lIns="0" tIns="0" rIns="0" bIns="0" rtlCol="0" anchor="ctr"/>
-          <a:lstStyle/>
-          <a:p>
-            <a:pPr algn="ctr" indent="0" marL="0">
-              <a:buNone/>
-            </a:pPr>
-            <a:r>
-              <a:rPr lang="en-US" sz="1600" b="1" dirty="0">
-                <a:solidFill>
-                  <a:srgbClr val="5B6B78"/>
-                </a:solidFill>
-                <a:latin typeface="Courier New" pitchFamily="34" charset="0"/>
-                <a:ea typeface="Courier New" pitchFamily="34" charset="-122"/>
-                <a:cs typeface="Courier New" pitchFamily="34" charset="-120"/>
-              </a:rPr>
-              <a:t>libero</a:t>
-            </a:r>
-            <a:endParaRPr lang="en-US" sz="1600" dirty="0"/>
-          </a:p>
-        </p:txBody>
-      </p:sp>
-      <p:sp>
-        <p:nvSpPr>
-          <p:cNvPr id="21" name="Text 19"/>
-          <p:cNvSpPr txBox="1"/>
-          <p:nvPr/>
-        </p:nvSpPr>
-        <p:spPr>
-          <a:xfrm>
-            <a:off x="10652760" y="3803904"/>
-            <a:ext cx="1097280" cy="566928"/>
-          </a:xfrm>
-          <a:prstGeom prst="rect">
-            <a:avLst/>
-          </a:prstGeom>
-          <a:noFill/>
-          <a:ln/>
-        </p:spPr>
-        <p:txBody>
-          <a:bodyPr wrap="square" lIns="0" tIns="0" rIns="0" bIns="0" rtlCol="0" anchor="ctr"/>
-          <a:lstStyle/>
-          <a:p>
-            <a:pPr indent="0" marL="0">
-              <a:buNone/>
-            </a:pPr>
-            <a:r>
-              <a:rPr lang="en-US" sz="1400" dirty="0">
-                <a:solidFill>
-                  <a:srgbClr val="5B6B78"/>
-                </a:solidFill>
-                <a:latin typeface="Courier New" pitchFamily="34" charset="0"/>
-                <a:ea typeface="Courier New" pitchFamily="34" charset="-122"/>
-                <a:cs typeface="Courier New" pitchFamily="34" charset="-120"/>
-              </a:rPr>
-              <a:t> 4(sp)</a:t>
-            </a:r>
-            <a:endParaRPr lang="en-US" sz="1400" dirty="0"/>
-          </a:p>
-        </p:txBody>
-      </p:sp>
-      <p:sp>
-        <p:nvSpPr>
-          <p:cNvPr id="22" name="Text 20"/>
-          <p:cNvSpPr txBox="1"/>
-          <p:nvPr/>
-        </p:nvSpPr>
-        <p:spPr>
-          <a:xfrm>
-            <a:off x="7589520" y="4370832"/>
-            <a:ext cx="2926080" cy="566928"/>
-          </a:xfrm>
-          <a:prstGeom prst="rect">
-            <a:avLst/>
-          </a:prstGeom>
-          <a:solidFill>
-            <a:srgbClr val="EEF2F4"/>
-          </a:solidFill>
-          <a:ln w="12700">
-            <a:solidFill>
-              <a:srgbClr val="2E4A62"/>
-            </a:solidFill>
-          </a:ln>
-        </p:spPr>
-        <p:txBody>
-          <a:bodyPr wrap="square" lIns="0" tIns="0" rIns="0" bIns="0" rtlCol="0" anchor="ctr"/>
-          <a:lstStyle/>
-          <a:p>
-            <a:pPr algn="ctr" indent="0" marL="0">
-              <a:buNone/>
-            </a:pPr>
-            <a:r>
-              <a:rPr lang="en-US" sz="1600" b="1" dirty="0">
-                <a:solidFill>
-                  <a:srgbClr val="5B6B78"/>
-                </a:solidFill>
-                <a:latin typeface="Courier New" pitchFamily="34" charset="0"/>
-                <a:ea typeface="Courier New" pitchFamily="34" charset="-122"/>
-                <a:cs typeface="Courier New" pitchFamily="34" charset="-120"/>
-              </a:rPr>
-              <a:t>libero</a:t>
-            </a:r>
-            <a:endParaRPr lang="en-US" sz="1600" dirty="0"/>
-          </a:p>
-        </p:txBody>
-      </p:sp>
-      <p:sp>
-        <p:nvSpPr>
-          <p:cNvPr id="23" name="Text 21"/>
-          <p:cNvSpPr txBox="1"/>
-          <p:nvPr/>
-        </p:nvSpPr>
-        <p:spPr>
-          <a:xfrm>
-            <a:off x="10652760" y="4370832"/>
-            <a:ext cx="1097280" cy="566928"/>
-          </a:xfrm>
-          <a:prstGeom prst="rect">
-            <a:avLst/>
-          </a:prstGeom>
-          <a:noFill/>
-          <a:ln/>
-        </p:spPr>
-        <p:txBody>
-          <a:bodyPr wrap="square" lIns="0" tIns="0" rIns="0" bIns="0" rtlCol="0" anchor="ctr"/>
-          <a:lstStyle/>
-          <a:p>
-            <a:pPr indent="0" marL="0">
-              <a:buNone/>
-            </a:pPr>
-            <a:r>
-              <a:rPr lang="en-US" sz="1400" dirty="0">
-                <a:solidFill>
-                  <a:srgbClr val="5B6B78"/>
-                </a:solidFill>
-                <a:latin typeface="Courier New" pitchFamily="34" charset="0"/>
-                <a:ea typeface="Courier New" pitchFamily="34" charset="-122"/>
-                <a:cs typeface="Courier New" pitchFamily="34" charset="-120"/>
-              </a:rPr>
-              <a:t> 0(sp)</a:t>
-            </a:r>
-            <a:endParaRPr lang="en-US" sz="1400" dirty="0"/>
-          </a:p>
-        </p:txBody>
-      </p:sp>
-      <p:sp>
-        <p:nvSpPr>
-          <p:cNvPr id="24" name="Shape 22"/>
-          <p:cNvSpPr/>
-          <p:nvPr/>
-        </p:nvSpPr>
-        <p:spPr>
-          <a:xfrm>
-            <a:off x="6766560" y="4654296"/>
-            <a:ext cx="777240" cy="0"/>
-          </a:xfrm>
-          <a:prstGeom prst="line">
-            <a:avLst/>
-          </a:prstGeom>
-          <a:noFill/>
-          <a:ln w="28575">
-            <a:solidFill>
-              <a:srgbClr val="B23A48"/>
-            </a:solidFill>
-            <a:prstDash val="solid"/>
-            <a:tailEnd type="triangle"/>
-          </a:ln>
-        </p:spPr>
-      </p:sp>
-      <p:sp>
-        <p:nvSpPr>
-          <p:cNvPr id="25" name="Text 23"/>
-          <p:cNvSpPr txBox="1"/>
-          <p:nvPr/>
-        </p:nvSpPr>
-        <p:spPr>
-          <a:xfrm>
-            <a:off x="6217920" y="4370832"/>
-            <a:ext cx="502920" cy="566928"/>
-          </a:xfrm>
-          <a:prstGeom prst="rect">
-            <a:avLst/>
-          </a:prstGeom>
-          <a:noFill/>
-          <a:ln/>
-        </p:spPr>
-        <p:txBody>
-          <a:bodyPr wrap="square" lIns="0" tIns="0" rIns="0" bIns="0" rtlCol="0" anchor="ctr"/>
-          <a:lstStyle/>
-          <a:p>
-            <a:pPr algn="r" indent="0" marL="0">
-              <a:buNone/>
-            </a:pPr>
-            <a:r>
-              <a:rPr lang="en-US" sz="1800" b="1" dirty="0">
-                <a:solidFill>
-                  <a:srgbClr val="B23A48"/>
-                </a:solidFill>
-                <a:latin typeface="Courier New" pitchFamily="34" charset="0"/>
-                <a:ea typeface="Courier New" pitchFamily="34" charset="-122"/>
-                <a:cs typeface="Courier New" pitchFamily="34" charset="-120"/>
-              </a:rPr>
-              <a:t>sp</a:t>
-            </a:r>
-            <a:endParaRPr lang="en-US" sz="1800" dirty="0"/>
-          </a:p>
-        </p:txBody>
-      </p:sp>
-      <p:sp>
-        <p:nvSpPr>
-          <p:cNvPr id="26" name="Text 24"/>
-          <p:cNvSpPr txBox="1"/>
-          <p:nvPr/>
-        </p:nvSpPr>
-        <p:spPr>
-          <a:xfrm>
-            <a:off x="7589520" y="1810512"/>
-            <a:ext cx="2926080" cy="256032"/>
-          </a:xfrm>
-          <a:prstGeom prst="rect">
-            <a:avLst/>
-          </a:prstGeom>
-          <a:noFill/>
-          <a:ln/>
-        </p:spPr>
-        <p:txBody>
-          <a:bodyPr wrap="square" lIns="0" tIns="0" rIns="0" bIns="0" rtlCol="0" anchor="t"/>
-          <a:lstStyle/>
-          <a:p>
-            <a:pPr algn="ctr" indent="0" marL="0">
-              <a:buNone/>
-            </a:pPr>
-            <a:r>
-              <a:rPr lang="en-US" sz="1150" i="1" dirty="0">
-                <a:solidFill>
-                  <a:srgbClr val="5B6B78"/>
-                </a:solidFill>
-                <a:latin typeface="Calibri" pitchFamily="34" charset="0"/>
-                <a:ea typeface="Calibri" pitchFamily="34" charset="-122"/>
-                <a:cs typeface="Calibri" pitchFamily="34" charset="-120"/>
-              </a:rPr>
-              <a:t>indirizzi più alti</a:t>
-            </a:r>
-            <a:endParaRPr lang="en-US" sz="1150" dirty="0"/>
-          </a:p>
-        </p:txBody>
-      </p:sp>
-      <p:sp>
-        <p:nvSpPr>
-          <p:cNvPr id="27" name="Text 25"/>
-          <p:cNvSpPr txBox="1"/>
-          <p:nvPr/>
-        </p:nvSpPr>
-        <p:spPr>
-          <a:xfrm>
-            <a:off x="7040880" y="5120640"/>
-            <a:ext cx="4754880" cy="640080"/>
-          </a:xfrm>
-          <a:prstGeom prst="rect">
-            <a:avLst/>
-          </a:prstGeom>
-          <a:noFill/>
-          <a:ln/>
-        </p:spPr>
-        <p:txBody>
-          <a:bodyPr wrap="square" lIns="0" tIns="0" rIns="0" bIns="0" rtlCol="0" anchor="t"/>
-          <a:lstStyle/>
-          <a:p>
-            <a:pPr indent="0" marL="0">
-              <a:buNone/>
-            </a:pPr>
-            <a:r>
-              <a:rPr lang="en-US" sz="1400" dirty="0">
-                <a:solidFill>
-                  <a:srgbClr val="1B2530"/>
-                </a:solidFill>
-                <a:latin typeface="Calibri" pitchFamily="34" charset="0"/>
-                <a:ea typeface="Calibri" pitchFamily="34" charset="-122"/>
-                <a:cs typeface="Calibri" pitchFamily="34" charset="-120"/>
-              </a:rPr>
-              <a:t>Lo stack cresce verso il basso: si sottrae da sp per allocare, si somma per rilasciare.</a:t>
-            </a:r>
-            <a:endParaRPr lang="en-US" sz="1400" dirty="0"/>
-          </a:p>
-        </p:txBody>
-      </p:sp>
-      <p:sp>
-        <p:nvSpPr>
-          <p:cNvPr id="28" name="Shape 26"/>
-          <p:cNvSpPr/>
-          <p:nvPr/>
-        </p:nvSpPr>
-        <p:spPr>
-          <a:xfrm>
-            <a:off x="7291654" y="91440"/>
-            <a:ext cx="4351401" cy="274320"/>
-          </a:xfrm>
-          <a:prstGeom prst="rect">
-            <a:avLst/>
-          </a:prstGeom>
-          <a:solidFill>
-            <a:srgbClr val="F3E8FF"/>
-          </a:solidFill>
-          <a:ln w="12700">
-            <a:solidFill>
-              <a:srgbClr val="7E22CE"/>
-            </a:solidFill>
-            <a:prstDash val="dash"/>
-          </a:ln>
-        </p:spPr>
-      </p:sp>
-      <p:sp>
-        <p:nvSpPr>
-          <p:cNvPr id="29" name="Shape 27"/>
-          <p:cNvSpPr/>
-          <p:nvPr/>
-        </p:nvSpPr>
-        <p:spPr>
-          <a:xfrm>
-            <a:off x="7319086" y="128016"/>
-            <a:ext cx="45720" cy="45720"/>
-          </a:xfrm>
-          <a:prstGeom prst="rect">
-            <a:avLst/>
-          </a:prstGeom>
-          <a:solidFill>
-            <a:srgbClr val="7E22CE"/>
-          </a:solidFill>
-          <a:ln w="12700">
-            <a:solidFill>
-              <a:srgbClr val="7E22CE"/>
-            </a:solidFill>
-            <a:prstDash val="solid"/>
-          </a:ln>
-        </p:spPr>
-      </p:sp>
-      <p:sp>
-        <p:nvSpPr>
-          <p:cNvPr id="30" name="Shape 28"/>
-          <p:cNvSpPr/>
-          <p:nvPr/>
-        </p:nvSpPr>
-        <p:spPr>
-          <a:xfrm>
-            <a:off x="7319086" y="205740"/>
-            <a:ext cx="45720" cy="45720"/>
-          </a:xfrm>
-          <a:prstGeom prst="rect">
-            <a:avLst/>
-          </a:prstGeom>
-          <a:solidFill>
-            <a:srgbClr val="7E22CE"/>
-          </a:solidFill>
-          <a:ln w="12700">
-            <a:solidFill>
-              <a:srgbClr val="7E22CE"/>
-            </a:solidFill>
-            <a:prstDash val="solid"/>
-          </a:ln>
-        </p:spPr>
-      </p:sp>
-      <p:sp>
-        <p:nvSpPr>
-          <p:cNvPr id="31" name="Shape 29"/>
-          <p:cNvSpPr/>
-          <p:nvPr/>
-        </p:nvSpPr>
-        <p:spPr>
-          <a:xfrm>
-            <a:off x="7319086" y="283464"/>
-            <a:ext cx="45720" cy="45720"/>
-          </a:xfrm>
-          <a:prstGeom prst="rect">
-            <a:avLst/>
-          </a:prstGeom>
-          <a:solidFill>
-            <a:srgbClr val="7E22CE"/>
-          </a:solidFill>
-          <a:ln w="12700">
-            <a:solidFill>
-              <a:srgbClr val="7E22CE"/>
-            </a:solidFill>
-            <a:prstDash val="solid"/>
-          </a:ln>
-        </p:spPr>
-      </p:sp>
-      <p:pic>
-        <p:nvPicPr>
-          <p:cNvPr id="32" name="Image 0" descr="preencoded.png">    </p:cNvPr>
-          <p:cNvPicPr>
-            <a:picLocks noChangeAspect="1"/>
-          </p:cNvPicPr>
-          <p:nvPr/>
-        </p:nvPicPr>
-        <p:blipFill>
-          <a:blip r:embed="rId1"/>
-          <a:stretch>
-            <a:fillRect/>
-          </a:stretch>
-        </p:blipFill>
-        <p:spPr>
-          <a:xfrm>
-            <a:off x="7419670" y="128016"/>
-            <a:ext cx="201168" cy="201168"/>
-          </a:xfrm>
-          <a:prstGeom prst="rect">
-            <a:avLst/>
-          </a:prstGeom>
-        </p:spPr>
-      </p:pic>
-      <p:sp>
-        <p:nvSpPr>
-          <p:cNvPr id="33" name="Text 30"/>
-          <p:cNvSpPr txBox="1"/>
-          <p:nvPr/>
-        </p:nvSpPr>
-        <p:spPr>
-          <a:xfrm>
-            <a:off x="7675702" y="91440"/>
-            <a:ext cx="3930777" cy="274320"/>
-          </a:xfrm>
-          <a:prstGeom prst="rect">
-            <a:avLst/>
-          </a:prstGeom>
-          <a:noFill/>
-          <a:ln/>
-        </p:spPr>
-        <p:txBody>
-          <a:bodyPr wrap="square" lIns="0" tIns="0" rIns="0" bIns="0" rtlCol="0" anchor="ctr"/>
-          <a:lstStyle/>
-          <a:p>
-            <a:pPr indent="0" marL="0">
-              <a:buNone/>
-            </a:pPr>
-            <a:r>
-              <a:rPr lang="en-US" sz="1100" b="1" dirty="0">
-                <a:solidFill>
-                  <a:srgbClr val="6B21A8"/>
-                </a:solidFill>
-                <a:latin typeface="Calibri" pitchFamily="34" charset="0"/>
-                <a:ea typeface="Calibri" pitchFamily="34" charset="-122"/>
-                <a:cs typeface="Calibri" pitchFamily="34" charset="-120"/>
-              </a:rPr>
-              <a:t>DA COMPRENDERE PIÙ AVANTI</a:t>
-            </a:r>
-            <a:pPr indent="0" marL="0">
-              <a:buNone/>
-            </a:pPr>
-            <a:r>
-              <a:rPr lang="en-US" sz="1100" dirty="0">
-                <a:solidFill>
-                  <a:srgbClr val="6B21A8"/>
-                </a:solidFill>
-                <a:latin typeface="Calibri" pitchFamily="34" charset="0"/>
-                <a:ea typeface="Calibri" pitchFamily="34" charset="-122"/>
-                <a:cs typeface="Calibri" pitchFamily="34" charset="-120"/>
-              </a:rPr>
-              <a:t> · la pila</a:t>
-            </a:r>
-            <a:pPr indent="0" marL="0">
-              <a:buNone/>
-            </a:pPr>
-            <a:r>
-              <a:rPr lang="en-US" sz="1100" b="1" dirty="0">
-                <a:solidFill>
-                  <a:srgbClr val="6B21A8"/>
-                </a:solidFill>
-                <a:latin typeface="Calibri" pitchFamily="34" charset="0"/>
-                <a:ea typeface="Calibri" pitchFamily="34" charset="-122"/>
-                <a:cs typeface="Calibri" pitchFamily="34" charset="-120"/>
-              </a:rPr>
-              <a:t> → Lezione 18</a:t>
-            </a:r>
-            <a:endParaRPr lang="en-US" sz="1100" dirty="0"/>
-          </a:p>
-        </p:txBody>
-      </p:sp>
-      <p:sp>
-        <p:nvSpPr>
-          <p:cNvPr id="34" name="Shape 31"/>
-          <p:cNvSpPr/>
-          <p:nvPr/>
-        </p:nvSpPr>
-        <p:spPr>
-          <a:xfrm>
-            <a:off x="3590493" y="91440"/>
-            <a:ext cx="3591433" cy="274320"/>
-          </a:xfrm>
-          <a:prstGeom prst="rect">
-            <a:avLst/>
-          </a:prstGeom>
-          <a:solidFill>
-            <a:srgbClr val="E0F2FE"/>
-          </a:solidFill>
-          <a:ln w="12700">
-            <a:solidFill>
-              <a:srgbClr val="0369A1"/>
-            </a:solidFill>
-            <a:prstDash val="solid"/>
-          </a:ln>
-        </p:spPr>
-      </p:sp>
-      <p:sp>
-        <p:nvSpPr>
-          <p:cNvPr id="35" name="Shape 32"/>
-          <p:cNvSpPr/>
-          <p:nvPr/>
-        </p:nvSpPr>
-        <p:spPr>
-          <a:xfrm>
-            <a:off x="3590493" y="91440"/>
-            <a:ext cx="73152" cy="274320"/>
-          </a:xfrm>
-          <a:prstGeom prst="rect">
-            <a:avLst/>
-          </a:prstGeom>
-          <a:solidFill>
-            <a:srgbClr val="0369A1"/>
-          </a:solidFill>
-          <a:ln w="12700">
-            <a:solidFill>
-              <a:srgbClr val="0369A1"/>
-            </a:solidFill>
-            <a:prstDash val="solid"/>
-          </a:ln>
-        </p:spPr>
-      </p:sp>
-      <p:pic>
-        <p:nvPicPr>
-          <p:cNvPr id="36" name="Image 1" descr="preencoded.png">    </p:cNvPr>
-          <p:cNvPicPr>
-            <a:picLocks noChangeAspect="1"/>
-          </p:cNvPicPr>
-          <p:nvPr/>
-        </p:nvPicPr>
-        <p:blipFill>
-          <a:blip r:embed="rId2"/>
-          <a:stretch>
-            <a:fillRect/>
-          </a:stretch>
-        </p:blipFill>
-        <p:spPr>
-          <a:xfrm>
-            <a:off x="3718509" y="128016"/>
-            <a:ext cx="201168" cy="201168"/>
-          </a:xfrm>
-          <a:prstGeom prst="rect">
-            <a:avLst/>
-          </a:prstGeom>
-        </p:spPr>
-      </p:pic>
-      <p:sp>
-        <p:nvSpPr>
-          <p:cNvPr id="37" name="Text 33"/>
-          <p:cNvSpPr txBox="1"/>
-          <p:nvPr/>
-        </p:nvSpPr>
-        <p:spPr>
-          <a:xfrm>
-            <a:off x="3974541" y="91440"/>
-            <a:ext cx="3170809" cy="274320"/>
-          </a:xfrm>
-          <a:prstGeom prst="rect">
-            <a:avLst/>
-          </a:prstGeom>
-          <a:noFill/>
-          <a:ln/>
-        </p:spPr>
-        <p:txBody>
-          <a:bodyPr wrap="square" lIns="0" tIns="0" rIns="0" bIns="0" rtlCol="0" anchor="ctr"/>
-          <a:lstStyle/>
-          <a:p>
-            <a:pPr indent="0" marL="0">
-              <a:buNone/>
-            </a:pPr>
-            <a:r>
-              <a:rPr lang="en-US" sz="1100" b="1" dirty="0">
-                <a:solidFill>
-                  <a:srgbClr val="075985"/>
-                </a:solidFill>
-                <a:latin typeface="Calibri" pitchFamily="34" charset="0"/>
-                <a:ea typeface="Calibri" pitchFamily="34" charset="-122"/>
-                <a:cs typeface="Calibri" pitchFamily="34" charset="-120"/>
-              </a:rPr>
-              <a:t>DA COMPRENDERE OGGI</a:t>
-            </a:r>
-            <a:pPr indent="0" marL="0">
-              <a:buNone/>
-            </a:pPr>
-            <a:r>
-              <a:rPr lang="en-US" sz="1100" dirty="0">
-                <a:solidFill>
-                  <a:srgbClr val="075985"/>
-                </a:solidFill>
-                <a:latin typeface="Calibri" pitchFamily="34" charset="0"/>
-                <a:ea typeface="Calibri" pitchFamily="34" charset="-122"/>
-                <a:cs typeface="Calibri" pitchFamily="34" charset="-120"/>
-              </a:rPr>
-              <a:t> · perché si salva ra</a:t>
             </a:r>
             <a:endParaRPr lang="en-US" sz="1100" dirty="0"/>
           </a:p>
